--- a/content/47-sb-demo/slides.pptx
+++ b/content/47-sb-demo/slides.pptx
@@ -3110,7 +3110,7 @@
             <a:avLst/>
           </a:prstGeom>
           <a:solidFill>
-            <a:srgbClr val="141414"/>
+            <a:srgbClr val="1E1E1E"/>
           </a:solidFill>
           <a:ln>
             <a:noFill/>
@@ -3141,14 +3141,190 @@
       </p:sp>
       <p:sp>
         <p:nvSpPr>
-          <p:cNvPr id="3" name="TextBox 2"/>
+          <p:cNvPr id="3" name="Rectangle 2"/>
+          <p:cNvSpPr/>
+          <p:nvPr/>
+        </p:nvSpPr>
+        <p:spPr>
+          <a:xfrm>
+            <a:off x="0" y="0"/>
+            <a:ext cx="12191695" cy="457200"/>
+          </a:xfrm>
+          <a:prstGeom prst="rect">
+            <a:avLst/>
+          </a:prstGeom>
+          <a:solidFill>
+            <a:srgbClr val="323232"/>
+          </a:solidFill>
+          <a:ln>
+            <a:noFill/>
+          </a:ln>
+          <a:effectLst/>
+        </p:spPr>
+        <p:style>
+          <a:lnRef idx="1">
+            <a:schemeClr val="accent1"/>
+          </a:lnRef>
+          <a:fillRef idx="3">
+            <a:schemeClr val="accent1"/>
+          </a:fillRef>
+          <a:effectRef idx="2">
+            <a:schemeClr val="accent1"/>
+          </a:effectRef>
+          <a:fontRef idx="minor">
+            <a:schemeClr val="lt1"/>
+          </a:fontRef>
+        </p:style>
+        <p:txBody>
+          <a:bodyPr rtlCol="0" anchor="ctr"/>
+          <a:lstStyle/>
+          <a:p>
+            <a:pPr algn="ctr"/>
+          </a:p>
+        </p:txBody>
+      </p:sp>
+      <p:sp>
+        <p:nvSpPr>
+          <p:cNvPr id="4" name="Oval 3"/>
+          <p:cNvSpPr/>
+          <p:nvPr/>
+        </p:nvSpPr>
+        <p:spPr>
+          <a:xfrm>
+            <a:off x="256032" y="155448"/>
+            <a:ext cx="155448" cy="155448"/>
+          </a:xfrm>
+          <a:prstGeom prst="ellipse">
+            <a:avLst/>
+          </a:prstGeom>
+          <a:solidFill>
+            <a:srgbClr val="FF5F56"/>
+          </a:solidFill>
+          <a:ln>
+            <a:noFill/>
+          </a:ln>
+          <a:effectLst/>
+        </p:spPr>
+        <p:style>
+          <a:lnRef idx="1">
+            <a:schemeClr val="accent1"/>
+          </a:lnRef>
+          <a:fillRef idx="3">
+            <a:schemeClr val="accent1"/>
+          </a:fillRef>
+          <a:effectRef idx="2">
+            <a:schemeClr val="accent1"/>
+          </a:effectRef>
+          <a:fontRef idx="minor">
+            <a:schemeClr val="lt1"/>
+          </a:fontRef>
+        </p:style>
+        <p:txBody>
+          <a:bodyPr rtlCol="0" anchor="ctr"/>
+          <a:lstStyle/>
+          <a:p>
+            <a:pPr algn="ctr"/>
+          </a:p>
+        </p:txBody>
+      </p:sp>
+      <p:sp>
+        <p:nvSpPr>
+          <p:cNvPr id="5" name="Oval 4"/>
+          <p:cNvSpPr/>
+          <p:nvPr/>
+        </p:nvSpPr>
+        <p:spPr>
+          <a:xfrm>
+            <a:off x="548640" y="155448"/>
+            <a:ext cx="155448" cy="155448"/>
+          </a:xfrm>
+          <a:prstGeom prst="ellipse">
+            <a:avLst/>
+          </a:prstGeom>
+          <a:solidFill>
+            <a:srgbClr val="FFBD2E"/>
+          </a:solidFill>
+          <a:ln>
+            <a:noFill/>
+          </a:ln>
+          <a:effectLst/>
+        </p:spPr>
+        <p:style>
+          <a:lnRef idx="1">
+            <a:schemeClr val="accent1"/>
+          </a:lnRef>
+          <a:fillRef idx="3">
+            <a:schemeClr val="accent1"/>
+          </a:fillRef>
+          <a:effectRef idx="2">
+            <a:schemeClr val="accent1"/>
+          </a:effectRef>
+          <a:fontRef idx="minor">
+            <a:schemeClr val="lt1"/>
+          </a:fontRef>
+        </p:style>
+        <p:txBody>
+          <a:bodyPr rtlCol="0" anchor="ctr"/>
+          <a:lstStyle/>
+          <a:p>
+            <a:pPr algn="ctr"/>
+          </a:p>
+        </p:txBody>
+      </p:sp>
+      <p:sp>
+        <p:nvSpPr>
+          <p:cNvPr id="6" name="Oval 5"/>
+          <p:cNvSpPr/>
+          <p:nvPr/>
+        </p:nvSpPr>
+        <p:spPr>
+          <a:xfrm>
+            <a:off x="841248" y="155448"/>
+            <a:ext cx="155448" cy="155448"/>
+          </a:xfrm>
+          <a:prstGeom prst="ellipse">
+            <a:avLst/>
+          </a:prstGeom>
+          <a:solidFill>
+            <a:srgbClr val="27C93F"/>
+          </a:solidFill>
+          <a:ln>
+            <a:noFill/>
+          </a:ln>
+          <a:effectLst/>
+        </p:spPr>
+        <p:style>
+          <a:lnRef idx="1">
+            <a:schemeClr val="accent1"/>
+          </a:lnRef>
+          <a:fillRef idx="3">
+            <a:schemeClr val="accent1"/>
+          </a:fillRef>
+          <a:effectRef idx="2">
+            <a:schemeClr val="accent1"/>
+          </a:effectRef>
+          <a:fontRef idx="minor">
+            <a:schemeClr val="lt1"/>
+          </a:fontRef>
+        </p:style>
+        <p:txBody>
+          <a:bodyPr rtlCol="0" anchor="ctr"/>
+          <a:lstStyle/>
+          <a:p>
+            <a:pPr algn="ctr"/>
+          </a:p>
+        </p:txBody>
+      </p:sp>
+      <p:sp>
+        <p:nvSpPr>
+          <p:cNvPr id="7" name="TextBox 6"/>
           <p:cNvSpPr txBox="1"/>
           <p:nvPr/>
         </p:nvSpPr>
         <p:spPr>
           <a:xfrm>
-            <a:off x="822960" y="1920240"/>
-            <a:ext cx="10607040" cy="3108960"/>
+            <a:off x="1371600" y="45720"/>
+            <a:ext cx="5486400" cy="365760"/>
           </a:xfrm>
           <a:prstGeom prst="rect">
             <a:avLst/>
@@ -3156,80 +3332,707 @@
           <a:noFill/>
         </p:spPr>
         <p:txBody>
-          <a:bodyPr wrap="square">
+          <a:bodyPr wrap="square" anchor="ctr" lIns="0" rIns="0" tIns="0" bIns="0">
             <a:spAutoFit/>
           </a:bodyPr>
           <a:lstStyle/>
           <a:p>
-            <a:pPr algn="l">
-              <a:spcAft>
-                <a:spcPts val="1600"/>
-              </a:spcAft>
-            </a:pPr>
-            <a:r>
-              <a:rPr sz="2200" b="1">
-                <a:solidFill>
-                  <a:srgbClr val="E87A3E"/>
-                </a:solidFill>
-                <a:latin typeface="Hiragino Kaku Gothic Pro"/>
-                <a:ea typeface="Hiragino Kaku Gothic Pro"/>
-                <a:cs typeface="Hiragino Kaku Gothic Pro"/>
-              </a:rPr>
-              <a:t>第二の脳の作り方 ｜ 実演デモ</a:t>
-            </a:r>
-          </a:p>
-          <a:p>
-            <a:pPr algn="l">
-              <a:spcAft>
-                <a:spcPts val="800"/>
-              </a:spcAft>
-            </a:pPr>
-            <a:r>
-              <a:rPr sz="4200" b="1">
-                <a:solidFill>
-                  <a:srgbClr val="F5F3F0"/>
-                </a:solidFill>
-                <a:latin typeface="Hiragino Kaku Gothic Pro"/>
-                <a:ea typeface="Hiragino Kaku Gothic Pro"/>
-                <a:cs typeface="Hiragino Kaku Gothic Pro"/>
-              </a:rPr>
-              <a:t>第二の脳の「1日」を動かす</a:t>
-            </a:r>
-          </a:p>
-          <a:p>
-            <a:pPr algn="l">
-              <a:spcAft>
-                <a:spcPts val="1800"/>
-              </a:spcAft>
-            </a:pPr>
-            <a:r>
-              <a:rPr sz="2500" b="0">
-                <a:solidFill>
-                  <a:srgbClr val="F5F3F0"/>
-                </a:solidFill>
-                <a:latin typeface="Hiragino Kaku Gothic Pro"/>
-                <a:ea typeface="Hiragino Kaku Gothic Pro"/>
-                <a:cs typeface="Hiragino Kaku Gothic Pro"/>
-              </a:rPr>
-              <a:t>― 画面で、実際にやってみる</a:t>
-            </a:r>
-          </a:p>
-          <a:p>
-            <a:pPr algn="l">
-              <a:spcAft>
-                <a:spcPts val="800"/>
-              </a:spcAft>
-            </a:pPr>
-            <a:r>
-              <a:rPr sz="1800" b="0">
-                <a:solidFill>
-                  <a:srgbClr val="9A948C"/>
-                </a:solidFill>
-                <a:latin typeface="Hiragino Kaku Gothic Pro"/>
-                <a:ea typeface="Hiragino Kaku Gothic Pro"/>
-                <a:cs typeface="Hiragino Kaku Gothic Pro"/>
-              </a:rPr>
-              <a:t>株式会社pipon｜pipon learning</a:t>
+            <a:pPr algn="l"/>
+            <a:r>
+              <a:rPr sz="1300" b="0">
+                <a:solidFill>
+                  <a:srgbClr val="8A8A8A"/>
+                </a:solidFill>
+                <a:latin typeface="Hiragino Kaku Gothic Pro"/>
+                <a:ea typeface="Hiragino Kaku Gothic Pro"/>
+                <a:cs typeface="Hiragino Kaku Gothic Pro"/>
+              </a:rPr>
+              <a:t>Obsidian — 第二の脳</a:t>
+            </a:r>
+          </a:p>
+        </p:txBody>
+      </p:sp>
+      <p:sp>
+        <p:nvSpPr>
+          <p:cNvPr id="8" name="Rectangle 7"/>
+          <p:cNvSpPr/>
+          <p:nvPr/>
+        </p:nvSpPr>
+        <p:spPr>
+          <a:xfrm>
+            <a:off x="0" y="457200"/>
+            <a:ext cx="3108960" cy="6400800"/>
+          </a:xfrm>
+          <a:prstGeom prst="rect">
+            <a:avLst/>
+          </a:prstGeom>
+          <a:solidFill>
+            <a:srgbClr val="262626"/>
+          </a:solidFill>
+          <a:ln>
+            <a:noFill/>
+          </a:ln>
+          <a:effectLst/>
+        </p:spPr>
+        <p:style>
+          <a:lnRef idx="1">
+            <a:schemeClr val="accent1"/>
+          </a:lnRef>
+          <a:fillRef idx="3">
+            <a:schemeClr val="accent1"/>
+          </a:fillRef>
+          <a:effectRef idx="2">
+            <a:schemeClr val="accent1"/>
+          </a:effectRef>
+          <a:fontRef idx="minor">
+            <a:schemeClr val="lt1"/>
+          </a:fontRef>
+        </p:style>
+        <p:txBody>
+          <a:bodyPr rtlCol="0" anchor="ctr"/>
+          <a:lstStyle/>
+          <a:p>
+            <a:pPr algn="ctr"/>
+          </a:p>
+        </p:txBody>
+      </p:sp>
+      <p:sp>
+        <p:nvSpPr>
+          <p:cNvPr id="9" name="TextBox 8"/>
+          <p:cNvSpPr txBox="1"/>
+          <p:nvPr/>
+        </p:nvSpPr>
+        <p:spPr>
+          <a:xfrm>
+            <a:off x="274320" y="566928"/>
+            <a:ext cx="2743200" cy="274320"/>
+          </a:xfrm>
+          <a:prstGeom prst="rect">
+            <a:avLst/>
+          </a:prstGeom>
+          <a:noFill/>
+        </p:spPr>
+        <p:txBody>
+          <a:bodyPr wrap="square" anchor="t" lIns="0" rIns="0" tIns="0" bIns="0">
+            <a:spAutoFit/>
+          </a:bodyPr>
+          <a:lstStyle/>
+          <a:p>
+            <a:pPr algn="l"/>
+            <a:r>
+              <a:rPr sz="1100" b="1">
+                <a:solidFill>
+                  <a:srgbClr val="8A8A8A"/>
+                </a:solidFill>
+                <a:latin typeface="Hiragino Kaku Gothic Pro"/>
+                <a:ea typeface="Hiragino Kaku Gothic Pro"/>
+                <a:cs typeface="Hiragino Kaku Gothic Pro"/>
+              </a:rPr>
+              <a:t>VAULT ／ 第二の脳</a:t>
+            </a:r>
+          </a:p>
+        </p:txBody>
+      </p:sp>
+      <p:sp>
+        <p:nvSpPr>
+          <p:cNvPr id="10" name="TextBox 9"/>
+          <p:cNvSpPr txBox="1"/>
+          <p:nvPr/>
+        </p:nvSpPr>
+        <p:spPr>
+          <a:xfrm>
+            <a:off x="384048" y="987552"/>
+            <a:ext cx="2651760" cy="365760"/>
+          </a:xfrm>
+          <a:prstGeom prst="rect">
+            <a:avLst/>
+          </a:prstGeom>
+          <a:noFill/>
+        </p:spPr>
+        <p:txBody>
+          <a:bodyPr wrap="square" anchor="ctr" lIns="0" rIns="0" tIns="0" bIns="0">
+            <a:spAutoFit/>
+          </a:bodyPr>
+          <a:lstStyle/>
+          <a:p>
+            <a:pPr algn="l"/>
+            <a:r>
+              <a:rPr sz="1300" b="0">
+                <a:solidFill>
+                  <a:srgbClr val="8A8A8A"/>
+                </a:solidFill>
+                <a:latin typeface="Hiragino Kaku Gothic Pro"/>
+                <a:ea typeface="Hiragino Kaku Gothic Pro"/>
+                <a:cs typeface="Hiragino Kaku Gothic Pro"/>
+              </a:rPr>
+              <a:t/>
+            </a:r>
+            <a:r>
+              <a:rPr sz="1300" b="0">
+                <a:solidFill>
+                  <a:srgbClr val="8A8A8A"/>
+                </a:solidFill>
+                <a:latin typeface="Hiragino Kaku Gothic Pro"/>
+                <a:ea typeface="Hiragino Kaku Gothic Pro"/>
+                <a:cs typeface="Hiragino Kaku Gothic Pro"/>
+              </a:rPr>
+              <a:t>00_Inbox</a:t>
+            </a:r>
+          </a:p>
+        </p:txBody>
+      </p:sp>
+      <p:sp>
+        <p:nvSpPr>
+          <p:cNvPr id="11" name="TextBox 10"/>
+          <p:cNvSpPr txBox="1"/>
+          <p:nvPr/>
+        </p:nvSpPr>
+        <p:spPr>
+          <a:xfrm>
+            <a:off x="384048" y="1444752"/>
+            <a:ext cx="2651760" cy="365760"/>
+          </a:xfrm>
+          <a:prstGeom prst="rect">
+            <a:avLst/>
+          </a:prstGeom>
+          <a:noFill/>
+        </p:spPr>
+        <p:txBody>
+          <a:bodyPr wrap="square" anchor="ctr" lIns="0" rIns="0" tIns="0" bIns="0">
+            <a:spAutoFit/>
+          </a:bodyPr>
+          <a:lstStyle/>
+          <a:p>
+            <a:pPr algn="l"/>
+            <a:r>
+              <a:rPr sz="1300" b="0">
+                <a:solidFill>
+                  <a:srgbClr val="8A8A8A"/>
+                </a:solidFill>
+                <a:latin typeface="Hiragino Kaku Gothic Pro"/>
+                <a:ea typeface="Hiragino Kaku Gothic Pro"/>
+                <a:cs typeface="Hiragino Kaku Gothic Pro"/>
+              </a:rPr>
+              <a:t/>
+            </a:r>
+            <a:r>
+              <a:rPr sz="1300" b="0">
+                <a:solidFill>
+                  <a:srgbClr val="8A8A8A"/>
+                </a:solidFill>
+                <a:latin typeface="Hiragino Kaku Gothic Pro"/>
+                <a:ea typeface="Hiragino Kaku Gothic Pro"/>
+                <a:cs typeface="Hiragino Kaku Gothic Pro"/>
+              </a:rPr>
+              <a:t>10_Daily</a:t>
+            </a:r>
+          </a:p>
+        </p:txBody>
+      </p:sp>
+      <p:sp>
+        <p:nvSpPr>
+          <p:cNvPr id="12" name="TextBox 11"/>
+          <p:cNvSpPr txBox="1"/>
+          <p:nvPr/>
+        </p:nvSpPr>
+        <p:spPr>
+          <a:xfrm>
+            <a:off x="384048" y="1901952"/>
+            <a:ext cx="2651760" cy="365760"/>
+          </a:xfrm>
+          <a:prstGeom prst="rect">
+            <a:avLst/>
+          </a:prstGeom>
+          <a:noFill/>
+        </p:spPr>
+        <p:txBody>
+          <a:bodyPr wrap="square" anchor="ctr" lIns="0" rIns="0" tIns="0" bIns="0">
+            <a:spAutoFit/>
+          </a:bodyPr>
+          <a:lstStyle/>
+          <a:p>
+            <a:pPr algn="l"/>
+            <a:r>
+              <a:rPr sz="1300" b="0">
+                <a:solidFill>
+                  <a:srgbClr val="8A8A8A"/>
+                </a:solidFill>
+                <a:latin typeface="Hiragino Kaku Gothic Pro"/>
+                <a:ea typeface="Hiragino Kaku Gothic Pro"/>
+                <a:cs typeface="Hiragino Kaku Gothic Pro"/>
+              </a:rPr>
+              <a:t/>
+            </a:r>
+            <a:r>
+              <a:rPr sz="1300" b="0">
+                <a:solidFill>
+                  <a:srgbClr val="8A8A8A"/>
+                </a:solidFill>
+                <a:latin typeface="Hiragino Kaku Gothic Pro"/>
+                <a:ea typeface="Hiragino Kaku Gothic Pro"/>
+                <a:cs typeface="Hiragino Kaku Gothic Pro"/>
+              </a:rPr>
+              <a:t>20_Projects</a:t>
+            </a:r>
+          </a:p>
+        </p:txBody>
+      </p:sp>
+      <p:sp>
+        <p:nvSpPr>
+          <p:cNvPr id="13" name="TextBox 12"/>
+          <p:cNvSpPr txBox="1"/>
+          <p:nvPr/>
+        </p:nvSpPr>
+        <p:spPr>
+          <a:xfrm>
+            <a:off x="384048" y="2359152"/>
+            <a:ext cx="2651760" cy="365760"/>
+          </a:xfrm>
+          <a:prstGeom prst="rect">
+            <a:avLst/>
+          </a:prstGeom>
+          <a:noFill/>
+        </p:spPr>
+        <p:txBody>
+          <a:bodyPr wrap="square" anchor="ctr" lIns="0" rIns="0" tIns="0" bIns="0">
+            <a:spAutoFit/>
+          </a:bodyPr>
+          <a:lstStyle/>
+          <a:p>
+            <a:pPr algn="l"/>
+            <a:r>
+              <a:rPr sz="1300" b="0">
+                <a:solidFill>
+                  <a:srgbClr val="8A8A8A"/>
+                </a:solidFill>
+                <a:latin typeface="Hiragino Kaku Gothic Pro"/>
+                <a:ea typeface="Hiragino Kaku Gothic Pro"/>
+                <a:cs typeface="Hiragino Kaku Gothic Pro"/>
+              </a:rPr>
+              <a:t/>
+            </a:r>
+            <a:r>
+              <a:rPr sz="1300" b="0">
+                <a:solidFill>
+                  <a:srgbClr val="8A8A8A"/>
+                </a:solidFill>
+                <a:latin typeface="Hiragino Kaku Gothic Pro"/>
+                <a:ea typeface="Hiragino Kaku Gothic Pro"/>
+                <a:cs typeface="Hiragino Kaku Gothic Pro"/>
+              </a:rPr>
+              <a:t>30_Areas</a:t>
+            </a:r>
+          </a:p>
+        </p:txBody>
+      </p:sp>
+      <p:sp>
+        <p:nvSpPr>
+          <p:cNvPr id="14" name="TextBox 13"/>
+          <p:cNvSpPr txBox="1"/>
+          <p:nvPr/>
+        </p:nvSpPr>
+        <p:spPr>
+          <a:xfrm>
+            <a:off x="384048" y="2816352"/>
+            <a:ext cx="2651760" cy="365760"/>
+          </a:xfrm>
+          <a:prstGeom prst="rect">
+            <a:avLst/>
+          </a:prstGeom>
+          <a:noFill/>
+        </p:spPr>
+        <p:txBody>
+          <a:bodyPr wrap="square" anchor="ctr" lIns="0" rIns="0" tIns="0" bIns="0">
+            <a:spAutoFit/>
+          </a:bodyPr>
+          <a:lstStyle/>
+          <a:p>
+            <a:pPr algn="l"/>
+            <a:r>
+              <a:rPr sz="1300" b="0">
+                <a:solidFill>
+                  <a:srgbClr val="8A8A8A"/>
+                </a:solidFill>
+                <a:latin typeface="Hiragino Kaku Gothic Pro"/>
+                <a:ea typeface="Hiragino Kaku Gothic Pro"/>
+                <a:cs typeface="Hiragino Kaku Gothic Pro"/>
+              </a:rPr>
+              <a:t/>
+            </a:r>
+            <a:r>
+              <a:rPr sz="1300" b="0">
+                <a:solidFill>
+                  <a:srgbClr val="8A8A8A"/>
+                </a:solidFill>
+                <a:latin typeface="Hiragino Kaku Gothic Pro"/>
+                <a:ea typeface="Hiragino Kaku Gothic Pro"/>
+                <a:cs typeface="Hiragino Kaku Gothic Pro"/>
+              </a:rPr>
+              <a:t>40_Resources</a:t>
+            </a:r>
+          </a:p>
+        </p:txBody>
+      </p:sp>
+      <p:sp>
+        <p:nvSpPr>
+          <p:cNvPr id="15" name="TextBox 14"/>
+          <p:cNvSpPr txBox="1"/>
+          <p:nvPr/>
+        </p:nvSpPr>
+        <p:spPr>
+          <a:xfrm>
+            <a:off x="384048" y="3273552"/>
+            <a:ext cx="2651760" cy="365760"/>
+          </a:xfrm>
+          <a:prstGeom prst="rect">
+            <a:avLst/>
+          </a:prstGeom>
+          <a:noFill/>
+        </p:spPr>
+        <p:txBody>
+          <a:bodyPr wrap="square" anchor="ctr" lIns="0" rIns="0" tIns="0" bIns="0">
+            <a:spAutoFit/>
+          </a:bodyPr>
+          <a:lstStyle/>
+          <a:p>
+            <a:pPr algn="l"/>
+            <a:r>
+              <a:rPr sz="1300" b="0">
+                <a:solidFill>
+                  <a:srgbClr val="8A8A8A"/>
+                </a:solidFill>
+                <a:latin typeface="Hiragino Kaku Gothic Pro"/>
+                <a:ea typeface="Hiragino Kaku Gothic Pro"/>
+                <a:cs typeface="Hiragino Kaku Gothic Pro"/>
+              </a:rPr>
+              <a:t/>
+            </a:r>
+            <a:r>
+              <a:rPr sz="1300" b="0">
+                <a:solidFill>
+                  <a:srgbClr val="8A8A8A"/>
+                </a:solidFill>
+                <a:latin typeface="Hiragino Kaku Gothic Pro"/>
+                <a:ea typeface="Hiragino Kaku Gothic Pro"/>
+                <a:cs typeface="Hiragino Kaku Gothic Pro"/>
+              </a:rPr>
+              <a:t>50_PermanentNotes</a:t>
+            </a:r>
+          </a:p>
+        </p:txBody>
+      </p:sp>
+      <p:sp>
+        <p:nvSpPr>
+          <p:cNvPr id="16" name="TextBox 15"/>
+          <p:cNvSpPr txBox="1"/>
+          <p:nvPr/>
+        </p:nvSpPr>
+        <p:spPr>
+          <a:xfrm>
+            <a:off x="384048" y="3730752"/>
+            <a:ext cx="2651760" cy="365760"/>
+          </a:xfrm>
+          <a:prstGeom prst="rect">
+            <a:avLst/>
+          </a:prstGeom>
+          <a:noFill/>
+        </p:spPr>
+        <p:txBody>
+          <a:bodyPr wrap="square" anchor="ctr" lIns="0" rIns="0" tIns="0" bIns="0">
+            <a:spAutoFit/>
+          </a:bodyPr>
+          <a:lstStyle/>
+          <a:p>
+            <a:pPr algn="l"/>
+            <a:r>
+              <a:rPr sz="1300" b="0">
+                <a:solidFill>
+                  <a:srgbClr val="8A8A8A"/>
+                </a:solidFill>
+                <a:latin typeface="Hiragino Kaku Gothic Pro"/>
+                <a:ea typeface="Hiragino Kaku Gothic Pro"/>
+                <a:cs typeface="Hiragino Kaku Gothic Pro"/>
+              </a:rPr>
+              <a:t/>
+            </a:r>
+            <a:r>
+              <a:rPr sz="1300" b="0">
+                <a:solidFill>
+                  <a:srgbClr val="8A8A8A"/>
+                </a:solidFill>
+                <a:latin typeface="Hiragino Kaku Gothic Pro"/>
+                <a:ea typeface="Hiragino Kaku Gothic Pro"/>
+                <a:cs typeface="Hiragino Kaku Gothic Pro"/>
+              </a:rPr>
+              <a:t>90_Archive</a:t>
+            </a:r>
+          </a:p>
+        </p:txBody>
+      </p:sp>
+      <p:sp>
+        <p:nvSpPr>
+          <p:cNvPr id="17" name="Rounded Rectangle 16"/>
+          <p:cNvSpPr/>
+          <p:nvPr/>
+        </p:nvSpPr>
+        <p:spPr>
+          <a:xfrm>
+            <a:off x="3246120" y="566928"/>
+            <a:ext cx="8778240" cy="457200"/>
+          </a:xfrm>
+          <a:prstGeom prst="roundRect">
+            <a:avLst>
+              <a:gd name="adj" fmla="val 8000"/>
+            </a:avLst>
+          </a:prstGeom>
+          <a:solidFill>
+            <a:srgbClr val="2A2A2A"/>
+          </a:solidFill>
+          <a:ln>
+            <a:noFill/>
+          </a:ln>
+          <a:effectLst/>
+        </p:spPr>
+        <p:style>
+          <a:lnRef idx="1">
+            <a:schemeClr val="accent1"/>
+          </a:lnRef>
+          <a:fillRef idx="3">
+            <a:schemeClr val="accent1"/>
+          </a:fillRef>
+          <a:effectRef idx="2">
+            <a:schemeClr val="accent1"/>
+          </a:effectRef>
+          <a:fontRef idx="minor">
+            <a:schemeClr val="lt1"/>
+          </a:fontRef>
+        </p:style>
+        <p:txBody>
+          <a:bodyPr rtlCol="0" anchor="ctr"/>
+          <a:lstStyle/>
+          <a:p>
+            <a:pPr algn="ctr"/>
+          </a:p>
+        </p:txBody>
+      </p:sp>
+      <p:sp>
+        <p:nvSpPr>
+          <p:cNvPr id="18" name="TextBox 17"/>
+          <p:cNvSpPr txBox="1"/>
+          <p:nvPr/>
+        </p:nvSpPr>
+        <p:spPr>
+          <a:xfrm>
+            <a:off x="3429000" y="566928"/>
+            <a:ext cx="8412480" cy="457200"/>
+          </a:xfrm>
+          <a:prstGeom prst="rect">
+            <a:avLst/>
+          </a:prstGeom>
+          <a:noFill/>
+        </p:spPr>
+        <p:txBody>
+          <a:bodyPr wrap="square" anchor="ctr" lIns="0" rIns="0" tIns="0" bIns="0">
+            <a:spAutoFit/>
+          </a:bodyPr>
+          <a:lstStyle/>
+          <a:p>
+            <a:pPr algn="l"/>
+            <a:r>
+              <a:rPr sz="1300" b="0">
+                <a:solidFill>
+                  <a:srgbClr val="DCDDDE"/>
+                </a:solidFill>
+                <a:latin typeface="Hiragino Kaku Gothic Pro"/>
+                <a:ea typeface="Hiragino Kaku Gothic Pro"/>
+                <a:cs typeface="Hiragino Kaku Gothic Pro"/>
+              </a:rPr>
+              <a:t>HOME.md</a:t>
+            </a:r>
+          </a:p>
+        </p:txBody>
+      </p:sp>
+      <p:sp>
+        <p:nvSpPr>
+          <p:cNvPr id="19" name="TextBox 18"/>
+          <p:cNvSpPr txBox="1"/>
+          <p:nvPr/>
+        </p:nvSpPr>
+        <p:spPr>
+          <a:xfrm>
+            <a:off x="3429000" y="1234440"/>
+            <a:ext cx="8412480" cy="548640"/>
+          </a:xfrm>
+          <a:prstGeom prst="rect">
+            <a:avLst/>
+          </a:prstGeom>
+          <a:noFill/>
+        </p:spPr>
+        <p:txBody>
+          <a:bodyPr wrap="square" anchor="t" lIns="0" rIns="0" tIns="0" bIns="0">
+            <a:spAutoFit/>
+          </a:bodyPr>
+          <a:lstStyle/>
+          <a:p>
+            <a:pPr algn="l"/>
+            <a:r>
+              <a:rPr sz="3000" b="1">
+                <a:solidFill>
+                  <a:srgbClr val="DCDDDE"/>
+                </a:solidFill>
+                <a:latin typeface="Hiragino Kaku Gothic Pro"/>
+                <a:ea typeface="Hiragino Kaku Gothic Pro"/>
+                <a:cs typeface="Hiragino Kaku Gothic Pro"/>
+              </a:rPr>
+              <a:t>Second Brain — Home</a:t>
+            </a:r>
+          </a:p>
+        </p:txBody>
+      </p:sp>
+      <p:sp>
+        <p:nvSpPr>
+          <p:cNvPr id="20" name="TextBox 19"/>
+          <p:cNvSpPr txBox="1"/>
+          <p:nvPr/>
+        </p:nvSpPr>
+        <p:spPr>
+          <a:xfrm>
+            <a:off x="3429000" y="1920240"/>
+            <a:ext cx="8412480" cy="384048"/>
+          </a:xfrm>
+          <a:prstGeom prst="rect">
+            <a:avLst/>
+          </a:prstGeom>
+          <a:noFill/>
+        </p:spPr>
+        <p:txBody>
+          <a:bodyPr wrap="square" anchor="t" lIns="0" rIns="0" tIns="0" bIns="0">
+            <a:spAutoFit/>
+          </a:bodyPr>
+          <a:lstStyle/>
+          <a:p>
+            <a:pPr algn="l"/>
+            <a:r>
+              <a:rPr sz="1300" b="0">
+                <a:solidFill>
+                  <a:srgbClr val="8A8A8A"/>
+                </a:solidFill>
+                <a:latin typeface="Hiragino Kaku Gothic Pro"/>
+                <a:ea typeface="Hiragino Kaku Gothic Pro"/>
+                <a:cs typeface="Hiragino Kaku Gothic Pro"/>
+              </a:rPr>
+              <a:t>読むのは Obsidian、動かすのは AI（Claude Code）</a:t>
+            </a:r>
+          </a:p>
+        </p:txBody>
+      </p:sp>
+      <p:sp>
+        <p:nvSpPr>
+          <p:cNvPr id="21" name="TextBox 20"/>
+          <p:cNvSpPr txBox="1"/>
+          <p:nvPr/>
+        </p:nvSpPr>
+        <p:spPr>
+          <a:xfrm>
+            <a:off x="3429000" y="2340864"/>
+            <a:ext cx="8412480" cy="411480"/>
+          </a:xfrm>
+          <a:prstGeom prst="rect">
+            <a:avLst/>
+          </a:prstGeom>
+          <a:noFill/>
+        </p:spPr>
+        <p:txBody>
+          <a:bodyPr wrap="square" anchor="t" lIns="0" rIns="0" tIns="0" bIns="0">
+            <a:spAutoFit/>
+          </a:bodyPr>
+          <a:lstStyle/>
+          <a:p>
+            <a:pPr algn="l"/>
+            <a:r>
+              <a:rPr sz="1800" b="1">
+                <a:solidFill>
+                  <a:srgbClr val="8B7CF6"/>
+                </a:solidFill>
+                <a:latin typeface="Hiragino Kaku Gothic Pro"/>
+                <a:ea typeface="Hiragino Kaku Gothic Pro"/>
+                <a:cs typeface="Hiragino Kaku Gothic Pro"/>
+              </a:rPr>
+              <a:t>今日のクイックアクション</a:t>
+            </a:r>
+          </a:p>
+        </p:txBody>
+      </p:sp>
+      <p:sp>
+        <p:nvSpPr>
+          <p:cNvPr id="22" name="TextBox 21"/>
+          <p:cNvSpPr txBox="1"/>
+          <p:nvPr/>
+        </p:nvSpPr>
+        <p:spPr>
+          <a:xfrm>
+            <a:off x="3611880" y="2843784"/>
+            <a:ext cx="8229600" cy="384048"/>
+          </a:xfrm>
+          <a:prstGeom prst="rect">
+            <a:avLst/>
+          </a:prstGeom>
+          <a:noFill/>
+        </p:spPr>
+        <p:txBody>
+          <a:bodyPr wrap="square" anchor="t" lIns="0" rIns="0" tIns="0" bIns="0">
+            <a:spAutoFit/>
+          </a:bodyPr>
+          <a:lstStyle/>
+          <a:p>
+            <a:pPr algn="l"/>
+            <a:r>
+              <a:rPr sz="1600" b="0">
+                <a:solidFill>
+                  <a:srgbClr val="DCDDDE"/>
+                </a:solidFill>
+                <a:latin typeface="Hiragino Kaku Gothic Pro"/>
+                <a:ea typeface="Hiragino Kaku Gothic Pro"/>
+                <a:cs typeface="Hiragino Kaku Gothic Pro"/>
+              </a:rPr>
+              <a:t>・ためる → まわす → つなげる → 生かす</a:t>
+            </a:r>
+          </a:p>
+        </p:txBody>
+      </p:sp>
+      <p:sp>
+        <p:nvSpPr>
+          <p:cNvPr id="23" name="TextBox 22"/>
+          <p:cNvSpPr txBox="1"/>
+          <p:nvPr/>
+        </p:nvSpPr>
+        <p:spPr>
+          <a:xfrm>
+            <a:off x="3429000" y="3300984"/>
+            <a:ext cx="8412480" cy="384048"/>
+          </a:xfrm>
+          <a:prstGeom prst="rect">
+            <a:avLst/>
+          </a:prstGeom>
+          <a:noFill/>
+        </p:spPr>
+        <p:txBody>
+          <a:bodyPr wrap="square" anchor="t" lIns="0" rIns="0" tIns="0" bIns="0">
+            <a:spAutoFit/>
+          </a:bodyPr>
+          <a:lstStyle/>
+          <a:p>
+            <a:pPr algn="l"/>
+            <a:r>
+              <a:rPr sz="1300" b="0">
+                <a:solidFill>
+                  <a:srgbClr val="8A8A8A"/>
+                </a:solidFill>
+                <a:latin typeface="Hiragino Kaku Gothic Pro"/>
+                <a:ea typeface="Hiragino Kaku Gothic Pro"/>
+                <a:cs typeface="Hiragino Kaku Gothic Pro"/>
+              </a:rPr>
+              <a:t>左のフォルダは PARA：Inbox / Daily / Projects / Areas / Resources / PermanentNotes / Archive</a:t>
             </a:r>
           </a:p>
         </p:txBody>
@@ -3267,7 +4070,7 @@
             <a:avLst/>
           </a:prstGeom>
           <a:solidFill>
-            <a:srgbClr val="141414"/>
+            <a:srgbClr val="1E1E1E"/>
           </a:solidFill>
           <a:ln>
             <a:noFill/>
@@ -3298,14 +4101,190 @@
       </p:sp>
       <p:sp>
         <p:nvSpPr>
-          <p:cNvPr id="3" name="TextBox 2"/>
+          <p:cNvPr id="3" name="Rectangle 2"/>
+          <p:cNvSpPr/>
+          <p:nvPr/>
+        </p:nvSpPr>
+        <p:spPr>
+          <a:xfrm>
+            <a:off x="0" y="0"/>
+            <a:ext cx="12191695" cy="457200"/>
+          </a:xfrm>
+          <a:prstGeom prst="rect">
+            <a:avLst/>
+          </a:prstGeom>
+          <a:solidFill>
+            <a:srgbClr val="323232"/>
+          </a:solidFill>
+          <a:ln>
+            <a:noFill/>
+          </a:ln>
+          <a:effectLst/>
+        </p:spPr>
+        <p:style>
+          <a:lnRef idx="1">
+            <a:schemeClr val="accent1"/>
+          </a:lnRef>
+          <a:fillRef idx="3">
+            <a:schemeClr val="accent1"/>
+          </a:fillRef>
+          <a:effectRef idx="2">
+            <a:schemeClr val="accent1"/>
+          </a:effectRef>
+          <a:fontRef idx="minor">
+            <a:schemeClr val="lt1"/>
+          </a:fontRef>
+        </p:style>
+        <p:txBody>
+          <a:bodyPr rtlCol="0" anchor="ctr"/>
+          <a:lstStyle/>
+          <a:p>
+            <a:pPr algn="ctr"/>
+          </a:p>
+        </p:txBody>
+      </p:sp>
+      <p:sp>
+        <p:nvSpPr>
+          <p:cNvPr id="4" name="Oval 3"/>
+          <p:cNvSpPr/>
+          <p:nvPr/>
+        </p:nvSpPr>
+        <p:spPr>
+          <a:xfrm>
+            <a:off x="256032" y="155448"/>
+            <a:ext cx="155448" cy="155448"/>
+          </a:xfrm>
+          <a:prstGeom prst="ellipse">
+            <a:avLst/>
+          </a:prstGeom>
+          <a:solidFill>
+            <a:srgbClr val="FF5F56"/>
+          </a:solidFill>
+          <a:ln>
+            <a:noFill/>
+          </a:ln>
+          <a:effectLst/>
+        </p:spPr>
+        <p:style>
+          <a:lnRef idx="1">
+            <a:schemeClr val="accent1"/>
+          </a:lnRef>
+          <a:fillRef idx="3">
+            <a:schemeClr val="accent1"/>
+          </a:fillRef>
+          <a:effectRef idx="2">
+            <a:schemeClr val="accent1"/>
+          </a:effectRef>
+          <a:fontRef idx="minor">
+            <a:schemeClr val="lt1"/>
+          </a:fontRef>
+        </p:style>
+        <p:txBody>
+          <a:bodyPr rtlCol="0" anchor="ctr"/>
+          <a:lstStyle/>
+          <a:p>
+            <a:pPr algn="ctr"/>
+          </a:p>
+        </p:txBody>
+      </p:sp>
+      <p:sp>
+        <p:nvSpPr>
+          <p:cNvPr id="5" name="Oval 4"/>
+          <p:cNvSpPr/>
+          <p:nvPr/>
+        </p:nvSpPr>
+        <p:spPr>
+          <a:xfrm>
+            <a:off x="548640" y="155448"/>
+            <a:ext cx="155448" cy="155448"/>
+          </a:xfrm>
+          <a:prstGeom prst="ellipse">
+            <a:avLst/>
+          </a:prstGeom>
+          <a:solidFill>
+            <a:srgbClr val="FFBD2E"/>
+          </a:solidFill>
+          <a:ln>
+            <a:noFill/>
+          </a:ln>
+          <a:effectLst/>
+        </p:spPr>
+        <p:style>
+          <a:lnRef idx="1">
+            <a:schemeClr val="accent1"/>
+          </a:lnRef>
+          <a:fillRef idx="3">
+            <a:schemeClr val="accent1"/>
+          </a:fillRef>
+          <a:effectRef idx="2">
+            <a:schemeClr val="accent1"/>
+          </a:effectRef>
+          <a:fontRef idx="minor">
+            <a:schemeClr val="lt1"/>
+          </a:fontRef>
+        </p:style>
+        <p:txBody>
+          <a:bodyPr rtlCol="0" anchor="ctr"/>
+          <a:lstStyle/>
+          <a:p>
+            <a:pPr algn="ctr"/>
+          </a:p>
+        </p:txBody>
+      </p:sp>
+      <p:sp>
+        <p:nvSpPr>
+          <p:cNvPr id="6" name="Oval 5"/>
+          <p:cNvSpPr/>
+          <p:nvPr/>
+        </p:nvSpPr>
+        <p:spPr>
+          <a:xfrm>
+            <a:off x="841248" y="155448"/>
+            <a:ext cx="155448" cy="155448"/>
+          </a:xfrm>
+          <a:prstGeom prst="ellipse">
+            <a:avLst/>
+          </a:prstGeom>
+          <a:solidFill>
+            <a:srgbClr val="27C93F"/>
+          </a:solidFill>
+          <a:ln>
+            <a:noFill/>
+          </a:ln>
+          <a:effectLst/>
+        </p:spPr>
+        <p:style>
+          <a:lnRef idx="1">
+            <a:schemeClr val="accent1"/>
+          </a:lnRef>
+          <a:fillRef idx="3">
+            <a:schemeClr val="accent1"/>
+          </a:fillRef>
+          <a:effectRef idx="2">
+            <a:schemeClr val="accent1"/>
+          </a:effectRef>
+          <a:fontRef idx="minor">
+            <a:schemeClr val="lt1"/>
+          </a:fontRef>
+        </p:style>
+        <p:txBody>
+          <a:bodyPr rtlCol="0" anchor="ctr"/>
+          <a:lstStyle/>
+          <a:p>
+            <a:pPr algn="ctr"/>
+          </a:p>
+        </p:txBody>
+      </p:sp>
+      <p:sp>
+        <p:nvSpPr>
+          <p:cNvPr id="7" name="TextBox 6"/>
           <p:cNvSpPr txBox="1"/>
           <p:nvPr/>
         </p:nvSpPr>
         <p:spPr>
           <a:xfrm>
-            <a:off x="822960" y="640080"/>
-            <a:ext cx="10607040" cy="548640"/>
+            <a:off x="1371600" y="45720"/>
+            <a:ext cx="5486400" cy="365760"/>
           </a:xfrm>
           <a:prstGeom prst="rect">
             <a:avLst/>
@@ -3313,40 +4292,137 @@
           <a:noFill/>
         </p:spPr>
         <p:txBody>
-          <a:bodyPr wrap="square">
+          <a:bodyPr wrap="square" anchor="ctr" lIns="0" rIns="0" tIns="0" bIns="0">
             <a:spAutoFit/>
           </a:bodyPr>
           <a:lstStyle/>
           <a:p>
-            <a:pPr algn="l">
-              <a:spcAft>
-                <a:spcPts val="800"/>
-              </a:spcAft>
-            </a:pPr>
-            <a:r>
-              <a:rPr sz="2000" b="1">
-                <a:solidFill>
-                  <a:srgbClr val="E87A3E"/>
-                </a:solidFill>
-                <a:latin typeface="Hiragino Kaku Gothic Pro"/>
-                <a:ea typeface="Hiragino Kaku Gothic Pro"/>
-                <a:cs typeface="Hiragino Kaku Gothic Pro"/>
-              </a:rPr>
-              <a:t>STEP 1 ― ためる</a:t>
-            </a:r>
-          </a:p>
-        </p:txBody>
-      </p:sp>
-      <p:sp>
-        <p:nvSpPr>
-          <p:cNvPr id="4" name="TextBox 3"/>
+            <a:pPr algn="l"/>
+            <a:r>
+              <a:rPr sz="1300" b="0">
+                <a:solidFill>
+                  <a:srgbClr val="8A8A8A"/>
+                </a:solidFill>
+                <a:latin typeface="Hiragino Kaku Gothic Pro"/>
+                <a:ea typeface="Hiragino Kaku Gothic Pro"/>
+                <a:cs typeface="Hiragino Kaku Gothic Pro"/>
+              </a:rPr>
+              <a:t>Obsidian — 第二の脳</a:t>
+            </a:r>
+          </a:p>
+        </p:txBody>
+      </p:sp>
+      <p:sp>
+        <p:nvSpPr>
+          <p:cNvPr id="8" name="Rounded Rectangle 7"/>
+          <p:cNvSpPr/>
+          <p:nvPr/>
+        </p:nvSpPr>
+        <p:spPr>
+          <a:xfrm>
+            <a:off x="10012680" y="73152"/>
+            <a:ext cx="1965960" cy="310896"/>
+          </a:xfrm>
+          <a:prstGeom prst="roundRect">
+            <a:avLst>
+              <a:gd name="adj" fmla="val 8000"/>
+            </a:avLst>
+          </a:prstGeom>
+          <a:solidFill>
+            <a:srgbClr val="8B7CF6"/>
+          </a:solidFill>
+          <a:ln>
+            <a:noFill/>
+          </a:ln>
+          <a:effectLst/>
+        </p:spPr>
+        <p:style>
+          <a:lnRef idx="1">
+            <a:schemeClr val="accent1"/>
+          </a:lnRef>
+          <a:fillRef idx="3">
+            <a:schemeClr val="accent1"/>
+          </a:fillRef>
+          <a:effectRef idx="2">
+            <a:schemeClr val="accent1"/>
+          </a:effectRef>
+          <a:fontRef idx="minor">
+            <a:schemeClr val="lt1"/>
+          </a:fontRef>
+        </p:style>
+        <p:txBody>
+          <a:bodyPr rtlCol="0" anchor="ctr"/>
+          <a:lstStyle/>
+          <a:p>
+            <a:pPr algn="ctr"/>
+            <a:r>
+              <a:rPr sz="1200" b="1">
+                <a:solidFill>
+                  <a:srgbClr val="FFFFFF"/>
+                </a:solidFill>
+                <a:latin typeface="Hiragino Kaku Gothic Pro"/>
+                <a:ea typeface="Hiragino Kaku Gothic Pro"/>
+                <a:cs typeface="Hiragino Kaku Gothic Pro"/>
+              </a:rPr>
+              <a:t>STEP 1 ためる</a:t>
+            </a:r>
+          </a:p>
+        </p:txBody>
+      </p:sp>
+      <p:sp>
+        <p:nvSpPr>
+          <p:cNvPr id="9" name="Rectangle 8"/>
+          <p:cNvSpPr/>
+          <p:nvPr/>
+        </p:nvSpPr>
+        <p:spPr>
+          <a:xfrm>
+            <a:off x="0" y="457200"/>
+            <a:ext cx="3108960" cy="6400800"/>
+          </a:xfrm>
+          <a:prstGeom prst="rect">
+            <a:avLst/>
+          </a:prstGeom>
+          <a:solidFill>
+            <a:srgbClr val="262626"/>
+          </a:solidFill>
+          <a:ln>
+            <a:noFill/>
+          </a:ln>
+          <a:effectLst/>
+        </p:spPr>
+        <p:style>
+          <a:lnRef idx="1">
+            <a:schemeClr val="accent1"/>
+          </a:lnRef>
+          <a:fillRef idx="3">
+            <a:schemeClr val="accent1"/>
+          </a:fillRef>
+          <a:effectRef idx="2">
+            <a:schemeClr val="accent1"/>
+          </a:effectRef>
+          <a:fontRef idx="minor">
+            <a:schemeClr val="lt1"/>
+          </a:fontRef>
+        </p:style>
+        <p:txBody>
+          <a:bodyPr rtlCol="0" anchor="ctr"/>
+          <a:lstStyle/>
+          <a:p>
+            <a:pPr algn="ctr"/>
+          </a:p>
+        </p:txBody>
+      </p:sp>
+      <p:sp>
+        <p:nvSpPr>
+          <p:cNvPr id="10" name="TextBox 9"/>
           <p:cNvSpPr txBox="1"/>
           <p:nvPr/>
         </p:nvSpPr>
         <p:spPr>
           <a:xfrm>
-            <a:off x="822960" y="1234440"/>
-            <a:ext cx="10607040" cy="1737360"/>
+            <a:off x="274320" y="566928"/>
+            <a:ext cx="2743200" cy="274320"/>
           </a:xfrm>
           <a:prstGeom prst="rect">
             <a:avLst/>
@@ -3354,40 +4430,82 @@
           <a:noFill/>
         </p:spPr>
         <p:txBody>
-          <a:bodyPr wrap="square">
+          <a:bodyPr wrap="square" anchor="t" lIns="0" rIns="0" tIns="0" bIns="0">
             <a:spAutoFit/>
           </a:bodyPr>
           <a:lstStyle/>
           <a:p>
-            <a:pPr algn="l">
-              <a:spcAft>
-                <a:spcPts val="800"/>
-              </a:spcAft>
-            </a:pPr>
-            <a:r>
-              <a:rPr sz="3400" b="1">
-                <a:solidFill>
-                  <a:srgbClr val="F5F3F0"/>
-                </a:solidFill>
-                <a:latin typeface="Hiragino Kaku Gothic Pro"/>
-                <a:ea typeface="Hiragino Kaku Gothic Pro"/>
-                <a:cs typeface="Hiragino Kaku Gothic Pro"/>
-              </a:rPr>
-              <a:t>思いついたら、Inboxへ</a:t>
-            </a:r>
-          </a:p>
-        </p:txBody>
-      </p:sp>
-      <p:sp>
-        <p:nvSpPr>
-          <p:cNvPr id="5" name="TextBox 4"/>
+            <a:pPr algn="l"/>
+            <a:r>
+              <a:rPr sz="1100" b="1">
+                <a:solidFill>
+                  <a:srgbClr val="8A8A8A"/>
+                </a:solidFill>
+                <a:latin typeface="Hiragino Kaku Gothic Pro"/>
+                <a:ea typeface="Hiragino Kaku Gothic Pro"/>
+                <a:cs typeface="Hiragino Kaku Gothic Pro"/>
+              </a:rPr>
+              <a:t>VAULT ／ 第二の脳</a:t>
+            </a:r>
+          </a:p>
+        </p:txBody>
+      </p:sp>
+      <p:sp>
+        <p:nvSpPr>
+          <p:cNvPr id="11" name="Rounded Rectangle 10"/>
+          <p:cNvSpPr/>
+          <p:nvPr/>
+        </p:nvSpPr>
+        <p:spPr>
+          <a:xfrm>
+            <a:off x="164592" y="960120"/>
+            <a:ext cx="2788920" cy="384048"/>
+          </a:xfrm>
+          <a:prstGeom prst="roundRect">
+            <a:avLst>
+              <a:gd name="adj" fmla="val 8000"/>
+            </a:avLst>
+          </a:prstGeom>
+          <a:solidFill>
+            <a:srgbClr val="2E2A47"/>
+          </a:solidFill>
+          <a:ln>
+            <a:noFill/>
+          </a:ln>
+          <a:effectLst/>
+        </p:spPr>
+        <p:style>
+          <a:lnRef idx="1">
+            <a:schemeClr val="accent1"/>
+          </a:lnRef>
+          <a:fillRef idx="3">
+            <a:schemeClr val="accent1"/>
+          </a:fillRef>
+          <a:effectRef idx="2">
+            <a:schemeClr val="accent1"/>
+          </a:effectRef>
+          <a:fontRef idx="minor">
+            <a:schemeClr val="lt1"/>
+          </a:fontRef>
+        </p:style>
+        <p:txBody>
+          <a:bodyPr rtlCol="0" anchor="ctr"/>
+          <a:lstStyle/>
+          <a:p>
+            <a:pPr algn="ctr"/>
+          </a:p>
+        </p:txBody>
+      </p:sp>
+      <p:sp>
+        <p:nvSpPr>
+          <p:cNvPr id="12" name="TextBox 11"/>
           <p:cNvSpPr txBox="1"/>
           <p:nvPr/>
         </p:nvSpPr>
         <p:spPr>
           <a:xfrm>
-            <a:off x="914400" y="2880360"/>
-            <a:ext cx="10424160" cy="3566160"/>
+            <a:off x="384048" y="987552"/>
+            <a:ext cx="2651760" cy="365760"/>
           </a:xfrm>
           <a:prstGeom prst="rect">
             <a:avLst/>
@@ -3395,62 +4513,552 @@
           <a:noFill/>
         </p:spPr>
         <p:txBody>
-          <a:bodyPr wrap="square">
+          <a:bodyPr wrap="square" anchor="ctr" lIns="0" rIns="0" tIns="0" bIns="0">
             <a:spAutoFit/>
           </a:bodyPr>
           <a:lstStyle/>
           <a:p>
-            <a:pPr algn="l">
-              <a:spcAft>
-                <a:spcPts val="1400"/>
-              </a:spcAft>
-            </a:pPr>
-            <a:r>
-              <a:rPr sz="2300" b="0">
-                <a:solidFill>
-                  <a:srgbClr val="F5F3F0"/>
-                </a:solidFill>
-                <a:latin typeface="Hiragino Kaku Gothic Pro"/>
-                <a:ea typeface="Hiragino Kaku Gothic Pro"/>
-                <a:cs typeface="Hiragino Kaku Gothic Pro"/>
-              </a:rPr>
-              <a:t>・00_Inbox に新しいノートを1枚作る</a:t>
-            </a:r>
-          </a:p>
-          <a:p>
-            <a:pPr algn="l">
-              <a:spcAft>
-                <a:spcPts val="1400"/>
-              </a:spcAft>
-            </a:pPr>
-            <a:r>
-              <a:rPr sz="2300" b="0">
-                <a:solidFill>
-                  <a:srgbClr val="F5F3F0"/>
-                </a:solidFill>
-                <a:latin typeface="Hiragino Kaku Gothic Pro"/>
-                <a:ea typeface="Hiragino Kaku Gothic Pro"/>
-                <a:cs typeface="Hiragino Kaku Gothic Pro"/>
-              </a:rPr>
-              <a:t>・思いついたことを、一行でメモする</a:t>
-            </a:r>
-          </a:p>
-          <a:p>
-            <a:pPr algn="l">
-              <a:spcAft>
-                <a:spcPts val="1400"/>
-              </a:spcAft>
-            </a:pPr>
-            <a:r>
-              <a:rPr sz="2300" b="0">
-                <a:solidFill>
-                  <a:srgbClr val="F5F3F0"/>
-                </a:solidFill>
-                <a:latin typeface="Hiragino Kaku Gothic Pro"/>
-                <a:ea typeface="Hiragino Kaku Gothic Pro"/>
-                <a:cs typeface="Hiragino Kaku Gothic Pro"/>
-              </a:rPr>
-              <a:t>・整理はしない。まず放り込む</a:t>
+            <a:pPr algn="l"/>
+            <a:r>
+              <a:rPr sz="1300" b="0">
+                <a:solidFill>
+                  <a:srgbClr val="DCDDDE"/>
+                </a:solidFill>
+                <a:latin typeface="Hiragino Kaku Gothic Pro"/>
+                <a:ea typeface="Hiragino Kaku Gothic Pro"/>
+                <a:cs typeface="Hiragino Kaku Gothic Pro"/>
+              </a:rPr>
+              <a:t/>
+            </a:r>
+            <a:r>
+              <a:rPr sz="1300" b="1">
+                <a:solidFill>
+                  <a:srgbClr val="DCDDDE"/>
+                </a:solidFill>
+                <a:latin typeface="Hiragino Kaku Gothic Pro"/>
+                <a:ea typeface="Hiragino Kaku Gothic Pro"/>
+                <a:cs typeface="Hiragino Kaku Gothic Pro"/>
+              </a:rPr>
+              <a:t>00_Inbox</a:t>
+            </a:r>
+          </a:p>
+        </p:txBody>
+      </p:sp>
+      <p:sp>
+        <p:nvSpPr>
+          <p:cNvPr id="13" name="TextBox 12"/>
+          <p:cNvSpPr txBox="1"/>
+          <p:nvPr/>
+        </p:nvSpPr>
+        <p:spPr>
+          <a:xfrm>
+            <a:off x="384048" y="1444752"/>
+            <a:ext cx="2651760" cy="365760"/>
+          </a:xfrm>
+          <a:prstGeom prst="rect">
+            <a:avLst/>
+          </a:prstGeom>
+          <a:noFill/>
+        </p:spPr>
+        <p:txBody>
+          <a:bodyPr wrap="square" anchor="ctr" lIns="0" rIns="0" tIns="0" bIns="0">
+            <a:spAutoFit/>
+          </a:bodyPr>
+          <a:lstStyle/>
+          <a:p>
+            <a:pPr algn="l"/>
+            <a:r>
+              <a:rPr sz="1300" b="0">
+                <a:solidFill>
+                  <a:srgbClr val="8A8A8A"/>
+                </a:solidFill>
+                <a:latin typeface="Hiragino Kaku Gothic Pro"/>
+                <a:ea typeface="Hiragino Kaku Gothic Pro"/>
+                <a:cs typeface="Hiragino Kaku Gothic Pro"/>
+              </a:rPr>
+              <a:t/>
+            </a:r>
+            <a:r>
+              <a:rPr sz="1300" b="0">
+                <a:solidFill>
+                  <a:srgbClr val="8A8A8A"/>
+                </a:solidFill>
+                <a:latin typeface="Hiragino Kaku Gothic Pro"/>
+                <a:ea typeface="Hiragino Kaku Gothic Pro"/>
+                <a:cs typeface="Hiragino Kaku Gothic Pro"/>
+              </a:rPr>
+              <a:t>10_Daily</a:t>
+            </a:r>
+          </a:p>
+        </p:txBody>
+      </p:sp>
+      <p:sp>
+        <p:nvSpPr>
+          <p:cNvPr id="14" name="TextBox 13"/>
+          <p:cNvSpPr txBox="1"/>
+          <p:nvPr/>
+        </p:nvSpPr>
+        <p:spPr>
+          <a:xfrm>
+            <a:off x="384048" y="1901952"/>
+            <a:ext cx="2651760" cy="365760"/>
+          </a:xfrm>
+          <a:prstGeom prst="rect">
+            <a:avLst/>
+          </a:prstGeom>
+          <a:noFill/>
+        </p:spPr>
+        <p:txBody>
+          <a:bodyPr wrap="square" anchor="ctr" lIns="0" rIns="0" tIns="0" bIns="0">
+            <a:spAutoFit/>
+          </a:bodyPr>
+          <a:lstStyle/>
+          <a:p>
+            <a:pPr algn="l"/>
+            <a:r>
+              <a:rPr sz="1300" b="0">
+                <a:solidFill>
+                  <a:srgbClr val="8A8A8A"/>
+                </a:solidFill>
+                <a:latin typeface="Hiragino Kaku Gothic Pro"/>
+                <a:ea typeface="Hiragino Kaku Gothic Pro"/>
+                <a:cs typeface="Hiragino Kaku Gothic Pro"/>
+              </a:rPr>
+              <a:t/>
+            </a:r>
+            <a:r>
+              <a:rPr sz="1300" b="0">
+                <a:solidFill>
+                  <a:srgbClr val="8A8A8A"/>
+                </a:solidFill>
+                <a:latin typeface="Hiragino Kaku Gothic Pro"/>
+                <a:ea typeface="Hiragino Kaku Gothic Pro"/>
+                <a:cs typeface="Hiragino Kaku Gothic Pro"/>
+              </a:rPr>
+              <a:t>20_Projects</a:t>
+            </a:r>
+          </a:p>
+        </p:txBody>
+      </p:sp>
+      <p:sp>
+        <p:nvSpPr>
+          <p:cNvPr id="15" name="TextBox 14"/>
+          <p:cNvSpPr txBox="1"/>
+          <p:nvPr/>
+        </p:nvSpPr>
+        <p:spPr>
+          <a:xfrm>
+            <a:off x="384048" y="2359152"/>
+            <a:ext cx="2651760" cy="365760"/>
+          </a:xfrm>
+          <a:prstGeom prst="rect">
+            <a:avLst/>
+          </a:prstGeom>
+          <a:noFill/>
+        </p:spPr>
+        <p:txBody>
+          <a:bodyPr wrap="square" anchor="ctr" lIns="0" rIns="0" tIns="0" bIns="0">
+            <a:spAutoFit/>
+          </a:bodyPr>
+          <a:lstStyle/>
+          <a:p>
+            <a:pPr algn="l"/>
+            <a:r>
+              <a:rPr sz="1300" b="0">
+                <a:solidFill>
+                  <a:srgbClr val="8A8A8A"/>
+                </a:solidFill>
+                <a:latin typeface="Hiragino Kaku Gothic Pro"/>
+                <a:ea typeface="Hiragino Kaku Gothic Pro"/>
+                <a:cs typeface="Hiragino Kaku Gothic Pro"/>
+              </a:rPr>
+              <a:t/>
+            </a:r>
+            <a:r>
+              <a:rPr sz="1300" b="0">
+                <a:solidFill>
+                  <a:srgbClr val="8A8A8A"/>
+                </a:solidFill>
+                <a:latin typeface="Hiragino Kaku Gothic Pro"/>
+                <a:ea typeface="Hiragino Kaku Gothic Pro"/>
+                <a:cs typeface="Hiragino Kaku Gothic Pro"/>
+              </a:rPr>
+              <a:t>30_Areas</a:t>
+            </a:r>
+          </a:p>
+        </p:txBody>
+      </p:sp>
+      <p:sp>
+        <p:nvSpPr>
+          <p:cNvPr id="16" name="TextBox 15"/>
+          <p:cNvSpPr txBox="1"/>
+          <p:nvPr/>
+        </p:nvSpPr>
+        <p:spPr>
+          <a:xfrm>
+            <a:off x="384048" y="2816352"/>
+            <a:ext cx="2651760" cy="365760"/>
+          </a:xfrm>
+          <a:prstGeom prst="rect">
+            <a:avLst/>
+          </a:prstGeom>
+          <a:noFill/>
+        </p:spPr>
+        <p:txBody>
+          <a:bodyPr wrap="square" anchor="ctr" lIns="0" rIns="0" tIns="0" bIns="0">
+            <a:spAutoFit/>
+          </a:bodyPr>
+          <a:lstStyle/>
+          <a:p>
+            <a:pPr algn="l"/>
+            <a:r>
+              <a:rPr sz="1300" b="0">
+                <a:solidFill>
+                  <a:srgbClr val="8A8A8A"/>
+                </a:solidFill>
+                <a:latin typeface="Hiragino Kaku Gothic Pro"/>
+                <a:ea typeface="Hiragino Kaku Gothic Pro"/>
+                <a:cs typeface="Hiragino Kaku Gothic Pro"/>
+              </a:rPr>
+              <a:t/>
+            </a:r>
+            <a:r>
+              <a:rPr sz="1300" b="0">
+                <a:solidFill>
+                  <a:srgbClr val="8A8A8A"/>
+                </a:solidFill>
+                <a:latin typeface="Hiragino Kaku Gothic Pro"/>
+                <a:ea typeface="Hiragino Kaku Gothic Pro"/>
+                <a:cs typeface="Hiragino Kaku Gothic Pro"/>
+              </a:rPr>
+              <a:t>40_Resources</a:t>
+            </a:r>
+          </a:p>
+        </p:txBody>
+      </p:sp>
+      <p:sp>
+        <p:nvSpPr>
+          <p:cNvPr id="17" name="TextBox 16"/>
+          <p:cNvSpPr txBox="1"/>
+          <p:nvPr/>
+        </p:nvSpPr>
+        <p:spPr>
+          <a:xfrm>
+            <a:off x="384048" y="3273552"/>
+            <a:ext cx="2651760" cy="365760"/>
+          </a:xfrm>
+          <a:prstGeom prst="rect">
+            <a:avLst/>
+          </a:prstGeom>
+          <a:noFill/>
+        </p:spPr>
+        <p:txBody>
+          <a:bodyPr wrap="square" anchor="ctr" lIns="0" rIns="0" tIns="0" bIns="0">
+            <a:spAutoFit/>
+          </a:bodyPr>
+          <a:lstStyle/>
+          <a:p>
+            <a:pPr algn="l"/>
+            <a:r>
+              <a:rPr sz="1300" b="0">
+                <a:solidFill>
+                  <a:srgbClr val="8A8A8A"/>
+                </a:solidFill>
+                <a:latin typeface="Hiragino Kaku Gothic Pro"/>
+                <a:ea typeface="Hiragino Kaku Gothic Pro"/>
+                <a:cs typeface="Hiragino Kaku Gothic Pro"/>
+              </a:rPr>
+              <a:t/>
+            </a:r>
+            <a:r>
+              <a:rPr sz="1300" b="0">
+                <a:solidFill>
+                  <a:srgbClr val="8A8A8A"/>
+                </a:solidFill>
+                <a:latin typeface="Hiragino Kaku Gothic Pro"/>
+                <a:ea typeface="Hiragino Kaku Gothic Pro"/>
+                <a:cs typeface="Hiragino Kaku Gothic Pro"/>
+              </a:rPr>
+              <a:t>50_PermanentNotes</a:t>
+            </a:r>
+          </a:p>
+        </p:txBody>
+      </p:sp>
+      <p:sp>
+        <p:nvSpPr>
+          <p:cNvPr id="18" name="TextBox 17"/>
+          <p:cNvSpPr txBox="1"/>
+          <p:nvPr/>
+        </p:nvSpPr>
+        <p:spPr>
+          <a:xfrm>
+            <a:off x="384048" y="3730752"/>
+            <a:ext cx="2651760" cy="365760"/>
+          </a:xfrm>
+          <a:prstGeom prst="rect">
+            <a:avLst/>
+          </a:prstGeom>
+          <a:noFill/>
+        </p:spPr>
+        <p:txBody>
+          <a:bodyPr wrap="square" anchor="ctr" lIns="0" rIns="0" tIns="0" bIns="0">
+            <a:spAutoFit/>
+          </a:bodyPr>
+          <a:lstStyle/>
+          <a:p>
+            <a:pPr algn="l"/>
+            <a:r>
+              <a:rPr sz="1300" b="0">
+                <a:solidFill>
+                  <a:srgbClr val="8A8A8A"/>
+                </a:solidFill>
+                <a:latin typeface="Hiragino Kaku Gothic Pro"/>
+                <a:ea typeface="Hiragino Kaku Gothic Pro"/>
+                <a:cs typeface="Hiragino Kaku Gothic Pro"/>
+              </a:rPr>
+              <a:t/>
+            </a:r>
+            <a:r>
+              <a:rPr sz="1300" b="0">
+                <a:solidFill>
+                  <a:srgbClr val="8A8A8A"/>
+                </a:solidFill>
+                <a:latin typeface="Hiragino Kaku Gothic Pro"/>
+                <a:ea typeface="Hiragino Kaku Gothic Pro"/>
+                <a:cs typeface="Hiragino Kaku Gothic Pro"/>
+              </a:rPr>
+              <a:t>90_Archive</a:t>
+            </a:r>
+          </a:p>
+        </p:txBody>
+      </p:sp>
+      <p:sp>
+        <p:nvSpPr>
+          <p:cNvPr id="19" name="Rounded Rectangle 18"/>
+          <p:cNvSpPr/>
+          <p:nvPr/>
+        </p:nvSpPr>
+        <p:spPr>
+          <a:xfrm>
+            <a:off x="3246120" y="566928"/>
+            <a:ext cx="8778240" cy="457200"/>
+          </a:xfrm>
+          <a:prstGeom prst="roundRect">
+            <a:avLst>
+              <a:gd name="adj" fmla="val 8000"/>
+            </a:avLst>
+          </a:prstGeom>
+          <a:solidFill>
+            <a:srgbClr val="2A2A2A"/>
+          </a:solidFill>
+          <a:ln>
+            <a:noFill/>
+          </a:ln>
+          <a:effectLst/>
+        </p:spPr>
+        <p:style>
+          <a:lnRef idx="1">
+            <a:schemeClr val="accent1"/>
+          </a:lnRef>
+          <a:fillRef idx="3">
+            <a:schemeClr val="accent1"/>
+          </a:fillRef>
+          <a:effectRef idx="2">
+            <a:schemeClr val="accent1"/>
+          </a:effectRef>
+          <a:fontRef idx="minor">
+            <a:schemeClr val="lt1"/>
+          </a:fontRef>
+        </p:style>
+        <p:txBody>
+          <a:bodyPr rtlCol="0" anchor="ctr"/>
+          <a:lstStyle/>
+          <a:p>
+            <a:pPr algn="ctr"/>
+          </a:p>
+        </p:txBody>
+      </p:sp>
+      <p:sp>
+        <p:nvSpPr>
+          <p:cNvPr id="20" name="TextBox 19"/>
+          <p:cNvSpPr txBox="1"/>
+          <p:nvPr/>
+        </p:nvSpPr>
+        <p:spPr>
+          <a:xfrm>
+            <a:off x="3429000" y="566928"/>
+            <a:ext cx="8412480" cy="457200"/>
+          </a:xfrm>
+          <a:prstGeom prst="rect">
+            <a:avLst/>
+          </a:prstGeom>
+          <a:noFill/>
+        </p:spPr>
+        <p:txBody>
+          <a:bodyPr wrap="square" anchor="ctr" lIns="0" rIns="0" tIns="0" bIns="0">
+            <a:spAutoFit/>
+          </a:bodyPr>
+          <a:lstStyle/>
+          <a:p>
+            <a:pPr algn="l"/>
+            <a:r>
+              <a:rPr sz="1300" b="0">
+                <a:solidFill>
+                  <a:srgbClr val="DCDDDE"/>
+                </a:solidFill>
+                <a:latin typeface="Hiragino Kaku Gothic Pro"/>
+                <a:ea typeface="Hiragino Kaku Gothic Pro"/>
+                <a:cs typeface="Hiragino Kaku Gothic Pro"/>
+              </a:rPr>
+              <a:t>00_Inbox / 2026-10-10 思いつき.md</a:t>
+            </a:r>
+          </a:p>
+        </p:txBody>
+      </p:sp>
+      <p:sp>
+        <p:nvSpPr>
+          <p:cNvPr id="21" name="TextBox 20"/>
+          <p:cNvSpPr txBox="1"/>
+          <p:nvPr/>
+        </p:nvSpPr>
+        <p:spPr>
+          <a:xfrm>
+            <a:off x="3429000" y="1234440"/>
+            <a:ext cx="8412480" cy="384048"/>
+          </a:xfrm>
+          <a:prstGeom prst="rect">
+            <a:avLst/>
+          </a:prstGeom>
+          <a:noFill/>
+        </p:spPr>
+        <p:txBody>
+          <a:bodyPr wrap="square" anchor="t" lIns="0" rIns="0" tIns="0" bIns="0">
+            <a:spAutoFit/>
+          </a:bodyPr>
+          <a:lstStyle/>
+          <a:p>
+            <a:pPr algn="l"/>
+            <a:r>
+              <a:rPr sz="1300" b="0">
+                <a:solidFill>
+                  <a:srgbClr val="8A8A8A"/>
+                </a:solidFill>
+                <a:latin typeface="Hiragino Kaku Gothic Pro"/>
+                <a:ea typeface="Hiragino Kaku Gothic Pro"/>
+                <a:cs typeface="Hiragino Kaku Gothic Pro"/>
+              </a:rPr>
+              <a:t>思いついたら、まずここに一行で放り込む（整理はしない）</a:t>
+            </a:r>
+          </a:p>
+        </p:txBody>
+      </p:sp>
+      <p:sp>
+        <p:nvSpPr>
+          <p:cNvPr id="22" name="TextBox 21"/>
+          <p:cNvSpPr txBox="1"/>
+          <p:nvPr/>
+        </p:nvSpPr>
+        <p:spPr>
+          <a:xfrm>
+            <a:off x="3429000" y="1655064"/>
+            <a:ext cx="8412480" cy="384048"/>
+          </a:xfrm>
+          <a:prstGeom prst="rect">
+            <a:avLst/>
+          </a:prstGeom>
+          <a:noFill/>
+        </p:spPr>
+        <p:txBody>
+          <a:bodyPr wrap="square" anchor="t" lIns="0" rIns="0" tIns="0" bIns="0">
+            <a:spAutoFit/>
+          </a:bodyPr>
+          <a:lstStyle/>
+          <a:p>
+            <a:pPr algn="l"/>
+            <a:r>
+              <a:rPr sz="1600" b="0">
+                <a:solidFill>
+                  <a:srgbClr val="DCDDDE"/>
+                </a:solidFill>
+                <a:latin typeface="Hiragino Kaku Gothic Pro"/>
+                <a:ea typeface="Hiragino Kaku Gothic Pro"/>
+                <a:cs typeface="Hiragino Kaku Gothic Pro"/>
+              </a:rPr>
+              <a:t>・確認事項は「型」で出すと速い気がする</a:t>
+            </a:r>
+          </a:p>
+        </p:txBody>
+      </p:sp>
+      <p:sp>
+        <p:nvSpPr>
+          <p:cNvPr id="23" name="TextBox 22"/>
+          <p:cNvSpPr txBox="1"/>
+          <p:nvPr/>
+        </p:nvSpPr>
+        <p:spPr>
+          <a:xfrm>
+            <a:off x="3429000" y="2112264"/>
+            <a:ext cx="8412480" cy="384048"/>
+          </a:xfrm>
+          <a:prstGeom prst="rect">
+            <a:avLst/>
+          </a:prstGeom>
+          <a:noFill/>
+        </p:spPr>
+        <p:txBody>
+          <a:bodyPr wrap="square" anchor="t" lIns="0" rIns="0" tIns="0" bIns="0">
+            <a:spAutoFit/>
+          </a:bodyPr>
+          <a:lstStyle/>
+          <a:p>
+            <a:pPr algn="l"/>
+            <a:r>
+              <a:rPr sz="1600" b="0">
+                <a:solidFill>
+                  <a:srgbClr val="DCDDDE"/>
+                </a:solidFill>
+                <a:latin typeface="Hiragino Kaku Gothic Pro"/>
+                <a:ea typeface="Hiragino Kaku Gothic Pro"/>
+                <a:cs typeface="Hiragino Kaku Gothic Pro"/>
+              </a:rPr>
+              <a:t>・システム名／確認事項／担当／期限／参考、の5項目</a:t>
+            </a:r>
+          </a:p>
+        </p:txBody>
+      </p:sp>
+      <p:sp>
+        <p:nvSpPr>
+          <p:cNvPr id="24" name="TextBox 23"/>
+          <p:cNvSpPr txBox="1"/>
+          <p:nvPr/>
+        </p:nvSpPr>
+        <p:spPr>
+          <a:xfrm>
+            <a:off x="3429000" y="2569464"/>
+            <a:ext cx="8412480" cy="384048"/>
+          </a:xfrm>
+          <a:prstGeom prst="rect">
+            <a:avLst/>
+          </a:prstGeom>
+          <a:noFill/>
+        </p:spPr>
+        <p:txBody>
+          <a:bodyPr wrap="square" anchor="t" lIns="0" rIns="0" tIns="0" bIns="0">
+            <a:spAutoFit/>
+          </a:bodyPr>
+          <a:lstStyle/>
+          <a:p>
+            <a:pPr algn="l"/>
+            <a:r>
+              <a:rPr sz="1300" b="0">
+                <a:solidFill>
+                  <a:srgbClr val="8A8A8A"/>
+                </a:solidFill>
+                <a:latin typeface="Hiragino Kaku Gothic Pro"/>
+                <a:ea typeface="Hiragino Kaku Gothic Pro"/>
+                <a:cs typeface="Hiragino Kaku Gothic Pro"/>
+              </a:rPr>
+              <a:t>— あとで Permanent に育てる —</a:t>
             </a:r>
           </a:p>
         </p:txBody>
@@ -3488,7 +5096,7 @@
             <a:avLst/>
           </a:prstGeom>
           <a:solidFill>
-            <a:srgbClr val="141414"/>
+            <a:srgbClr val="1E1E1E"/>
           </a:solidFill>
           <a:ln>
             <a:noFill/>
@@ -3519,14 +5127,190 @@
       </p:sp>
       <p:sp>
         <p:nvSpPr>
-          <p:cNvPr id="3" name="TextBox 2"/>
+          <p:cNvPr id="3" name="Rectangle 2"/>
+          <p:cNvSpPr/>
+          <p:nvPr/>
+        </p:nvSpPr>
+        <p:spPr>
+          <a:xfrm>
+            <a:off x="0" y="0"/>
+            <a:ext cx="12191695" cy="457200"/>
+          </a:xfrm>
+          <a:prstGeom prst="rect">
+            <a:avLst/>
+          </a:prstGeom>
+          <a:solidFill>
+            <a:srgbClr val="323232"/>
+          </a:solidFill>
+          <a:ln>
+            <a:noFill/>
+          </a:ln>
+          <a:effectLst/>
+        </p:spPr>
+        <p:style>
+          <a:lnRef idx="1">
+            <a:schemeClr val="accent1"/>
+          </a:lnRef>
+          <a:fillRef idx="3">
+            <a:schemeClr val="accent1"/>
+          </a:fillRef>
+          <a:effectRef idx="2">
+            <a:schemeClr val="accent1"/>
+          </a:effectRef>
+          <a:fontRef idx="minor">
+            <a:schemeClr val="lt1"/>
+          </a:fontRef>
+        </p:style>
+        <p:txBody>
+          <a:bodyPr rtlCol="0" anchor="ctr"/>
+          <a:lstStyle/>
+          <a:p>
+            <a:pPr algn="ctr"/>
+          </a:p>
+        </p:txBody>
+      </p:sp>
+      <p:sp>
+        <p:nvSpPr>
+          <p:cNvPr id="4" name="Oval 3"/>
+          <p:cNvSpPr/>
+          <p:nvPr/>
+        </p:nvSpPr>
+        <p:spPr>
+          <a:xfrm>
+            <a:off x="256032" y="155448"/>
+            <a:ext cx="155448" cy="155448"/>
+          </a:xfrm>
+          <a:prstGeom prst="ellipse">
+            <a:avLst/>
+          </a:prstGeom>
+          <a:solidFill>
+            <a:srgbClr val="FF5F56"/>
+          </a:solidFill>
+          <a:ln>
+            <a:noFill/>
+          </a:ln>
+          <a:effectLst/>
+        </p:spPr>
+        <p:style>
+          <a:lnRef idx="1">
+            <a:schemeClr val="accent1"/>
+          </a:lnRef>
+          <a:fillRef idx="3">
+            <a:schemeClr val="accent1"/>
+          </a:fillRef>
+          <a:effectRef idx="2">
+            <a:schemeClr val="accent1"/>
+          </a:effectRef>
+          <a:fontRef idx="minor">
+            <a:schemeClr val="lt1"/>
+          </a:fontRef>
+        </p:style>
+        <p:txBody>
+          <a:bodyPr rtlCol="0" anchor="ctr"/>
+          <a:lstStyle/>
+          <a:p>
+            <a:pPr algn="ctr"/>
+          </a:p>
+        </p:txBody>
+      </p:sp>
+      <p:sp>
+        <p:nvSpPr>
+          <p:cNvPr id="5" name="Oval 4"/>
+          <p:cNvSpPr/>
+          <p:nvPr/>
+        </p:nvSpPr>
+        <p:spPr>
+          <a:xfrm>
+            <a:off x="548640" y="155448"/>
+            <a:ext cx="155448" cy="155448"/>
+          </a:xfrm>
+          <a:prstGeom prst="ellipse">
+            <a:avLst/>
+          </a:prstGeom>
+          <a:solidFill>
+            <a:srgbClr val="FFBD2E"/>
+          </a:solidFill>
+          <a:ln>
+            <a:noFill/>
+          </a:ln>
+          <a:effectLst/>
+        </p:spPr>
+        <p:style>
+          <a:lnRef idx="1">
+            <a:schemeClr val="accent1"/>
+          </a:lnRef>
+          <a:fillRef idx="3">
+            <a:schemeClr val="accent1"/>
+          </a:fillRef>
+          <a:effectRef idx="2">
+            <a:schemeClr val="accent1"/>
+          </a:effectRef>
+          <a:fontRef idx="minor">
+            <a:schemeClr val="lt1"/>
+          </a:fontRef>
+        </p:style>
+        <p:txBody>
+          <a:bodyPr rtlCol="0" anchor="ctr"/>
+          <a:lstStyle/>
+          <a:p>
+            <a:pPr algn="ctr"/>
+          </a:p>
+        </p:txBody>
+      </p:sp>
+      <p:sp>
+        <p:nvSpPr>
+          <p:cNvPr id="6" name="Oval 5"/>
+          <p:cNvSpPr/>
+          <p:nvPr/>
+        </p:nvSpPr>
+        <p:spPr>
+          <a:xfrm>
+            <a:off x="841248" y="155448"/>
+            <a:ext cx="155448" cy="155448"/>
+          </a:xfrm>
+          <a:prstGeom prst="ellipse">
+            <a:avLst/>
+          </a:prstGeom>
+          <a:solidFill>
+            <a:srgbClr val="27C93F"/>
+          </a:solidFill>
+          <a:ln>
+            <a:noFill/>
+          </a:ln>
+          <a:effectLst/>
+        </p:spPr>
+        <p:style>
+          <a:lnRef idx="1">
+            <a:schemeClr val="accent1"/>
+          </a:lnRef>
+          <a:fillRef idx="3">
+            <a:schemeClr val="accent1"/>
+          </a:fillRef>
+          <a:effectRef idx="2">
+            <a:schemeClr val="accent1"/>
+          </a:effectRef>
+          <a:fontRef idx="minor">
+            <a:schemeClr val="lt1"/>
+          </a:fontRef>
+        </p:style>
+        <p:txBody>
+          <a:bodyPr rtlCol="0" anchor="ctr"/>
+          <a:lstStyle/>
+          <a:p>
+            <a:pPr algn="ctr"/>
+          </a:p>
+        </p:txBody>
+      </p:sp>
+      <p:sp>
+        <p:nvSpPr>
+          <p:cNvPr id="7" name="TextBox 6"/>
           <p:cNvSpPr txBox="1"/>
           <p:nvPr/>
         </p:nvSpPr>
         <p:spPr>
           <a:xfrm>
-            <a:off x="822960" y="640080"/>
-            <a:ext cx="10607040" cy="548640"/>
+            <a:off x="1371600" y="45720"/>
+            <a:ext cx="5486400" cy="365760"/>
           </a:xfrm>
           <a:prstGeom prst="rect">
             <a:avLst/>
@@ -3534,40 +5318,137 @@
           <a:noFill/>
         </p:spPr>
         <p:txBody>
-          <a:bodyPr wrap="square">
+          <a:bodyPr wrap="square" anchor="ctr" lIns="0" rIns="0" tIns="0" bIns="0">
             <a:spAutoFit/>
           </a:bodyPr>
           <a:lstStyle/>
           <a:p>
-            <a:pPr algn="l">
-              <a:spcAft>
-                <a:spcPts val="800"/>
-              </a:spcAft>
-            </a:pPr>
-            <a:r>
-              <a:rPr sz="2000" b="1">
-                <a:solidFill>
-                  <a:srgbClr val="E87A3E"/>
-                </a:solidFill>
-                <a:latin typeface="Hiragino Kaku Gothic Pro"/>
-                <a:ea typeface="Hiragino Kaku Gothic Pro"/>
-                <a:cs typeface="Hiragino Kaku Gothic Pro"/>
-              </a:rPr>
-              <a:t>STEP 2 ― まわす</a:t>
-            </a:r>
-          </a:p>
-        </p:txBody>
-      </p:sp>
-      <p:sp>
-        <p:nvSpPr>
-          <p:cNvPr id="4" name="TextBox 3"/>
+            <a:pPr algn="l"/>
+            <a:r>
+              <a:rPr sz="1300" b="0">
+                <a:solidFill>
+                  <a:srgbClr val="8A8A8A"/>
+                </a:solidFill>
+                <a:latin typeface="Hiragino Kaku Gothic Pro"/>
+                <a:ea typeface="Hiragino Kaku Gothic Pro"/>
+                <a:cs typeface="Hiragino Kaku Gothic Pro"/>
+              </a:rPr>
+              <a:t>Obsidian — 第二の脳</a:t>
+            </a:r>
+          </a:p>
+        </p:txBody>
+      </p:sp>
+      <p:sp>
+        <p:nvSpPr>
+          <p:cNvPr id="8" name="Rounded Rectangle 7"/>
+          <p:cNvSpPr/>
+          <p:nvPr/>
+        </p:nvSpPr>
+        <p:spPr>
+          <a:xfrm>
+            <a:off x="10012680" y="73152"/>
+            <a:ext cx="1965960" cy="310896"/>
+          </a:xfrm>
+          <a:prstGeom prst="roundRect">
+            <a:avLst>
+              <a:gd name="adj" fmla="val 8000"/>
+            </a:avLst>
+          </a:prstGeom>
+          <a:solidFill>
+            <a:srgbClr val="8B7CF6"/>
+          </a:solidFill>
+          <a:ln>
+            <a:noFill/>
+          </a:ln>
+          <a:effectLst/>
+        </p:spPr>
+        <p:style>
+          <a:lnRef idx="1">
+            <a:schemeClr val="accent1"/>
+          </a:lnRef>
+          <a:fillRef idx="3">
+            <a:schemeClr val="accent1"/>
+          </a:fillRef>
+          <a:effectRef idx="2">
+            <a:schemeClr val="accent1"/>
+          </a:effectRef>
+          <a:fontRef idx="minor">
+            <a:schemeClr val="lt1"/>
+          </a:fontRef>
+        </p:style>
+        <p:txBody>
+          <a:bodyPr rtlCol="0" anchor="ctr"/>
+          <a:lstStyle/>
+          <a:p>
+            <a:pPr algn="ctr"/>
+            <a:r>
+              <a:rPr sz="1200" b="1">
+                <a:solidFill>
+                  <a:srgbClr val="FFFFFF"/>
+                </a:solidFill>
+                <a:latin typeface="Hiragino Kaku Gothic Pro"/>
+                <a:ea typeface="Hiragino Kaku Gothic Pro"/>
+                <a:cs typeface="Hiragino Kaku Gothic Pro"/>
+              </a:rPr>
+              <a:t>STEP 2 まわす</a:t>
+            </a:r>
+          </a:p>
+        </p:txBody>
+      </p:sp>
+      <p:sp>
+        <p:nvSpPr>
+          <p:cNvPr id="9" name="Rectangle 8"/>
+          <p:cNvSpPr/>
+          <p:nvPr/>
+        </p:nvSpPr>
+        <p:spPr>
+          <a:xfrm>
+            <a:off x="0" y="457200"/>
+            <a:ext cx="3108960" cy="6400800"/>
+          </a:xfrm>
+          <a:prstGeom prst="rect">
+            <a:avLst/>
+          </a:prstGeom>
+          <a:solidFill>
+            <a:srgbClr val="262626"/>
+          </a:solidFill>
+          <a:ln>
+            <a:noFill/>
+          </a:ln>
+          <a:effectLst/>
+        </p:spPr>
+        <p:style>
+          <a:lnRef idx="1">
+            <a:schemeClr val="accent1"/>
+          </a:lnRef>
+          <a:fillRef idx="3">
+            <a:schemeClr val="accent1"/>
+          </a:fillRef>
+          <a:effectRef idx="2">
+            <a:schemeClr val="accent1"/>
+          </a:effectRef>
+          <a:fontRef idx="minor">
+            <a:schemeClr val="lt1"/>
+          </a:fontRef>
+        </p:style>
+        <p:txBody>
+          <a:bodyPr rtlCol="0" anchor="ctr"/>
+          <a:lstStyle/>
+          <a:p>
+            <a:pPr algn="ctr"/>
+          </a:p>
+        </p:txBody>
+      </p:sp>
+      <p:sp>
+        <p:nvSpPr>
+          <p:cNvPr id="10" name="TextBox 9"/>
           <p:cNvSpPr txBox="1"/>
           <p:nvPr/>
         </p:nvSpPr>
         <p:spPr>
           <a:xfrm>
-            <a:off x="822960" y="1234440"/>
-            <a:ext cx="10607040" cy="1737360"/>
+            <a:off x="274320" y="566928"/>
+            <a:ext cx="2743200" cy="274320"/>
           </a:xfrm>
           <a:prstGeom prst="rect">
             <a:avLst/>
@@ -3575,40 +5456,36 @@
           <a:noFill/>
         </p:spPr>
         <p:txBody>
-          <a:bodyPr wrap="square">
+          <a:bodyPr wrap="square" anchor="t" lIns="0" rIns="0" tIns="0" bIns="0">
             <a:spAutoFit/>
           </a:bodyPr>
           <a:lstStyle/>
           <a:p>
-            <a:pPr algn="l">
-              <a:spcAft>
-                <a:spcPts val="800"/>
-              </a:spcAft>
-            </a:pPr>
-            <a:r>
-              <a:rPr sz="3400" b="1">
-                <a:solidFill>
-                  <a:srgbClr val="F5F3F0"/>
-                </a:solidFill>
-                <a:latin typeface="Hiragino Kaku Gothic Pro"/>
-                <a:ea typeface="Hiragino Kaku Gothic Pro"/>
-                <a:cs typeface="Hiragino Kaku Gothic Pro"/>
-              </a:rPr>
-              <a:t>Daily Note に、今日のTop3</a:t>
-            </a:r>
-          </a:p>
-        </p:txBody>
-      </p:sp>
-      <p:sp>
-        <p:nvSpPr>
-          <p:cNvPr id="5" name="TextBox 4"/>
+            <a:pPr algn="l"/>
+            <a:r>
+              <a:rPr sz="1100" b="1">
+                <a:solidFill>
+                  <a:srgbClr val="8A8A8A"/>
+                </a:solidFill>
+                <a:latin typeface="Hiragino Kaku Gothic Pro"/>
+                <a:ea typeface="Hiragino Kaku Gothic Pro"/>
+                <a:cs typeface="Hiragino Kaku Gothic Pro"/>
+              </a:rPr>
+              <a:t>VAULT ／ 第二の脳</a:t>
+            </a:r>
+          </a:p>
+        </p:txBody>
+      </p:sp>
+      <p:sp>
+        <p:nvSpPr>
+          <p:cNvPr id="11" name="TextBox 10"/>
           <p:cNvSpPr txBox="1"/>
           <p:nvPr/>
         </p:nvSpPr>
         <p:spPr>
           <a:xfrm>
-            <a:off x="914400" y="2880360"/>
-            <a:ext cx="10424160" cy="3566160"/>
+            <a:off x="384048" y="987552"/>
+            <a:ext cx="2651760" cy="365760"/>
           </a:xfrm>
           <a:prstGeom prst="rect">
             <a:avLst/>
@@ -3616,62 +5493,668 @@
           <a:noFill/>
         </p:spPr>
         <p:txBody>
-          <a:bodyPr wrap="square">
+          <a:bodyPr wrap="square" anchor="ctr" lIns="0" rIns="0" tIns="0" bIns="0">
             <a:spAutoFit/>
           </a:bodyPr>
           <a:lstStyle/>
           <a:p>
-            <a:pPr algn="l">
-              <a:spcAft>
-                <a:spcPts val="1400"/>
-              </a:spcAft>
-            </a:pPr>
-            <a:r>
-              <a:rPr sz="2300" b="0">
-                <a:solidFill>
-                  <a:srgbClr val="F5F3F0"/>
-                </a:solidFill>
-                <a:latin typeface="Hiragino Kaku Gothic Pro"/>
-                <a:ea typeface="Hiragino Kaku Gothic Pro"/>
-                <a:cs typeface="Hiragino Kaku Gothic Pro"/>
-              </a:rPr>
-              <a:t>・10_Daily に今日の日付でノートを作る</a:t>
-            </a:r>
-          </a:p>
-          <a:p>
-            <a:pPr algn="l">
-              <a:spcAft>
-                <a:spcPts val="1400"/>
-              </a:spcAft>
-            </a:pPr>
-            <a:r>
-              <a:rPr sz="2300" b="0">
-                <a:solidFill>
-                  <a:srgbClr val="F5F3F0"/>
-                </a:solidFill>
-                <a:latin typeface="Hiragino Kaku Gothic Pro"/>
-                <a:ea typeface="Hiragino Kaku Gothic Pro"/>
-                <a:cs typeface="Hiragino Kaku Gothic Pro"/>
-              </a:rPr>
-              <a:t>・テンプレートから、今日やることを書く</a:t>
-            </a:r>
-          </a:p>
-          <a:p>
-            <a:pPr algn="l">
-              <a:spcAft>
-                <a:spcPts val="1400"/>
-              </a:spcAft>
-            </a:pPr>
-            <a:r>
-              <a:rPr sz="2300" b="0">
-                <a:solidFill>
-                  <a:srgbClr val="F5F3F0"/>
-                </a:solidFill>
-                <a:latin typeface="Hiragino Kaku Gothic Pro"/>
-                <a:ea typeface="Hiragino Kaku Gothic Pro"/>
-                <a:cs typeface="Hiragino Kaku Gothic Pro"/>
-              </a:rPr>
-              <a:t>・最重要の3つ＝今日のTop3を決める</a:t>
+            <a:pPr algn="l"/>
+            <a:r>
+              <a:rPr sz="1300" b="0">
+                <a:solidFill>
+                  <a:srgbClr val="8A8A8A"/>
+                </a:solidFill>
+                <a:latin typeface="Hiragino Kaku Gothic Pro"/>
+                <a:ea typeface="Hiragino Kaku Gothic Pro"/>
+                <a:cs typeface="Hiragino Kaku Gothic Pro"/>
+              </a:rPr>
+              <a:t/>
+            </a:r>
+            <a:r>
+              <a:rPr sz="1300" b="0">
+                <a:solidFill>
+                  <a:srgbClr val="8A8A8A"/>
+                </a:solidFill>
+                <a:latin typeface="Hiragino Kaku Gothic Pro"/>
+                <a:ea typeface="Hiragino Kaku Gothic Pro"/>
+                <a:cs typeface="Hiragino Kaku Gothic Pro"/>
+              </a:rPr>
+              <a:t>00_Inbox</a:t>
+            </a:r>
+          </a:p>
+        </p:txBody>
+      </p:sp>
+      <p:sp>
+        <p:nvSpPr>
+          <p:cNvPr id="12" name="Rounded Rectangle 11"/>
+          <p:cNvSpPr/>
+          <p:nvPr/>
+        </p:nvSpPr>
+        <p:spPr>
+          <a:xfrm>
+            <a:off x="164592" y="1417320"/>
+            <a:ext cx="2788920" cy="384048"/>
+          </a:xfrm>
+          <a:prstGeom prst="roundRect">
+            <a:avLst>
+              <a:gd name="adj" fmla="val 8000"/>
+            </a:avLst>
+          </a:prstGeom>
+          <a:solidFill>
+            <a:srgbClr val="2E2A47"/>
+          </a:solidFill>
+          <a:ln>
+            <a:noFill/>
+          </a:ln>
+          <a:effectLst/>
+        </p:spPr>
+        <p:style>
+          <a:lnRef idx="1">
+            <a:schemeClr val="accent1"/>
+          </a:lnRef>
+          <a:fillRef idx="3">
+            <a:schemeClr val="accent1"/>
+          </a:fillRef>
+          <a:effectRef idx="2">
+            <a:schemeClr val="accent1"/>
+          </a:effectRef>
+          <a:fontRef idx="minor">
+            <a:schemeClr val="lt1"/>
+          </a:fontRef>
+        </p:style>
+        <p:txBody>
+          <a:bodyPr rtlCol="0" anchor="ctr"/>
+          <a:lstStyle/>
+          <a:p>
+            <a:pPr algn="ctr"/>
+          </a:p>
+        </p:txBody>
+      </p:sp>
+      <p:sp>
+        <p:nvSpPr>
+          <p:cNvPr id="13" name="TextBox 12"/>
+          <p:cNvSpPr txBox="1"/>
+          <p:nvPr/>
+        </p:nvSpPr>
+        <p:spPr>
+          <a:xfrm>
+            <a:off x="384048" y="1444752"/>
+            <a:ext cx="2651760" cy="365760"/>
+          </a:xfrm>
+          <a:prstGeom prst="rect">
+            <a:avLst/>
+          </a:prstGeom>
+          <a:noFill/>
+        </p:spPr>
+        <p:txBody>
+          <a:bodyPr wrap="square" anchor="ctr" lIns="0" rIns="0" tIns="0" bIns="0">
+            <a:spAutoFit/>
+          </a:bodyPr>
+          <a:lstStyle/>
+          <a:p>
+            <a:pPr algn="l"/>
+            <a:r>
+              <a:rPr sz="1300" b="0">
+                <a:solidFill>
+                  <a:srgbClr val="DCDDDE"/>
+                </a:solidFill>
+                <a:latin typeface="Hiragino Kaku Gothic Pro"/>
+                <a:ea typeface="Hiragino Kaku Gothic Pro"/>
+                <a:cs typeface="Hiragino Kaku Gothic Pro"/>
+              </a:rPr>
+              <a:t/>
+            </a:r>
+            <a:r>
+              <a:rPr sz="1300" b="1">
+                <a:solidFill>
+                  <a:srgbClr val="DCDDDE"/>
+                </a:solidFill>
+                <a:latin typeface="Hiragino Kaku Gothic Pro"/>
+                <a:ea typeface="Hiragino Kaku Gothic Pro"/>
+                <a:cs typeface="Hiragino Kaku Gothic Pro"/>
+              </a:rPr>
+              <a:t>10_Daily</a:t>
+            </a:r>
+          </a:p>
+        </p:txBody>
+      </p:sp>
+      <p:sp>
+        <p:nvSpPr>
+          <p:cNvPr id="14" name="TextBox 13"/>
+          <p:cNvSpPr txBox="1"/>
+          <p:nvPr/>
+        </p:nvSpPr>
+        <p:spPr>
+          <a:xfrm>
+            <a:off x="384048" y="1901952"/>
+            <a:ext cx="2651760" cy="365760"/>
+          </a:xfrm>
+          <a:prstGeom prst="rect">
+            <a:avLst/>
+          </a:prstGeom>
+          <a:noFill/>
+        </p:spPr>
+        <p:txBody>
+          <a:bodyPr wrap="square" anchor="ctr" lIns="0" rIns="0" tIns="0" bIns="0">
+            <a:spAutoFit/>
+          </a:bodyPr>
+          <a:lstStyle/>
+          <a:p>
+            <a:pPr algn="l"/>
+            <a:r>
+              <a:rPr sz="1300" b="0">
+                <a:solidFill>
+                  <a:srgbClr val="8A8A8A"/>
+                </a:solidFill>
+                <a:latin typeface="Hiragino Kaku Gothic Pro"/>
+                <a:ea typeface="Hiragino Kaku Gothic Pro"/>
+                <a:cs typeface="Hiragino Kaku Gothic Pro"/>
+              </a:rPr>
+              <a:t/>
+            </a:r>
+            <a:r>
+              <a:rPr sz="1300" b="0">
+                <a:solidFill>
+                  <a:srgbClr val="8A8A8A"/>
+                </a:solidFill>
+                <a:latin typeface="Hiragino Kaku Gothic Pro"/>
+                <a:ea typeface="Hiragino Kaku Gothic Pro"/>
+                <a:cs typeface="Hiragino Kaku Gothic Pro"/>
+              </a:rPr>
+              <a:t>20_Projects</a:t>
+            </a:r>
+          </a:p>
+        </p:txBody>
+      </p:sp>
+      <p:sp>
+        <p:nvSpPr>
+          <p:cNvPr id="15" name="TextBox 14"/>
+          <p:cNvSpPr txBox="1"/>
+          <p:nvPr/>
+        </p:nvSpPr>
+        <p:spPr>
+          <a:xfrm>
+            <a:off x="384048" y="2359152"/>
+            <a:ext cx="2651760" cy="365760"/>
+          </a:xfrm>
+          <a:prstGeom prst="rect">
+            <a:avLst/>
+          </a:prstGeom>
+          <a:noFill/>
+        </p:spPr>
+        <p:txBody>
+          <a:bodyPr wrap="square" anchor="ctr" lIns="0" rIns="0" tIns="0" bIns="0">
+            <a:spAutoFit/>
+          </a:bodyPr>
+          <a:lstStyle/>
+          <a:p>
+            <a:pPr algn="l"/>
+            <a:r>
+              <a:rPr sz="1300" b="0">
+                <a:solidFill>
+                  <a:srgbClr val="8A8A8A"/>
+                </a:solidFill>
+                <a:latin typeface="Hiragino Kaku Gothic Pro"/>
+                <a:ea typeface="Hiragino Kaku Gothic Pro"/>
+                <a:cs typeface="Hiragino Kaku Gothic Pro"/>
+              </a:rPr>
+              <a:t/>
+            </a:r>
+            <a:r>
+              <a:rPr sz="1300" b="0">
+                <a:solidFill>
+                  <a:srgbClr val="8A8A8A"/>
+                </a:solidFill>
+                <a:latin typeface="Hiragino Kaku Gothic Pro"/>
+                <a:ea typeface="Hiragino Kaku Gothic Pro"/>
+                <a:cs typeface="Hiragino Kaku Gothic Pro"/>
+              </a:rPr>
+              <a:t>30_Areas</a:t>
+            </a:r>
+          </a:p>
+        </p:txBody>
+      </p:sp>
+      <p:sp>
+        <p:nvSpPr>
+          <p:cNvPr id="16" name="TextBox 15"/>
+          <p:cNvSpPr txBox="1"/>
+          <p:nvPr/>
+        </p:nvSpPr>
+        <p:spPr>
+          <a:xfrm>
+            <a:off x="384048" y="2816352"/>
+            <a:ext cx="2651760" cy="365760"/>
+          </a:xfrm>
+          <a:prstGeom prst="rect">
+            <a:avLst/>
+          </a:prstGeom>
+          <a:noFill/>
+        </p:spPr>
+        <p:txBody>
+          <a:bodyPr wrap="square" anchor="ctr" lIns="0" rIns="0" tIns="0" bIns="0">
+            <a:spAutoFit/>
+          </a:bodyPr>
+          <a:lstStyle/>
+          <a:p>
+            <a:pPr algn="l"/>
+            <a:r>
+              <a:rPr sz="1300" b="0">
+                <a:solidFill>
+                  <a:srgbClr val="8A8A8A"/>
+                </a:solidFill>
+                <a:latin typeface="Hiragino Kaku Gothic Pro"/>
+                <a:ea typeface="Hiragino Kaku Gothic Pro"/>
+                <a:cs typeface="Hiragino Kaku Gothic Pro"/>
+              </a:rPr>
+              <a:t/>
+            </a:r>
+            <a:r>
+              <a:rPr sz="1300" b="0">
+                <a:solidFill>
+                  <a:srgbClr val="8A8A8A"/>
+                </a:solidFill>
+                <a:latin typeface="Hiragino Kaku Gothic Pro"/>
+                <a:ea typeface="Hiragino Kaku Gothic Pro"/>
+                <a:cs typeface="Hiragino Kaku Gothic Pro"/>
+              </a:rPr>
+              <a:t>40_Resources</a:t>
+            </a:r>
+          </a:p>
+        </p:txBody>
+      </p:sp>
+      <p:sp>
+        <p:nvSpPr>
+          <p:cNvPr id="17" name="TextBox 16"/>
+          <p:cNvSpPr txBox="1"/>
+          <p:nvPr/>
+        </p:nvSpPr>
+        <p:spPr>
+          <a:xfrm>
+            <a:off x="384048" y="3273552"/>
+            <a:ext cx="2651760" cy="365760"/>
+          </a:xfrm>
+          <a:prstGeom prst="rect">
+            <a:avLst/>
+          </a:prstGeom>
+          <a:noFill/>
+        </p:spPr>
+        <p:txBody>
+          <a:bodyPr wrap="square" anchor="ctr" lIns="0" rIns="0" tIns="0" bIns="0">
+            <a:spAutoFit/>
+          </a:bodyPr>
+          <a:lstStyle/>
+          <a:p>
+            <a:pPr algn="l"/>
+            <a:r>
+              <a:rPr sz="1300" b="0">
+                <a:solidFill>
+                  <a:srgbClr val="8A8A8A"/>
+                </a:solidFill>
+                <a:latin typeface="Hiragino Kaku Gothic Pro"/>
+                <a:ea typeface="Hiragino Kaku Gothic Pro"/>
+                <a:cs typeface="Hiragino Kaku Gothic Pro"/>
+              </a:rPr>
+              <a:t/>
+            </a:r>
+            <a:r>
+              <a:rPr sz="1300" b="0">
+                <a:solidFill>
+                  <a:srgbClr val="8A8A8A"/>
+                </a:solidFill>
+                <a:latin typeface="Hiragino Kaku Gothic Pro"/>
+                <a:ea typeface="Hiragino Kaku Gothic Pro"/>
+                <a:cs typeface="Hiragino Kaku Gothic Pro"/>
+              </a:rPr>
+              <a:t>50_PermanentNotes</a:t>
+            </a:r>
+          </a:p>
+        </p:txBody>
+      </p:sp>
+      <p:sp>
+        <p:nvSpPr>
+          <p:cNvPr id="18" name="TextBox 17"/>
+          <p:cNvSpPr txBox="1"/>
+          <p:nvPr/>
+        </p:nvSpPr>
+        <p:spPr>
+          <a:xfrm>
+            <a:off x="384048" y="3730752"/>
+            <a:ext cx="2651760" cy="365760"/>
+          </a:xfrm>
+          <a:prstGeom prst="rect">
+            <a:avLst/>
+          </a:prstGeom>
+          <a:noFill/>
+        </p:spPr>
+        <p:txBody>
+          <a:bodyPr wrap="square" anchor="ctr" lIns="0" rIns="0" tIns="0" bIns="0">
+            <a:spAutoFit/>
+          </a:bodyPr>
+          <a:lstStyle/>
+          <a:p>
+            <a:pPr algn="l"/>
+            <a:r>
+              <a:rPr sz="1300" b="0">
+                <a:solidFill>
+                  <a:srgbClr val="8A8A8A"/>
+                </a:solidFill>
+                <a:latin typeface="Hiragino Kaku Gothic Pro"/>
+                <a:ea typeface="Hiragino Kaku Gothic Pro"/>
+                <a:cs typeface="Hiragino Kaku Gothic Pro"/>
+              </a:rPr>
+              <a:t/>
+            </a:r>
+            <a:r>
+              <a:rPr sz="1300" b="0">
+                <a:solidFill>
+                  <a:srgbClr val="8A8A8A"/>
+                </a:solidFill>
+                <a:latin typeface="Hiragino Kaku Gothic Pro"/>
+                <a:ea typeface="Hiragino Kaku Gothic Pro"/>
+                <a:cs typeface="Hiragino Kaku Gothic Pro"/>
+              </a:rPr>
+              <a:t>90_Archive</a:t>
+            </a:r>
+          </a:p>
+        </p:txBody>
+      </p:sp>
+      <p:sp>
+        <p:nvSpPr>
+          <p:cNvPr id="19" name="Rounded Rectangle 18"/>
+          <p:cNvSpPr/>
+          <p:nvPr/>
+        </p:nvSpPr>
+        <p:spPr>
+          <a:xfrm>
+            <a:off x="3246120" y="566928"/>
+            <a:ext cx="8778240" cy="457200"/>
+          </a:xfrm>
+          <a:prstGeom prst="roundRect">
+            <a:avLst>
+              <a:gd name="adj" fmla="val 8000"/>
+            </a:avLst>
+          </a:prstGeom>
+          <a:solidFill>
+            <a:srgbClr val="2A2A2A"/>
+          </a:solidFill>
+          <a:ln>
+            <a:noFill/>
+          </a:ln>
+          <a:effectLst/>
+        </p:spPr>
+        <p:style>
+          <a:lnRef idx="1">
+            <a:schemeClr val="accent1"/>
+          </a:lnRef>
+          <a:fillRef idx="3">
+            <a:schemeClr val="accent1"/>
+          </a:fillRef>
+          <a:effectRef idx="2">
+            <a:schemeClr val="accent1"/>
+          </a:effectRef>
+          <a:fontRef idx="minor">
+            <a:schemeClr val="lt1"/>
+          </a:fontRef>
+        </p:style>
+        <p:txBody>
+          <a:bodyPr rtlCol="0" anchor="ctr"/>
+          <a:lstStyle/>
+          <a:p>
+            <a:pPr algn="ctr"/>
+          </a:p>
+        </p:txBody>
+      </p:sp>
+      <p:sp>
+        <p:nvSpPr>
+          <p:cNvPr id="20" name="TextBox 19"/>
+          <p:cNvSpPr txBox="1"/>
+          <p:nvPr/>
+        </p:nvSpPr>
+        <p:spPr>
+          <a:xfrm>
+            <a:off x="3429000" y="566928"/>
+            <a:ext cx="8412480" cy="457200"/>
+          </a:xfrm>
+          <a:prstGeom prst="rect">
+            <a:avLst/>
+          </a:prstGeom>
+          <a:noFill/>
+        </p:spPr>
+        <p:txBody>
+          <a:bodyPr wrap="square" anchor="ctr" lIns="0" rIns="0" tIns="0" bIns="0">
+            <a:spAutoFit/>
+          </a:bodyPr>
+          <a:lstStyle/>
+          <a:p>
+            <a:pPr algn="l"/>
+            <a:r>
+              <a:rPr sz="1300" b="0">
+                <a:solidFill>
+                  <a:srgbClr val="DCDDDE"/>
+                </a:solidFill>
+                <a:latin typeface="Hiragino Kaku Gothic Pro"/>
+                <a:ea typeface="Hiragino Kaku Gothic Pro"/>
+                <a:cs typeface="Hiragino Kaku Gothic Pro"/>
+              </a:rPr>
+              <a:t>10_Daily / 2026-10-10.md</a:t>
+            </a:r>
+          </a:p>
+        </p:txBody>
+      </p:sp>
+      <p:sp>
+        <p:nvSpPr>
+          <p:cNvPr id="21" name="TextBox 20"/>
+          <p:cNvSpPr txBox="1"/>
+          <p:nvPr/>
+        </p:nvSpPr>
+        <p:spPr>
+          <a:xfrm>
+            <a:off x="3429000" y="1234440"/>
+            <a:ext cx="8412480" cy="548640"/>
+          </a:xfrm>
+          <a:prstGeom prst="rect">
+            <a:avLst/>
+          </a:prstGeom>
+          <a:noFill/>
+        </p:spPr>
+        <p:txBody>
+          <a:bodyPr wrap="square" anchor="t" lIns="0" rIns="0" tIns="0" bIns="0">
+            <a:spAutoFit/>
+          </a:bodyPr>
+          <a:lstStyle/>
+          <a:p>
+            <a:pPr algn="l"/>
+            <a:r>
+              <a:rPr sz="3000" b="1">
+                <a:solidFill>
+                  <a:srgbClr val="DCDDDE"/>
+                </a:solidFill>
+                <a:latin typeface="Hiragino Kaku Gothic Pro"/>
+                <a:ea typeface="Hiragino Kaku Gothic Pro"/>
+                <a:cs typeface="Hiragino Kaku Gothic Pro"/>
+              </a:rPr>
+              <a:t>2026-10-10</a:t>
+            </a:r>
+          </a:p>
+        </p:txBody>
+      </p:sp>
+      <p:sp>
+        <p:nvSpPr>
+          <p:cNvPr id="22" name="TextBox 21"/>
+          <p:cNvSpPr txBox="1"/>
+          <p:nvPr/>
+        </p:nvSpPr>
+        <p:spPr>
+          <a:xfrm>
+            <a:off x="3429000" y="1920240"/>
+            <a:ext cx="8412480" cy="411480"/>
+          </a:xfrm>
+          <a:prstGeom prst="rect">
+            <a:avLst/>
+          </a:prstGeom>
+          <a:noFill/>
+        </p:spPr>
+        <p:txBody>
+          <a:bodyPr wrap="square" anchor="t" lIns="0" rIns="0" tIns="0" bIns="0">
+            <a:spAutoFit/>
+          </a:bodyPr>
+          <a:lstStyle/>
+          <a:p>
+            <a:pPr algn="l"/>
+            <a:r>
+              <a:rPr sz="1800" b="1">
+                <a:solidFill>
+                  <a:srgbClr val="8B7CF6"/>
+                </a:solidFill>
+                <a:latin typeface="Hiragino Kaku Gothic Pro"/>
+                <a:ea typeface="Hiragino Kaku Gothic Pro"/>
+                <a:cs typeface="Hiragino Kaku Gothic Pro"/>
+              </a:rPr>
+              <a:t>今日やること</a:t>
+            </a:r>
+          </a:p>
+        </p:txBody>
+      </p:sp>
+      <p:sp>
+        <p:nvSpPr>
+          <p:cNvPr id="23" name="TextBox 22"/>
+          <p:cNvSpPr txBox="1"/>
+          <p:nvPr/>
+        </p:nvSpPr>
+        <p:spPr>
+          <a:xfrm>
+            <a:off x="3611880" y="2423160"/>
+            <a:ext cx="8229600" cy="384048"/>
+          </a:xfrm>
+          <a:prstGeom prst="rect">
+            <a:avLst/>
+          </a:prstGeom>
+          <a:noFill/>
+        </p:spPr>
+        <p:txBody>
+          <a:bodyPr wrap="square" anchor="t" lIns="0" rIns="0" tIns="0" bIns="0">
+            <a:spAutoFit/>
+          </a:bodyPr>
+          <a:lstStyle/>
+          <a:p>
+            <a:pPr algn="l"/>
+            <a:r>
+              <a:rPr sz="1600" b="0">
+                <a:solidFill>
+                  <a:srgbClr val="8A8A8A"/>
+                </a:solidFill>
+                <a:latin typeface="Hiragino Kaku Gothic Pro"/>
+                <a:ea typeface="Hiragino Kaku Gothic Pro"/>
+                <a:cs typeface="Hiragino Kaku Gothic Pro"/>
+              </a:rPr>
+              <a:t>☐  </a:t>
+            </a:r>
+            <a:r>
+              <a:rPr sz="1600" b="0">
+                <a:solidFill>
+                  <a:srgbClr val="DCDDDE"/>
+                </a:solidFill>
+                <a:latin typeface="Hiragino Kaku Gothic Pro"/>
+                <a:ea typeface="Hiragino Kaku Gothic Pro"/>
+                <a:cs typeface="Hiragino Kaku Gothic Pro"/>
+              </a:rPr>
+              <a:t>確認事項テンプレを1枚つくる  ← Top1</a:t>
+            </a:r>
+          </a:p>
+        </p:txBody>
+      </p:sp>
+      <p:sp>
+        <p:nvSpPr>
+          <p:cNvPr id="24" name="TextBox 23"/>
+          <p:cNvSpPr txBox="1"/>
+          <p:nvPr/>
+        </p:nvSpPr>
+        <p:spPr>
+          <a:xfrm>
+            <a:off x="3611880" y="2880360"/>
+            <a:ext cx="8229600" cy="384048"/>
+          </a:xfrm>
+          <a:prstGeom prst="rect">
+            <a:avLst/>
+          </a:prstGeom>
+          <a:noFill/>
+        </p:spPr>
+        <p:txBody>
+          <a:bodyPr wrap="square" anchor="t" lIns="0" rIns="0" tIns="0" bIns="0">
+            <a:spAutoFit/>
+          </a:bodyPr>
+          <a:lstStyle/>
+          <a:p>
+            <a:pPr algn="l"/>
+            <a:r>
+              <a:rPr sz="1600" b="0">
+                <a:solidFill>
+                  <a:srgbClr val="8A8A8A"/>
+                </a:solidFill>
+                <a:latin typeface="Hiragino Kaku Gothic Pro"/>
+                <a:ea typeface="Hiragino Kaku Gothic Pro"/>
+                <a:cs typeface="Hiragino Kaku Gothic Pro"/>
+              </a:rPr>
+              <a:t>☐  </a:t>
+            </a:r>
+            <a:r>
+              <a:rPr sz="1600" b="0">
+                <a:solidFill>
+                  <a:srgbClr val="DCDDDE"/>
+                </a:solidFill>
+                <a:latin typeface="Hiragino Kaku Gothic Pro"/>
+                <a:ea typeface="Hiragino Kaku Gothic Pro"/>
+                <a:cs typeface="Hiragino Kaku Gothic Pro"/>
+              </a:rPr>
+              <a:t>定例の論点を3つ出す  ← Top2</a:t>
+            </a:r>
+          </a:p>
+        </p:txBody>
+      </p:sp>
+      <p:sp>
+        <p:nvSpPr>
+          <p:cNvPr id="25" name="TextBox 24"/>
+          <p:cNvSpPr txBox="1"/>
+          <p:nvPr/>
+        </p:nvSpPr>
+        <p:spPr>
+          <a:xfrm>
+            <a:off x="3611880" y="3337560"/>
+            <a:ext cx="8229600" cy="384048"/>
+          </a:xfrm>
+          <a:prstGeom prst="rect">
+            <a:avLst/>
+          </a:prstGeom>
+          <a:noFill/>
+        </p:spPr>
+        <p:txBody>
+          <a:bodyPr wrap="square" anchor="t" lIns="0" rIns="0" tIns="0" bIns="0">
+            <a:spAutoFit/>
+          </a:bodyPr>
+          <a:lstStyle/>
+          <a:p>
+            <a:pPr algn="l"/>
+            <a:r>
+              <a:rPr sz="1600" b="0">
+                <a:solidFill>
+                  <a:srgbClr val="8A8A8A"/>
+                </a:solidFill>
+                <a:latin typeface="Hiragino Kaku Gothic Pro"/>
+                <a:ea typeface="Hiragino Kaku Gothic Pro"/>
+                <a:cs typeface="Hiragino Kaku Gothic Pro"/>
+              </a:rPr>
+              <a:t>☐  </a:t>
+            </a:r>
+            <a:r>
+              <a:rPr sz="1600" b="0">
+                <a:solidFill>
+                  <a:srgbClr val="DCDDDE"/>
+                </a:solidFill>
+                <a:latin typeface="Hiragino Kaku Gothic Pro"/>
+                <a:ea typeface="Hiragino Kaku Gothic Pro"/>
+                <a:cs typeface="Hiragino Kaku Gothic Pro"/>
+              </a:rPr>
+              <a:t>Permanent を1枚書く  ← Top3</a:t>
             </a:r>
           </a:p>
         </p:txBody>
@@ -3709,7 +6192,7 @@
             <a:avLst/>
           </a:prstGeom>
           <a:solidFill>
-            <a:srgbClr val="141414"/>
+            <a:srgbClr val="1E1E1E"/>
           </a:solidFill>
           <a:ln>
             <a:noFill/>
@@ -3740,14 +6223,190 @@
       </p:sp>
       <p:sp>
         <p:nvSpPr>
-          <p:cNvPr id="3" name="TextBox 2"/>
+          <p:cNvPr id="3" name="Rectangle 2"/>
+          <p:cNvSpPr/>
+          <p:nvPr/>
+        </p:nvSpPr>
+        <p:spPr>
+          <a:xfrm>
+            <a:off x="0" y="0"/>
+            <a:ext cx="12191695" cy="457200"/>
+          </a:xfrm>
+          <a:prstGeom prst="rect">
+            <a:avLst/>
+          </a:prstGeom>
+          <a:solidFill>
+            <a:srgbClr val="323232"/>
+          </a:solidFill>
+          <a:ln>
+            <a:noFill/>
+          </a:ln>
+          <a:effectLst/>
+        </p:spPr>
+        <p:style>
+          <a:lnRef idx="1">
+            <a:schemeClr val="accent1"/>
+          </a:lnRef>
+          <a:fillRef idx="3">
+            <a:schemeClr val="accent1"/>
+          </a:fillRef>
+          <a:effectRef idx="2">
+            <a:schemeClr val="accent1"/>
+          </a:effectRef>
+          <a:fontRef idx="minor">
+            <a:schemeClr val="lt1"/>
+          </a:fontRef>
+        </p:style>
+        <p:txBody>
+          <a:bodyPr rtlCol="0" anchor="ctr"/>
+          <a:lstStyle/>
+          <a:p>
+            <a:pPr algn="ctr"/>
+          </a:p>
+        </p:txBody>
+      </p:sp>
+      <p:sp>
+        <p:nvSpPr>
+          <p:cNvPr id="4" name="Oval 3"/>
+          <p:cNvSpPr/>
+          <p:nvPr/>
+        </p:nvSpPr>
+        <p:spPr>
+          <a:xfrm>
+            <a:off x="256032" y="155448"/>
+            <a:ext cx="155448" cy="155448"/>
+          </a:xfrm>
+          <a:prstGeom prst="ellipse">
+            <a:avLst/>
+          </a:prstGeom>
+          <a:solidFill>
+            <a:srgbClr val="FF5F56"/>
+          </a:solidFill>
+          <a:ln>
+            <a:noFill/>
+          </a:ln>
+          <a:effectLst/>
+        </p:spPr>
+        <p:style>
+          <a:lnRef idx="1">
+            <a:schemeClr val="accent1"/>
+          </a:lnRef>
+          <a:fillRef idx="3">
+            <a:schemeClr val="accent1"/>
+          </a:fillRef>
+          <a:effectRef idx="2">
+            <a:schemeClr val="accent1"/>
+          </a:effectRef>
+          <a:fontRef idx="minor">
+            <a:schemeClr val="lt1"/>
+          </a:fontRef>
+        </p:style>
+        <p:txBody>
+          <a:bodyPr rtlCol="0" anchor="ctr"/>
+          <a:lstStyle/>
+          <a:p>
+            <a:pPr algn="ctr"/>
+          </a:p>
+        </p:txBody>
+      </p:sp>
+      <p:sp>
+        <p:nvSpPr>
+          <p:cNvPr id="5" name="Oval 4"/>
+          <p:cNvSpPr/>
+          <p:nvPr/>
+        </p:nvSpPr>
+        <p:spPr>
+          <a:xfrm>
+            <a:off x="548640" y="155448"/>
+            <a:ext cx="155448" cy="155448"/>
+          </a:xfrm>
+          <a:prstGeom prst="ellipse">
+            <a:avLst/>
+          </a:prstGeom>
+          <a:solidFill>
+            <a:srgbClr val="FFBD2E"/>
+          </a:solidFill>
+          <a:ln>
+            <a:noFill/>
+          </a:ln>
+          <a:effectLst/>
+        </p:spPr>
+        <p:style>
+          <a:lnRef idx="1">
+            <a:schemeClr val="accent1"/>
+          </a:lnRef>
+          <a:fillRef idx="3">
+            <a:schemeClr val="accent1"/>
+          </a:fillRef>
+          <a:effectRef idx="2">
+            <a:schemeClr val="accent1"/>
+          </a:effectRef>
+          <a:fontRef idx="minor">
+            <a:schemeClr val="lt1"/>
+          </a:fontRef>
+        </p:style>
+        <p:txBody>
+          <a:bodyPr rtlCol="0" anchor="ctr"/>
+          <a:lstStyle/>
+          <a:p>
+            <a:pPr algn="ctr"/>
+          </a:p>
+        </p:txBody>
+      </p:sp>
+      <p:sp>
+        <p:nvSpPr>
+          <p:cNvPr id="6" name="Oval 5"/>
+          <p:cNvSpPr/>
+          <p:nvPr/>
+        </p:nvSpPr>
+        <p:spPr>
+          <a:xfrm>
+            <a:off x="841248" y="155448"/>
+            <a:ext cx="155448" cy="155448"/>
+          </a:xfrm>
+          <a:prstGeom prst="ellipse">
+            <a:avLst/>
+          </a:prstGeom>
+          <a:solidFill>
+            <a:srgbClr val="27C93F"/>
+          </a:solidFill>
+          <a:ln>
+            <a:noFill/>
+          </a:ln>
+          <a:effectLst/>
+        </p:spPr>
+        <p:style>
+          <a:lnRef idx="1">
+            <a:schemeClr val="accent1"/>
+          </a:lnRef>
+          <a:fillRef idx="3">
+            <a:schemeClr val="accent1"/>
+          </a:fillRef>
+          <a:effectRef idx="2">
+            <a:schemeClr val="accent1"/>
+          </a:effectRef>
+          <a:fontRef idx="minor">
+            <a:schemeClr val="lt1"/>
+          </a:fontRef>
+        </p:style>
+        <p:txBody>
+          <a:bodyPr rtlCol="0" anchor="ctr"/>
+          <a:lstStyle/>
+          <a:p>
+            <a:pPr algn="ctr"/>
+          </a:p>
+        </p:txBody>
+      </p:sp>
+      <p:sp>
+        <p:nvSpPr>
+          <p:cNvPr id="7" name="TextBox 6"/>
           <p:cNvSpPr txBox="1"/>
           <p:nvPr/>
         </p:nvSpPr>
         <p:spPr>
           <a:xfrm>
-            <a:off x="822960" y="640080"/>
-            <a:ext cx="10607040" cy="548640"/>
+            <a:off x="1371600" y="45720"/>
+            <a:ext cx="5486400" cy="365760"/>
           </a:xfrm>
           <a:prstGeom prst="rect">
             <a:avLst/>
@@ -3755,40 +6414,137 @@
           <a:noFill/>
         </p:spPr>
         <p:txBody>
-          <a:bodyPr wrap="square">
+          <a:bodyPr wrap="square" anchor="ctr" lIns="0" rIns="0" tIns="0" bIns="0">
             <a:spAutoFit/>
           </a:bodyPr>
           <a:lstStyle/>
           <a:p>
-            <a:pPr algn="l">
-              <a:spcAft>
-                <a:spcPts val="800"/>
-              </a:spcAft>
-            </a:pPr>
-            <a:r>
-              <a:rPr sz="2000" b="1">
-                <a:solidFill>
-                  <a:srgbClr val="E87A3E"/>
-                </a:solidFill>
-                <a:latin typeface="Hiragino Kaku Gothic Pro"/>
-                <a:ea typeface="Hiragino Kaku Gothic Pro"/>
-                <a:cs typeface="Hiragino Kaku Gothic Pro"/>
-              </a:rPr>
-              <a:t>STEP 3 ― つなげる</a:t>
-            </a:r>
-          </a:p>
-        </p:txBody>
-      </p:sp>
-      <p:sp>
-        <p:nvSpPr>
-          <p:cNvPr id="4" name="TextBox 3"/>
+            <a:pPr algn="l"/>
+            <a:r>
+              <a:rPr sz="1300" b="0">
+                <a:solidFill>
+                  <a:srgbClr val="8A8A8A"/>
+                </a:solidFill>
+                <a:latin typeface="Hiragino Kaku Gothic Pro"/>
+                <a:ea typeface="Hiragino Kaku Gothic Pro"/>
+                <a:cs typeface="Hiragino Kaku Gothic Pro"/>
+              </a:rPr>
+              <a:t>Obsidian — 第二の脳</a:t>
+            </a:r>
+          </a:p>
+        </p:txBody>
+      </p:sp>
+      <p:sp>
+        <p:nvSpPr>
+          <p:cNvPr id="8" name="Rounded Rectangle 7"/>
+          <p:cNvSpPr/>
+          <p:nvPr/>
+        </p:nvSpPr>
+        <p:spPr>
+          <a:xfrm>
+            <a:off x="10012680" y="73152"/>
+            <a:ext cx="1965960" cy="310896"/>
+          </a:xfrm>
+          <a:prstGeom prst="roundRect">
+            <a:avLst>
+              <a:gd name="adj" fmla="val 8000"/>
+            </a:avLst>
+          </a:prstGeom>
+          <a:solidFill>
+            <a:srgbClr val="8B7CF6"/>
+          </a:solidFill>
+          <a:ln>
+            <a:noFill/>
+          </a:ln>
+          <a:effectLst/>
+        </p:spPr>
+        <p:style>
+          <a:lnRef idx="1">
+            <a:schemeClr val="accent1"/>
+          </a:lnRef>
+          <a:fillRef idx="3">
+            <a:schemeClr val="accent1"/>
+          </a:fillRef>
+          <a:effectRef idx="2">
+            <a:schemeClr val="accent1"/>
+          </a:effectRef>
+          <a:fontRef idx="minor">
+            <a:schemeClr val="lt1"/>
+          </a:fontRef>
+        </p:style>
+        <p:txBody>
+          <a:bodyPr rtlCol="0" anchor="ctr"/>
+          <a:lstStyle/>
+          <a:p>
+            <a:pPr algn="ctr"/>
+            <a:r>
+              <a:rPr sz="1200" b="1">
+                <a:solidFill>
+                  <a:srgbClr val="FFFFFF"/>
+                </a:solidFill>
+                <a:latin typeface="Hiragino Kaku Gothic Pro"/>
+                <a:ea typeface="Hiragino Kaku Gothic Pro"/>
+                <a:cs typeface="Hiragino Kaku Gothic Pro"/>
+              </a:rPr>
+              <a:t>STEP 3 つなげる</a:t>
+            </a:r>
+          </a:p>
+        </p:txBody>
+      </p:sp>
+      <p:sp>
+        <p:nvSpPr>
+          <p:cNvPr id="9" name="Rectangle 8"/>
+          <p:cNvSpPr/>
+          <p:nvPr/>
+        </p:nvSpPr>
+        <p:spPr>
+          <a:xfrm>
+            <a:off x="0" y="457200"/>
+            <a:ext cx="3108960" cy="6400800"/>
+          </a:xfrm>
+          <a:prstGeom prst="rect">
+            <a:avLst/>
+          </a:prstGeom>
+          <a:solidFill>
+            <a:srgbClr val="262626"/>
+          </a:solidFill>
+          <a:ln>
+            <a:noFill/>
+          </a:ln>
+          <a:effectLst/>
+        </p:spPr>
+        <p:style>
+          <a:lnRef idx="1">
+            <a:schemeClr val="accent1"/>
+          </a:lnRef>
+          <a:fillRef idx="3">
+            <a:schemeClr val="accent1"/>
+          </a:fillRef>
+          <a:effectRef idx="2">
+            <a:schemeClr val="accent1"/>
+          </a:effectRef>
+          <a:fontRef idx="minor">
+            <a:schemeClr val="lt1"/>
+          </a:fontRef>
+        </p:style>
+        <p:txBody>
+          <a:bodyPr rtlCol="0" anchor="ctr"/>
+          <a:lstStyle/>
+          <a:p>
+            <a:pPr algn="ctr"/>
+          </a:p>
+        </p:txBody>
+      </p:sp>
+      <p:sp>
+        <p:nvSpPr>
+          <p:cNvPr id="10" name="TextBox 9"/>
           <p:cNvSpPr txBox="1"/>
           <p:nvPr/>
         </p:nvSpPr>
         <p:spPr>
           <a:xfrm>
-            <a:off x="822960" y="1234440"/>
-            <a:ext cx="10607040" cy="1737360"/>
+            <a:off x="274320" y="566928"/>
+            <a:ext cx="2743200" cy="274320"/>
           </a:xfrm>
           <a:prstGeom prst="rect">
             <a:avLst/>
@@ -3796,40 +6552,36 @@
           <a:noFill/>
         </p:spPr>
         <p:txBody>
-          <a:bodyPr wrap="square">
+          <a:bodyPr wrap="square" anchor="t" lIns="0" rIns="0" tIns="0" bIns="0">
             <a:spAutoFit/>
           </a:bodyPr>
           <a:lstStyle/>
           <a:p>
-            <a:pPr algn="l">
-              <a:spcAft>
-                <a:spcPts val="800"/>
-              </a:spcAft>
-            </a:pPr>
-            <a:r>
-              <a:rPr sz="3400" b="1">
-                <a:solidFill>
-                  <a:srgbClr val="F5F3F0"/>
-                </a:solidFill>
-                <a:latin typeface="Hiragino Kaku Gothic Pro"/>
-                <a:ea typeface="Hiragino Kaku Gothic Pro"/>
-                <a:cs typeface="Hiragino Kaku Gothic Pro"/>
-              </a:rPr>
-              <a:t>Permanent Note を1枚</a:t>
-            </a:r>
-          </a:p>
-        </p:txBody>
-      </p:sp>
-      <p:sp>
-        <p:nvSpPr>
-          <p:cNvPr id="5" name="TextBox 4"/>
+            <a:pPr algn="l"/>
+            <a:r>
+              <a:rPr sz="1100" b="1">
+                <a:solidFill>
+                  <a:srgbClr val="8A8A8A"/>
+                </a:solidFill>
+                <a:latin typeface="Hiragino Kaku Gothic Pro"/>
+                <a:ea typeface="Hiragino Kaku Gothic Pro"/>
+                <a:cs typeface="Hiragino Kaku Gothic Pro"/>
+              </a:rPr>
+              <a:t>VAULT ／ 第二の脳</a:t>
+            </a:r>
+          </a:p>
+        </p:txBody>
+      </p:sp>
+      <p:sp>
+        <p:nvSpPr>
+          <p:cNvPr id="11" name="TextBox 10"/>
           <p:cNvSpPr txBox="1"/>
           <p:nvPr/>
         </p:nvSpPr>
         <p:spPr>
           <a:xfrm>
-            <a:off x="914400" y="2880360"/>
-            <a:ext cx="10424160" cy="3566160"/>
+            <a:off x="384048" y="987552"/>
+            <a:ext cx="2651760" cy="365760"/>
           </a:xfrm>
           <a:prstGeom prst="rect">
             <a:avLst/>
@@ -3837,62 +6589,672 @@
           <a:noFill/>
         </p:spPr>
         <p:txBody>
-          <a:bodyPr wrap="square">
+          <a:bodyPr wrap="square" anchor="ctr" lIns="0" rIns="0" tIns="0" bIns="0">
             <a:spAutoFit/>
           </a:bodyPr>
           <a:lstStyle/>
           <a:p>
-            <a:pPr algn="l">
-              <a:spcAft>
-                <a:spcPts val="1400"/>
-              </a:spcAft>
-            </a:pPr>
-            <a:r>
-              <a:rPr sz="2300" b="0">
-                <a:solidFill>
-                  <a:srgbClr val="F5F3F0"/>
-                </a:solidFill>
-                <a:latin typeface="Hiragino Kaku Gothic Pro"/>
-                <a:ea typeface="Hiragino Kaku Gothic Pro"/>
-                <a:cs typeface="Hiragino Kaku Gothic Pro"/>
-              </a:rPr>
-              <a:t>・Inboxのメモを、自分の言葉で言い直す</a:t>
-            </a:r>
-          </a:p>
-          <a:p>
-            <a:pPr algn="l">
-              <a:spcAft>
-                <a:spcPts val="1400"/>
-              </a:spcAft>
-            </a:pPr>
-            <a:r>
-              <a:rPr sz="2300" b="0">
-                <a:solidFill>
-                  <a:srgbClr val="F5F3F0"/>
-                </a:solidFill>
-                <a:latin typeface="Hiragino Kaku Gothic Pro"/>
-                <a:ea typeface="Hiragino Kaku Gothic Pro"/>
-                <a:cs typeface="Hiragino Kaku Gothic Pro"/>
-              </a:rPr>
-              <a:t>・一言／説明／具体例／関連、の4つを埋める</a:t>
-            </a:r>
-          </a:p>
-          <a:p>
-            <a:pPr algn="l">
-              <a:spcAft>
-                <a:spcPts val="1400"/>
-              </a:spcAft>
-            </a:pPr>
-            <a:r>
-              <a:rPr sz="2300" b="0">
-                <a:solidFill>
-                  <a:srgbClr val="F5F3F0"/>
-                </a:solidFill>
-                <a:latin typeface="Hiragino Kaku Gothic Pro"/>
-                <a:ea typeface="Hiragino Kaku Gothic Pro"/>
-                <a:cs typeface="Hiragino Kaku Gothic Pro"/>
-              </a:rPr>
-              <a:t>・50_PermanentNotes に保存する</a:t>
+            <a:pPr algn="l"/>
+            <a:r>
+              <a:rPr sz="1300" b="0">
+                <a:solidFill>
+                  <a:srgbClr val="8A8A8A"/>
+                </a:solidFill>
+                <a:latin typeface="Hiragino Kaku Gothic Pro"/>
+                <a:ea typeface="Hiragino Kaku Gothic Pro"/>
+                <a:cs typeface="Hiragino Kaku Gothic Pro"/>
+              </a:rPr>
+              <a:t/>
+            </a:r>
+            <a:r>
+              <a:rPr sz="1300" b="0">
+                <a:solidFill>
+                  <a:srgbClr val="8A8A8A"/>
+                </a:solidFill>
+                <a:latin typeface="Hiragino Kaku Gothic Pro"/>
+                <a:ea typeface="Hiragino Kaku Gothic Pro"/>
+                <a:cs typeface="Hiragino Kaku Gothic Pro"/>
+              </a:rPr>
+              <a:t>00_Inbox</a:t>
+            </a:r>
+          </a:p>
+        </p:txBody>
+      </p:sp>
+      <p:sp>
+        <p:nvSpPr>
+          <p:cNvPr id="12" name="TextBox 11"/>
+          <p:cNvSpPr txBox="1"/>
+          <p:nvPr/>
+        </p:nvSpPr>
+        <p:spPr>
+          <a:xfrm>
+            <a:off x="384048" y="1444752"/>
+            <a:ext cx="2651760" cy="365760"/>
+          </a:xfrm>
+          <a:prstGeom prst="rect">
+            <a:avLst/>
+          </a:prstGeom>
+          <a:noFill/>
+        </p:spPr>
+        <p:txBody>
+          <a:bodyPr wrap="square" anchor="ctr" lIns="0" rIns="0" tIns="0" bIns="0">
+            <a:spAutoFit/>
+          </a:bodyPr>
+          <a:lstStyle/>
+          <a:p>
+            <a:pPr algn="l"/>
+            <a:r>
+              <a:rPr sz="1300" b="0">
+                <a:solidFill>
+                  <a:srgbClr val="8A8A8A"/>
+                </a:solidFill>
+                <a:latin typeface="Hiragino Kaku Gothic Pro"/>
+                <a:ea typeface="Hiragino Kaku Gothic Pro"/>
+                <a:cs typeface="Hiragino Kaku Gothic Pro"/>
+              </a:rPr>
+              <a:t/>
+            </a:r>
+            <a:r>
+              <a:rPr sz="1300" b="0">
+                <a:solidFill>
+                  <a:srgbClr val="8A8A8A"/>
+                </a:solidFill>
+                <a:latin typeface="Hiragino Kaku Gothic Pro"/>
+                <a:ea typeface="Hiragino Kaku Gothic Pro"/>
+                <a:cs typeface="Hiragino Kaku Gothic Pro"/>
+              </a:rPr>
+              <a:t>10_Daily</a:t>
+            </a:r>
+          </a:p>
+        </p:txBody>
+      </p:sp>
+      <p:sp>
+        <p:nvSpPr>
+          <p:cNvPr id="13" name="TextBox 12"/>
+          <p:cNvSpPr txBox="1"/>
+          <p:nvPr/>
+        </p:nvSpPr>
+        <p:spPr>
+          <a:xfrm>
+            <a:off x="384048" y="1901952"/>
+            <a:ext cx="2651760" cy="365760"/>
+          </a:xfrm>
+          <a:prstGeom prst="rect">
+            <a:avLst/>
+          </a:prstGeom>
+          <a:noFill/>
+        </p:spPr>
+        <p:txBody>
+          <a:bodyPr wrap="square" anchor="ctr" lIns="0" rIns="0" tIns="0" bIns="0">
+            <a:spAutoFit/>
+          </a:bodyPr>
+          <a:lstStyle/>
+          <a:p>
+            <a:pPr algn="l"/>
+            <a:r>
+              <a:rPr sz="1300" b="0">
+                <a:solidFill>
+                  <a:srgbClr val="8A8A8A"/>
+                </a:solidFill>
+                <a:latin typeface="Hiragino Kaku Gothic Pro"/>
+                <a:ea typeface="Hiragino Kaku Gothic Pro"/>
+                <a:cs typeface="Hiragino Kaku Gothic Pro"/>
+              </a:rPr>
+              <a:t/>
+            </a:r>
+            <a:r>
+              <a:rPr sz="1300" b="0">
+                <a:solidFill>
+                  <a:srgbClr val="8A8A8A"/>
+                </a:solidFill>
+                <a:latin typeface="Hiragino Kaku Gothic Pro"/>
+                <a:ea typeface="Hiragino Kaku Gothic Pro"/>
+                <a:cs typeface="Hiragino Kaku Gothic Pro"/>
+              </a:rPr>
+              <a:t>20_Projects</a:t>
+            </a:r>
+          </a:p>
+        </p:txBody>
+      </p:sp>
+      <p:sp>
+        <p:nvSpPr>
+          <p:cNvPr id="14" name="TextBox 13"/>
+          <p:cNvSpPr txBox="1"/>
+          <p:nvPr/>
+        </p:nvSpPr>
+        <p:spPr>
+          <a:xfrm>
+            <a:off x="384048" y="2359152"/>
+            <a:ext cx="2651760" cy="365760"/>
+          </a:xfrm>
+          <a:prstGeom prst="rect">
+            <a:avLst/>
+          </a:prstGeom>
+          <a:noFill/>
+        </p:spPr>
+        <p:txBody>
+          <a:bodyPr wrap="square" anchor="ctr" lIns="0" rIns="0" tIns="0" bIns="0">
+            <a:spAutoFit/>
+          </a:bodyPr>
+          <a:lstStyle/>
+          <a:p>
+            <a:pPr algn="l"/>
+            <a:r>
+              <a:rPr sz="1300" b="0">
+                <a:solidFill>
+                  <a:srgbClr val="8A8A8A"/>
+                </a:solidFill>
+                <a:latin typeface="Hiragino Kaku Gothic Pro"/>
+                <a:ea typeface="Hiragino Kaku Gothic Pro"/>
+                <a:cs typeface="Hiragino Kaku Gothic Pro"/>
+              </a:rPr>
+              <a:t/>
+            </a:r>
+            <a:r>
+              <a:rPr sz="1300" b="0">
+                <a:solidFill>
+                  <a:srgbClr val="8A8A8A"/>
+                </a:solidFill>
+                <a:latin typeface="Hiragino Kaku Gothic Pro"/>
+                <a:ea typeface="Hiragino Kaku Gothic Pro"/>
+                <a:cs typeface="Hiragino Kaku Gothic Pro"/>
+              </a:rPr>
+              <a:t>30_Areas</a:t>
+            </a:r>
+          </a:p>
+        </p:txBody>
+      </p:sp>
+      <p:sp>
+        <p:nvSpPr>
+          <p:cNvPr id="15" name="TextBox 14"/>
+          <p:cNvSpPr txBox="1"/>
+          <p:nvPr/>
+        </p:nvSpPr>
+        <p:spPr>
+          <a:xfrm>
+            <a:off x="384048" y="2816352"/>
+            <a:ext cx="2651760" cy="365760"/>
+          </a:xfrm>
+          <a:prstGeom prst="rect">
+            <a:avLst/>
+          </a:prstGeom>
+          <a:noFill/>
+        </p:spPr>
+        <p:txBody>
+          <a:bodyPr wrap="square" anchor="ctr" lIns="0" rIns="0" tIns="0" bIns="0">
+            <a:spAutoFit/>
+          </a:bodyPr>
+          <a:lstStyle/>
+          <a:p>
+            <a:pPr algn="l"/>
+            <a:r>
+              <a:rPr sz="1300" b="0">
+                <a:solidFill>
+                  <a:srgbClr val="8A8A8A"/>
+                </a:solidFill>
+                <a:latin typeface="Hiragino Kaku Gothic Pro"/>
+                <a:ea typeface="Hiragino Kaku Gothic Pro"/>
+                <a:cs typeface="Hiragino Kaku Gothic Pro"/>
+              </a:rPr>
+              <a:t/>
+            </a:r>
+            <a:r>
+              <a:rPr sz="1300" b="0">
+                <a:solidFill>
+                  <a:srgbClr val="8A8A8A"/>
+                </a:solidFill>
+                <a:latin typeface="Hiragino Kaku Gothic Pro"/>
+                <a:ea typeface="Hiragino Kaku Gothic Pro"/>
+                <a:cs typeface="Hiragino Kaku Gothic Pro"/>
+              </a:rPr>
+              <a:t>40_Resources</a:t>
+            </a:r>
+          </a:p>
+        </p:txBody>
+      </p:sp>
+      <p:sp>
+        <p:nvSpPr>
+          <p:cNvPr id="16" name="Rounded Rectangle 15"/>
+          <p:cNvSpPr/>
+          <p:nvPr/>
+        </p:nvSpPr>
+        <p:spPr>
+          <a:xfrm>
+            <a:off x="164592" y="3246120"/>
+            <a:ext cx="2788920" cy="384048"/>
+          </a:xfrm>
+          <a:prstGeom prst="roundRect">
+            <a:avLst>
+              <a:gd name="adj" fmla="val 8000"/>
+            </a:avLst>
+          </a:prstGeom>
+          <a:solidFill>
+            <a:srgbClr val="2E2A47"/>
+          </a:solidFill>
+          <a:ln>
+            <a:noFill/>
+          </a:ln>
+          <a:effectLst/>
+        </p:spPr>
+        <p:style>
+          <a:lnRef idx="1">
+            <a:schemeClr val="accent1"/>
+          </a:lnRef>
+          <a:fillRef idx="3">
+            <a:schemeClr val="accent1"/>
+          </a:fillRef>
+          <a:effectRef idx="2">
+            <a:schemeClr val="accent1"/>
+          </a:effectRef>
+          <a:fontRef idx="minor">
+            <a:schemeClr val="lt1"/>
+          </a:fontRef>
+        </p:style>
+        <p:txBody>
+          <a:bodyPr rtlCol="0" anchor="ctr"/>
+          <a:lstStyle/>
+          <a:p>
+            <a:pPr algn="ctr"/>
+          </a:p>
+        </p:txBody>
+      </p:sp>
+      <p:sp>
+        <p:nvSpPr>
+          <p:cNvPr id="17" name="TextBox 16"/>
+          <p:cNvSpPr txBox="1"/>
+          <p:nvPr/>
+        </p:nvSpPr>
+        <p:spPr>
+          <a:xfrm>
+            <a:off x="384048" y="3273552"/>
+            <a:ext cx="2651760" cy="365760"/>
+          </a:xfrm>
+          <a:prstGeom prst="rect">
+            <a:avLst/>
+          </a:prstGeom>
+          <a:noFill/>
+        </p:spPr>
+        <p:txBody>
+          <a:bodyPr wrap="square" anchor="ctr" lIns="0" rIns="0" tIns="0" bIns="0">
+            <a:spAutoFit/>
+          </a:bodyPr>
+          <a:lstStyle/>
+          <a:p>
+            <a:pPr algn="l"/>
+            <a:r>
+              <a:rPr sz="1300" b="0">
+                <a:solidFill>
+                  <a:srgbClr val="DCDDDE"/>
+                </a:solidFill>
+                <a:latin typeface="Hiragino Kaku Gothic Pro"/>
+                <a:ea typeface="Hiragino Kaku Gothic Pro"/>
+                <a:cs typeface="Hiragino Kaku Gothic Pro"/>
+              </a:rPr>
+              <a:t/>
+            </a:r>
+            <a:r>
+              <a:rPr sz="1300" b="1">
+                <a:solidFill>
+                  <a:srgbClr val="DCDDDE"/>
+                </a:solidFill>
+                <a:latin typeface="Hiragino Kaku Gothic Pro"/>
+                <a:ea typeface="Hiragino Kaku Gothic Pro"/>
+                <a:cs typeface="Hiragino Kaku Gothic Pro"/>
+              </a:rPr>
+              <a:t>50_PermanentNotes</a:t>
+            </a:r>
+          </a:p>
+        </p:txBody>
+      </p:sp>
+      <p:sp>
+        <p:nvSpPr>
+          <p:cNvPr id="18" name="TextBox 17"/>
+          <p:cNvSpPr txBox="1"/>
+          <p:nvPr/>
+        </p:nvSpPr>
+        <p:spPr>
+          <a:xfrm>
+            <a:off x="384048" y="3730752"/>
+            <a:ext cx="2651760" cy="365760"/>
+          </a:xfrm>
+          <a:prstGeom prst="rect">
+            <a:avLst/>
+          </a:prstGeom>
+          <a:noFill/>
+        </p:spPr>
+        <p:txBody>
+          <a:bodyPr wrap="square" anchor="ctr" lIns="0" rIns="0" tIns="0" bIns="0">
+            <a:spAutoFit/>
+          </a:bodyPr>
+          <a:lstStyle/>
+          <a:p>
+            <a:pPr algn="l"/>
+            <a:r>
+              <a:rPr sz="1300" b="0">
+                <a:solidFill>
+                  <a:srgbClr val="8A8A8A"/>
+                </a:solidFill>
+                <a:latin typeface="Hiragino Kaku Gothic Pro"/>
+                <a:ea typeface="Hiragino Kaku Gothic Pro"/>
+                <a:cs typeface="Hiragino Kaku Gothic Pro"/>
+              </a:rPr>
+              <a:t/>
+            </a:r>
+            <a:r>
+              <a:rPr sz="1300" b="0">
+                <a:solidFill>
+                  <a:srgbClr val="8A8A8A"/>
+                </a:solidFill>
+                <a:latin typeface="Hiragino Kaku Gothic Pro"/>
+                <a:ea typeface="Hiragino Kaku Gothic Pro"/>
+                <a:cs typeface="Hiragino Kaku Gothic Pro"/>
+              </a:rPr>
+              <a:t>90_Archive</a:t>
+            </a:r>
+          </a:p>
+        </p:txBody>
+      </p:sp>
+      <p:sp>
+        <p:nvSpPr>
+          <p:cNvPr id="19" name="Rounded Rectangle 18"/>
+          <p:cNvSpPr/>
+          <p:nvPr/>
+        </p:nvSpPr>
+        <p:spPr>
+          <a:xfrm>
+            <a:off x="3246120" y="566928"/>
+            <a:ext cx="8778240" cy="457200"/>
+          </a:xfrm>
+          <a:prstGeom prst="roundRect">
+            <a:avLst>
+              <a:gd name="adj" fmla="val 8000"/>
+            </a:avLst>
+          </a:prstGeom>
+          <a:solidFill>
+            <a:srgbClr val="2A2A2A"/>
+          </a:solidFill>
+          <a:ln>
+            <a:noFill/>
+          </a:ln>
+          <a:effectLst/>
+        </p:spPr>
+        <p:style>
+          <a:lnRef idx="1">
+            <a:schemeClr val="accent1"/>
+          </a:lnRef>
+          <a:fillRef idx="3">
+            <a:schemeClr val="accent1"/>
+          </a:fillRef>
+          <a:effectRef idx="2">
+            <a:schemeClr val="accent1"/>
+          </a:effectRef>
+          <a:fontRef idx="minor">
+            <a:schemeClr val="lt1"/>
+          </a:fontRef>
+        </p:style>
+        <p:txBody>
+          <a:bodyPr rtlCol="0" anchor="ctr"/>
+          <a:lstStyle/>
+          <a:p>
+            <a:pPr algn="ctr"/>
+          </a:p>
+        </p:txBody>
+      </p:sp>
+      <p:sp>
+        <p:nvSpPr>
+          <p:cNvPr id="20" name="TextBox 19"/>
+          <p:cNvSpPr txBox="1"/>
+          <p:nvPr/>
+        </p:nvSpPr>
+        <p:spPr>
+          <a:xfrm>
+            <a:off x="3429000" y="566928"/>
+            <a:ext cx="8412480" cy="457200"/>
+          </a:xfrm>
+          <a:prstGeom prst="rect">
+            <a:avLst/>
+          </a:prstGeom>
+          <a:noFill/>
+        </p:spPr>
+        <p:txBody>
+          <a:bodyPr wrap="square" anchor="ctr" lIns="0" rIns="0" tIns="0" bIns="0">
+            <a:spAutoFit/>
+          </a:bodyPr>
+          <a:lstStyle/>
+          <a:p>
+            <a:pPr algn="l"/>
+            <a:r>
+              <a:rPr sz="1300" b="0">
+                <a:solidFill>
+                  <a:srgbClr val="DCDDDE"/>
+                </a:solidFill>
+                <a:latin typeface="Hiragino Kaku Gothic Pro"/>
+                <a:ea typeface="Hiragino Kaku Gothic Pro"/>
+                <a:cs typeface="Hiragino Kaku Gothic Pro"/>
+              </a:rPr>
+              <a:t>50_PermanentNotes / 確認は型で出す.md</a:t>
+            </a:r>
+          </a:p>
+        </p:txBody>
+      </p:sp>
+      <p:sp>
+        <p:nvSpPr>
+          <p:cNvPr id="21" name="TextBox 20"/>
+          <p:cNvSpPr txBox="1"/>
+          <p:nvPr/>
+        </p:nvSpPr>
+        <p:spPr>
+          <a:xfrm>
+            <a:off x="3429000" y="1234440"/>
+            <a:ext cx="8412480" cy="548640"/>
+          </a:xfrm>
+          <a:prstGeom prst="rect">
+            <a:avLst/>
+          </a:prstGeom>
+          <a:noFill/>
+        </p:spPr>
+        <p:txBody>
+          <a:bodyPr wrap="square" anchor="t" lIns="0" rIns="0" tIns="0" bIns="0">
+            <a:spAutoFit/>
+          </a:bodyPr>
+          <a:lstStyle/>
+          <a:p>
+            <a:pPr algn="l"/>
+            <a:r>
+              <a:rPr sz="3000" b="1">
+                <a:solidFill>
+                  <a:srgbClr val="DCDDDE"/>
+                </a:solidFill>
+                <a:latin typeface="Hiragino Kaku Gothic Pro"/>
+                <a:ea typeface="Hiragino Kaku Gothic Pro"/>
+                <a:cs typeface="Hiragino Kaku Gothic Pro"/>
+              </a:rPr>
+              <a:t>確認は型で出す</a:t>
+            </a:r>
+          </a:p>
+        </p:txBody>
+      </p:sp>
+      <p:sp>
+        <p:nvSpPr>
+          <p:cNvPr id="22" name="TextBox 21"/>
+          <p:cNvSpPr txBox="1"/>
+          <p:nvPr/>
+        </p:nvSpPr>
+        <p:spPr>
+          <a:xfrm>
+            <a:off x="3429000" y="1920240"/>
+            <a:ext cx="8412480" cy="411480"/>
+          </a:xfrm>
+          <a:prstGeom prst="rect">
+            <a:avLst/>
+          </a:prstGeom>
+          <a:noFill/>
+        </p:spPr>
+        <p:txBody>
+          <a:bodyPr wrap="square" anchor="t" lIns="0" rIns="0" tIns="0" bIns="0">
+            <a:spAutoFit/>
+          </a:bodyPr>
+          <a:lstStyle/>
+          <a:p>
+            <a:pPr algn="l"/>
+            <a:r>
+              <a:rPr sz="1800" b="1">
+                <a:solidFill>
+                  <a:srgbClr val="8B7CF6"/>
+                </a:solidFill>
+                <a:latin typeface="Hiragino Kaku Gothic Pro"/>
+                <a:ea typeface="Hiragino Kaku Gothic Pro"/>
+                <a:cs typeface="Hiragino Kaku Gothic Pro"/>
+              </a:rPr>
+              <a:t>一言でいうと</a:t>
+            </a:r>
+          </a:p>
+        </p:txBody>
+      </p:sp>
+      <p:sp>
+        <p:nvSpPr>
+          <p:cNvPr id="23" name="TextBox 22"/>
+          <p:cNvSpPr txBox="1"/>
+          <p:nvPr/>
+        </p:nvSpPr>
+        <p:spPr>
+          <a:xfrm>
+            <a:off x="3429000" y="2423160"/>
+            <a:ext cx="8412480" cy="384048"/>
+          </a:xfrm>
+          <a:prstGeom prst="rect">
+            <a:avLst/>
+          </a:prstGeom>
+          <a:noFill/>
+        </p:spPr>
+        <p:txBody>
+          <a:bodyPr wrap="square" anchor="t" lIns="0" rIns="0" tIns="0" bIns="0">
+            <a:spAutoFit/>
+          </a:bodyPr>
+          <a:lstStyle/>
+          <a:p>
+            <a:pPr algn="l"/>
+            <a:r>
+              <a:rPr sz="1600" b="0">
+                <a:solidFill>
+                  <a:srgbClr val="DCDDDE"/>
+                </a:solidFill>
+                <a:latin typeface="Hiragino Kaku Gothic Pro"/>
+                <a:ea typeface="Hiragino Kaku Gothic Pro"/>
+                <a:cs typeface="Hiragino Kaku Gothic Pro"/>
+              </a:rPr>
+              <a:t>確認は、システム名・内容・担当・期限・参考の型に揃える</a:t>
+            </a:r>
+          </a:p>
+        </p:txBody>
+      </p:sp>
+      <p:sp>
+        <p:nvSpPr>
+          <p:cNvPr id="24" name="TextBox 23"/>
+          <p:cNvSpPr txBox="1"/>
+          <p:nvPr/>
+        </p:nvSpPr>
+        <p:spPr>
+          <a:xfrm>
+            <a:off x="3429000" y="2880360"/>
+            <a:ext cx="8412480" cy="411480"/>
+          </a:xfrm>
+          <a:prstGeom prst="rect">
+            <a:avLst/>
+          </a:prstGeom>
+          <a:noFill/>
+        </p:spPr>
+        <p:txBody>
+          <a:bodyPr wrap="square" anchor="t" lIns="0" rIns="0" tIns="0" bIns="0">
+            <a:spAutoFit/>
+          </a:bodyPr>
+          <a:lstStyle/>
+          <a:p>
+            <a:pPr algn="l"/>
+            <a:r>
+              <a:rPr sz="1800" b="1">
+                <a:solidFill>
+                  <a:srgbClr val="8B7CF6"/>
+                </a:solidFill>
+                <a:latin typeface="Hiragino Kaku Gothic Pro"/>
+                <a:ea typeface="Hiragino Kaku Gothic Pro"/>
+                <a:cs typeface="Hiragino Kaku Gothic Pro"/>
+              </a:rPr>
+              <a:t>自分の言葉で</a:t>
+            </a:r>
+          </a:p>
+        </p:txBody>
+      </p:sp>
+      <p:sp>
+        <p:nvSpPr>
+          <p:cNvPr id="25" name="TextBox 24"/>
+          <p:cNvSpPr txBox="1"/>
+          <p:nvPr/>
+        </p:nvSpPr>
+        <p:spPr>
+          <a:xfrm>
+            <a:off x="3429000" y="3383280"/>
+            <a:ext cx="8412480" cy="384048"/>
+          </a:xfrm>
+          <a:prstGeom prst="rect">
+            <a:avLst/>
+          </a:prstGeom>
+          <a:noFill/>
+        </p:spPr>
+        <p:txBody>
+          <a:bodyPr wrap="square" anchor="t" lIns="0" rIns="0" tIns="0" bIns="0">
+            <a:spAutoFit/>
+          </a:bodyPr>
+          <a:lstStyle/>
+          <a:p>
+            <a:pPr algn="l"/>
+            <a:r>
+              <a:rPr sz="1600" b="0">
+                <a:solidFill>
+                  <a:srgbClr val="DCDDDE"/>
+                </a:solidFill>
+                <a:latin typeface="Hiragino Kaku Gothic Pro"/>
+                <a:ea typeface="Hiragino Kaku Gothic Pro"/>
+                <a:cs typeface="Hiragino Kaku Gothic Pro"/>
+              </a:rPr>
+              <a:t>相手の回答コストが下がり、未回答の管理もできる</a:t>
+            </a:r>
+          </a:p>
+        </p:txBody>
+      </p:sp>
+      <p:sp>
+        <p:nvSpPr>
+          <p:cNvPr id="26" name="TextBox 25"/>
+          <p:cNvSpPr txBox="1"/>
+          <p:nvPr/>
+        </p:nvSpPr>
+        <p:spPr>
+          <a:xfrm>
+            <a:off x="3429000" y="3840480"/>
+            <a:ext cx="8412480" cy="411480"/>
+          </a:xfrm>
+          <a:prstGeom prst="rect">
+            <a:avLst/>
+          </a:prstGeom>
+          <a:noFill/>
+        </p:spPr>
+        <p:txBody>
+          <a:bodyPr wrap="square" anchor="t" lIns="0" rIns="0" tIns="0" bIns="0">
+            <a:spAutoFit/>
+          </a:bodyPr>
+          <a:lstStyle/>
+          <a:p>
+            <a:pPr algn="l"/>
+            <a:r>
+              <a:rPr sz="1800" b="1">
+                <a:solidFill>
+                  <a:srgbClr val="8B7CF6"/>
+                </a:solidFill>
+                <a:latin typeface="Hiragino Kaku Gothic Pro"/>
+                <a:ea typeface="Hiragino Kaku Gothic Pro"/>
+                <a:cs typeface="Hiragino Kaku Gothic Pro"/>
+              </a:rPr>
+              <a:t>具体例 ／ 関連ノート</a:t>
             </a:r>
           </a:p>
         </p:txBody>
@@ -3930,7 +7292,7 @@
             <a:avLst/>
           </a:prstGeom>
           <a:solidFill>
-            <a:srgbClr val="141414"/>
+            <a:srgbClr val="1E1E1E"/>
           </a:solidFill>
           <a:ln>
             <a:noFill/>
@@ -3961,14 +7323,190 @@
       </p:sp>
       <p:sp>
         <p:nvSpPr>
-          <p:cNvPr id="3" name="TextBox 2"/>
+          <p:cNvPr id="3" name="Rectangle 2"/>
+          <p:cNvSpPr/>
+          <p:nvPr/>
+        </p:nvSpPr>
+        <p:spPr>
+          <a:xfrm>
+            <a:off x="0" y="0"/>
+            <a:ext cx="12191695" cy="457200"/>
+          </a:xfrm>
+          <a:prstGeom prst="rect">
+            <a:avLst/>
+          </a:prstGeom>
+          <a:solidFill>
+            <a:srgbClr val="323232"/>
+          </a:solidFill>
+          <a:ln>
+            <a:noFill/>
+          </a:ln>
+          <a:effectLst/>
+        </p:spPr>
+        <p:style>
+          <a:lnRef idx="1">
+            <a:schemeClr val="accent1"/>
+          </a:lnRef>
+          <a:fillRef idx="3">
+            <a:schemeClr val="accent1"/>
+          </a:fillRef>
+          <a:effectRef idx="2">
+            <a:schemeClr val="accent1"/>
+          </a:effectRef>
+          <a:fontRef idx="minor">
+            <a:schemeClr val="lt1"/>
+          </a:fontRef>
+        </p:style>
+        <p:txBody>
+          <a:bodyPr rtlCol="0" anchor="ctr"/>
+          <a:lstStyle/>
+          <a:p>
+            <a:pPr algn="ctr"/>
+          </a:p>
+        </p:txBody>
+      </p:sp>
+      <p:sp>
+        <p:nvSpPr>
+          <p:cNvPr id="4" name="Oval 3"/>
+          <p:cNvSpPr/>
+          <p:nvPr/>
+        </p:nvSpPr>
+        <p:spPr>
+          <a:xfrm>
+            <a:off x="256032" y="155448"/>
+            <a:ext cx="155448" cy="155448"/>
+          </a:xfrm>
+          <a:prstGeom prst="ellipse">
+            <a:avLst/>
+          </a:prstGeom>
+          <a:solidFill>
+            <a:srgbClr val="FF5F56"/>
+          </a:solidFill>
+          <a:ln>
+            <a:noFill/>
+          </a:ln>
+          <a:effectLst/>
+        </p:spPr>
+        <p:style>
+          <a:lnRef idx="1">
+            <a:schemeClr val="accent1"/>
+          </a:lnRef>
+          <a:fillRef idx="3">
+            <a:schemeClr val="accent1"/>
+          </a:fillRef>
+          <a:effectRef idx="2">
+            <a:schemeClr val="accent1"/>
+          </a:effectRef>
+          <a:fontRef idx="minor">
+            <a:schemeClr val="lt1"/>
+          </a:fontRef>
+        </p:style>
+        <p:txBody>
+          <a:bodyPr rtlCol="0" anchor="ctr"/>
+          <a:lstStyle/>
+          <a:p>
+            <a:pPr algn="ctr"/>
+          </a:p>
+        </p:txBody>
+      </p:sp>
+      <p:sp>
+        <p:nvSpPr>
+          <p:cNvPr id="5" name="Oval 4"/>
+          <p:cNvSpPr/>
+          <p:nvPr/>
+        </p:nvSpPr>
+        <p:spPr>
+          <a:xfrm>
+            <a:off x="548640" y="155448"/>
+            <a:ext cx="155448" cy="155448"/>
+          </a:xfrm>
+          <a:prstGeom prst="ellipse">
+            <a:avLst/>
+          </a:prstGeom>
+          <a:solidFill>
+            <a:srgbClr val="FFBD2E"/>
+          </a:solidFill>
+          <a:ln>
+            <a:noFill/>
+          </a:ln>
+          <a:effectLst/>
+        </p:spPr>
+        <p:style>
+          <a:lnRef idx="1">
+            <a:schemeClr val="accent1"/>
+          </a:lnRef>
+          <a:fillRef idx="3">
+            <a:schemeClr val="accent1"/>
+          </a:fillRef>
+          <a:effectRef idx="2">
+            <a:schemeClr val="accent1"/>
+          </a:effectRef>
+          <a:fontRef idx="minor">
+            <a:schemeClr val="lt1"/>
+          </a:fontRef>
+        </p:style>
+        <p:txBody>
+          <a:bodyPr rtlCol="0" anchor="ctr"/>
+          <a:lstStyle/>
+          <a:p>
+            <a:pPr algn="ctr"/>
+          </a:p>
+        </p:txBody>
+      </p:sp>
+      <p:sp>
+        <p:nvSpPr>
+          <p:cNvPr id="6" name="Oval 5"/>
+          <p:cNvSpPr/>
+          <p:nvPr/>
+        </p:nvSpPr>
+        <p:spPr>
+          <a:xfrm>
+            <a:off x="841248" y="155448"/>
+            <a:ext cx="155448" cy="155448"/>
+          </a:xfrm>
+          <a:prstGeom prst="ellipse">
+            <a:avLst/>
+          </a:prstGeom>
+          <a:solidFill>
+            <a:srgbClr val="27C93F"/>
+          </a:solidFill>
+          <a:ln>
+            <a:noFill/>
+          </a:ln>
+          <a:effectLst/>
+        </p:spPr>
+        <p:style>
+          <a:lnRef idx="1">
+            <a:schemeClr val="accent1"/>
+          </a:lnRef>
+          <a:fillRef idx="3">
+            <a:schemeClr val="accent1"/>
+          </a:fillRef>
+          <a:effectRef idx="2">
+            <a:schemeClr val="accent1"/>
+          </a:effectRef>
+          <a:fontRef idx="minor">
+            <a:schemeClr val="lt1"/>
+          </a:fontRef>
+        </p:style>
+        <p:txBody>
+          <a:bodyPr rtlCol="0" anchor="ctr"/>
+          <a:lstStyle/>
+          <a:p>
+            <a:pPr algn="ctr"/>
+          </a:p>
+        </p:txBody>
+      </p:sp>
+      <p:sp>
+        <p:nvSpPr>
+          <p:cNvPr id="7" name="TextBox 6"/>
           <p:cNvSpPr txBox="1"/>
           <p:nvPr/>
         </p:nvSpPr>
         <p:spPr>
           <a:xfrm>
-            <a:off x="822960" y="640080"/>
-            <a:ext cx="10607040" cy="548640"/>
+            <a:off x="1371600" y="45720"/>
+            <a:ext cx="5486400" cy="365760"/>
           </a:xfrm>
           <a:prstGeom prst="rect">
             <a:avLst/>
@@ -3976,40 +7514,137 @@
           <a:noFill/>
         </p:spPr>
         <p:txBody>
-          <a:bodyPr wrap="square">
+          <a:bodyPr wrap="square" anchor="ctr" lIns="0" rIns="0" tIns="0" bIns="0">
             <a:spAutoFit/>
           </a:bodyPr>
           <a:lstStyle/>
           <a:p>
-            <a:pPr algn="l">
-              <a:spcAft>
-                <a:spcPts val="800"/>
-              </a:spcAft>
-            </a:pPr>
-            <a:r>
-              <a:rPr sz="2000" b="1">
-                <a:solidFill>
-                  <a:srgbClr val="E87A3E"/>
-                </a:solidFill>
-                <a:latin typeface="Hiragino Kaku Gothic Pro"/>
-                <a:ea typeface="Hiragino Kaku Gothic Pro"/>
-                <a:cs typeface="Hiragino Kaku Gothic Pro"/>
-              </a:rPr>
-              <a:t>STEP 4 ― 結ぶ</a:t>
-            </a:r>
-          </a:p>
-        </p:txBody>
-      </p:sp>
-      <p:sp>
-        <p:nvSpPr>
-          <p:cNvPr id="4" name="TextBox 3"/>
+            <a:pPr algn="l"/>
+            <a:r>
+              <a:rPr sz="1300" b="0">
+                <a:solidFill>
+                  <a:srgbClr val="8A8A8A"/>
+                </a:solidFill>
+                <a:latin typeface="Hiragino Kaku Gothic Pro"/>
+                <a:ea typeface="Hiragino Kaku Gothic Pro"/>
+                <a:cs typeface="Hiragino Kaku Gothic Pro"/>
+              </a:rPr>
+              <a:t>Obsidian — 第二の脳</a:t>
+            </a:r>
+          </a:p>
+        </p:txBody>
+      </p:sp>
+      <p:sp>
+        <p:nvSpPr>
+          <p:cNvPr id="8" name="Rounded Rectangle 7"/>
+          <p:cNvSpPr/>
+          <p:nvPr/>
+        </p:nvSpPr>
+        <p:spPr>
+          <a:xfrm>
+            <a:off x="10012680" y="73152"/>
+            <a:ext cx="1965960" cy="310896"/>
+          </a:xfrm>
+          <a:prstGeom prst="roundRect">
+            <a:avLst>
+              <a:gd name="adj" fmla="val 8000"/>
+            </a:avLst>
+          </a:prstGeom>
+          <a:solidFill>
+            <a:srgbClr val="8B7CF6"/>
+          </a:solidFill>
+          <a:ln>
+            <a:noFill/>
+          </a:ln>
+          <a:effectLst/>
+        </p:spPr>
+        <p:style>
+          <a:lnRef idx="1">
+            <a:schemeClr val="accent1"/>
+          </a:lnRef>
+          <a:fillRef idx="3">
+            <a:schemeClr val="accent1"/>
+          </a:fillRef>
+          <a:effectRef idx="2">
+            <a:schemeClr val="accent1"/>
+          </a:effectRef>
+          <a:fontRef idx="minor">
+            <a:schemeClr val="lt1"/>
+          </a:fontRef>
+        </p:style>
+        <p:txBody>
+          <a:bodyPr rtlCol="0" anchor="ctr"/>
+          <a:lstStyle/>
+          <a:p>
+            <a:pPr algn="ctr"/>
+            <a:r>
+              <a:rPr sz="1200" b="1">
+                <a:solidFill>
+                  <a:srgbClr val="FFFFFF"/>
+                </a:solidFill>
+                <a:latin typeface="Hiragino Kaku Gothic Pro"/>
+                <a:ea typeface="Hiragino Kaku Gothic Pro"/>
+                <a:cs typeface="Hiragino Kaku Gothic Pro"/>
+              </a:rPr>
+              <a:t>STEP 4 結ぶ</a:t>
+            </a:r>
+          </a:p>
+        </p:txBody>
+      </p:sp>
+      <p:sp>
+        <p:nvSpPr>
+          <p:cNvPr id="9" name="Rectangle 8"/>
+          <p:cNvSpPr/>
+          <p:nvPr/>
+        </p:nvSpPr>
+        <p:spPr>
+          <a:xfrm>
+            <a:off x="0" y="457200"/>
+            <a:ext cx="3108960" cy="6400800"/>
+          </a:xfrm>
+          <a:prstGeom prst="rect">
+            <a:avLst/>
+          </a:prstGeom>
+          <a:solidFill>
+            <a:srgbClr val="262626"/>
+          </a:solidFill>
+          <a:ln>
+            <a:noFill/>
+          </a:ln>
+          <a:effectLst/>
+        </p:spPr>
+        <p:style>
+          <a:lnRef idx="1">
+            <a:schemeClr val="accent1"/>
+          </a:lnRef>
+          <a:fillRef idx="3">
+            <a:schemeClr val="accent1"/>
+          </a:fillRef>
+          <a:effectRef idx="2">
+            <a:schemeClr val="accent1"/>
+          </a:effectRef>
+          <a:fontRef idx="minor">
+            <a:schemeClr val="lt1"/>
+          </a:fontRef>
+        </p:style>
+        <p:txBody>
+          <a:bodyPr rtlCol="0" anchor="ctr"/>
+          <a:lstStyle/>
+          <a:p>
+            <a:pPr algn="ctr"/>
+          </a:p>
+        </p:txBody>
+      </p:sp>
+      <p:sp>
+        <p:nvSpPr>
+          <p:cNvPr id="10" name="TextBox 9"/>
           <p:cNvSpPr txBox="1"/>
           <p:nvPr/>
         </p:nvSpPr>
         <p:spPr>
           <a:xfrm>
-            <a:off x="822960" y="1234440"/>
-            <a:ext cx="10607040" cy="1737360"/>
+            <a:off x="274320" y="566928"/>
+            <a:ext cx="2743200" cy="274320"/>
           </a:xfrm>
           <a:prstGeom prst="rect">
             <a:avLst/>
@@ -4017,40 +7652,36 @@
           <a:noFill/>
         </p:spPr>
         <p:txBody>
-          <a:bodyPr wrap="square">
+          <a:bodyPr wrap="square" anchor="t" lIns="0" rIns="0" tIns="0" bIns="0">
             <a:spAutoFit/>
           </a:bodyPr>
           <a:lstStyle/>
           <a:p>
-            <a:pPr algn="l">
-              <a:spcAft>
-                <a:spcPts val="800"/>
-              </a:spcAft>
-            </a:pPr>
-            <a:r>
-              <a:rPr sz="3400" b="1">
-                <a:solidFill>
-                  <a:srgbClr val="F5F3F0"/>
-                </a:solidFill>
-                <a:latin typeface="Hiragino Kaku Gothic Pro"/>
-                <a:ea typeface="Hiragino Kaku Gothic Pro"/>
-                <a:cs typeface="Hiragino Kaku Gothic Pro"/>
-              </a:rPr>
-              <a:t>[[リンク]] でつなぐ</a:t>
-            </a:r>
-          </a:p>
-        </p:txBody>
-      </p:sp>
-      <p:sp>
-        <p:nvSpPr>
-          <p:cNvPr id="5" name="TextBox 4"/>
+            <a:pPr algn="l"/>
+            <a:r>
+              <a:rPr sz="1100" b="1">
+                <a:solidFill>
+                  <a:srgbClr val="8A8A8A"/>
+                </a:solidFill>
+                <a:latin typeface="Hiragino Kaku Gothic Pro"/>
+                <a:ea typeface="Hiragino Kaku Gothic Pro"/>
+                <a:cs typeface="Hiragino Kaku Gothic Pro"/>
+              </a:rPr>
+              <a:t>VAULT ／ 第二の脳</a:t>
+            </a:r>
+          </a:p>
+        </p:txBody>
+      </p:sp>
+      <p:sp>
+        <p:nvSpPr>
+          <p:cNvPr id="11" name="TextBox 10"/>
           <p:cNvSpPr txBox="1"/>
           <p:nvPr/>
         </p:nvSpPr>
         <p:spPr>
           <a:xfrm>
-            <a:off x="914400" y="2880360"/>
-            <a:ext cx="10424160" cy="3566160"/>
+            <a:off x="384048" y="987552"/>
+            <a:ext cx="2651760" cy="365760"/>
           </a:xfrm>
           <a:prstGeom prst="rect">
             <a:avLst/>
@@ -4058,62 +7689,773 @@
           <a:noFill/>
         </p:spPr>
         <p:txBody>
-          <a:bodyPr wrap="square">
+          <a:bodyPr wrap="square" anchor="ctr" lIns="0" rIns="0" tIns="0" bIns="0">
             <a:spAutoFit/>
           </a:bodyPr>
           <a:lstStyle/>
           <a:p>
-            <a:pPr algn="l">
-              <a:spcAft>
-                <a:spcPts val="1400"/>
-              </a:spcAft>
-            </a:pPr>
-            <a:r>
-              <a:rPr sz="2300" b="0">
-                <a:solidFill>
-                  <a:srgbClr val="F5F3F0"/>
-                </a:solidFill>
-                <a:latin typeface="Hiragino Kaku Gothic Pro"/>
-                <a:ea typeface="Hiragino Kaku Gothic Pro"/>
-                <a:cs typeface="Hiragino Kaku Gothic Pro"/>
-              </a:rPr>
-              <a:t>・関連する言葉を [[二重カッコ]] で囲む</a:t>
-            </a:r>
-          </a:p>
-          <a:p>
-            <a:pPr algn="l">
-              <a:spcAft>
-                <a:spcPts val="1400"/>
-              </a:spcAft>
-            </a:pPr>
-            <a:r>
-              <a:rPr sz="2300" b="0">
-                <a:solidFill>
-                  <a:srgbClr val="F5F3F0"/>
-                </a:solidFill>
-                <a:latin typeface="Hiragino Kaku Gothic Pro"/>
-                <a:ea typeface="Hiragino Kaku Gothic Pro"/>
-                <a:cs typeface="Hiragino Kaku Gothic Pro"/>
-              </a:rPr>
-              <a:t>・リンクをたどって、関連ノートへ飛ぶ</a:t>
-            </a:r>
-          </a:p>
-          <a:p>
-            <a:pPr algn="l">
-              <a:spcAft>
-                <a:spcPts val="1400"/>
-              </a:spcAft>
-            </a:pPr>
-            <a:r>
-              <a:rPr sz="2300" b="0">
-                <a:solidFill>
-                  <a:srgbClr val="F5F3F0"/>
-                </a:solidFill>
-                <a:latin typeface="Hiragino Kaku Gothic Pro"/>
-                <a:ea typeface="Hiragino Kaku Gothic Pro"/>
-                <a:cs typeface="Hiragino Kaku Gothic Pro"/>
-              </a:rPr>
-              <a:t>・バックリンクで「どこから参照されたか」も見える</a:t>
+            <a:pPr algn="l"/>
+            <a:r>
+              <a:rPr sz="1300" b="0">
+                <a:solidFill>
+                  <a:srgbClr val="8A8A8A"/>
+                </a:solidFill>
+                <a:latin typeface="Hiragino Kaku Gothic Pro"/>
+                <a:ea typeface="Hiragino Kaku Gothic Pro"/>
+                <a:cs typeface="Hiragino Kaku Gothic Pro"/>
+              </a:rPr>
+              <a:t/>
+            </a:r>
+            <a:r>
+              <a:rPr sz="1300" b="0">
+                <a:solidFill>
+                  <a:srgbClr val="8A8A8A"/>
+                </a:solidFill>
+                <a:latin typeface="Hiragino Kaku Gothic Pro"/>
+                <a:ea typeface="Hiragino Kaku Gothic Pro"/>
+                <a:cs typeface="Hiragino Kaku Gothic Pro"/>
+              </a:rPr>
+              <a:t>00_Inbox</a:t>
+            </a:r>
+          </a:p>
+        </p:txBody>
+      </p:sp>
+      <p:sp>
+        <p:nvSpPr>
+          <p:cNvPr id="12" name="TextBox 11"/>
+          <p:cNvSpPr txBox="1"/>
+          <p:nvPr/>
+        </p:nvSpPr>
+        <p:spPr>
+          <a:xfrm>
+            <a:off x="384048" y="1444752"/>
+            <a:ext cx="2651760" cy="365760"/>
+          </a:xfrm>
+          <a:prstGeom prst="rect">
+            <a:avLst/>
+          </a:prstGeom>
+          <a:noFill/>
+        </p:spPr>
+        <p:txBody>
+          <a:bodyPr wrap="square" anchor="ctr" lIns="0" rIns="0" tIns="0" bIns="0">
+            <a:spAutoFit/>
+          </a:bodyPr>
+          <a:lstStyle/>
+          <a:p>
+            <a:pPr algn="l"/>
+            <a:r>
+              <a:rPr sz="1300" b="0">
+                <a:solidFill>
+                  <a:srgbClr val="8A8A8A"/>
+                </a:solidFill>
+                <a:latin typeface="Hiragino Kaku Gothic Pro"/>
+                <a:ea typeface="Hiragino Kaku Gothic Pro"/>
+                <a:cs typeface="Hiragino Kaku Gothic Pro"/>
+              </a:rPr>
+              <a:t/>
+            </a:r>
+            <a:r>
+              <a:rPr sz="1300" b="0">
+                <a:solidFill>
+                  <a:srgbClr val="8A8A8A"/>
+                </a:solidFill>
+                <a:latin typeface="Hiragino Kaku Gothic Pro"/>
+                <a:ea typeface="Hiragino Kaku Gothic Pro"/>
+                <a:cs typeface="Hiragino Kaku Gothic Pro"/>
+              </a:rPr>
+              <a:t>10_Daily</a:t>
+            </a:r>
+          </a:p>
+        </p:txBody>
+      </p:sp>
+      <p:sp>
+        <p:nvSpPr>
+          <p:cNvPr id="13" name="TextBox 12"/>
+          <p:cNvSpPr txBox="1"/>
+          <p:nvPr/>
+        </p:nvSpPr>
+        <p:spPr>
+          <a:xfrm>
+            <a:off x="384048" y="1901952"/>
+            <a:ext cx="2651760" cy="365760"/>
+          </a:xfrm>
+          <a:prstGeom prst="rect">
+            <a:avLst/>
+          </a:prstGeom>
+          <a:noFill/>
+        </p:spPr>
+        <p:txBody>
+          <a:bodyPr wrap="square" anchor="ctr" lIns="0" rIns="0" tIns="0" bIns="0">
+            <a:spAutoFit/>
+          </a:bodyPr>
+          <a:lstStyle/>
+          <a:p>
+            <a:pPr algn="l"/>
+            <a:r>
+              <a:rPr sz="1300" b="0">
+                <a:solidFill>
+                  <a:srgbClr val="8A8A8A"/>
+                </a:solidFill>
+                <a:latin typeface="Hiragino Kaku Gothic Pro"/>
+                <a:ea typeface="Hiragino Kaku Gothic Pro"/>
+                <a:cs typeface="Hiragino Kaku Gothic Pro"/>
+              </a:rPr>
+              <a:t/>
+            </a:r>
+            <a:r>
+              <a:rPr sz="1300" b="0">
+                <a:solidFill>
+                  <a:srgbClr val="8A8A8A"/>
+                </a:solidFill>
+                <a:latin typeface="Hiragino Kaku Gothic Pro"/>
+                <a:ea typeface="Hiragino Kaku Gothic Pro"/>
+                <a:cs typeface="Hiragino Kaku Gothic Pro"/>
+              </a:rPr>
+              <a:t>20_Projects</a:t>
+            </a:r>
+          </a:p>
+        </p:txBody>
+      </p:sp>
+      <p:sp>
+        <p:nvSpPr>
+          <p:cNvPr id="14" name="TextBox 13"/>
+          <p:cNvSpPr txBox="1"/>
+          <p:nvPr/>
+        </p:nvSpPr>
+        <p:spPr>
+          <a:xfrm>
+            <a:off x="384048" y="2359152"/>
+            <a:ext cx="2651760" cy="365760"/>
+          </a:xfrm>
+          <a:prstGeom prst="rect">
+            <a:avLst/>
+          </a:prstGeom>
+          <a:noFill/>
+        </p:spPr>
+        <p:txBody>
+          <a:bodyPr wrap="square" anchor="ctr" lIns="0" rIns="0" tIns="0" bIns="0">
+            <a:spAutoFit/>
+          </a:bodyPr>
+          <a:lstStyle/>
+          <a:p>
+            <a:pPr algn="l"/>
+            <a:r>
+              <a:rPr sz="1300" b="0">
+                <a:solidFill>
+                  <a:srgbClr val="8A8A8A"/>
+                </a:solidFill>
+                <a:latin typeface="Hiragino Kaku Gothic Pro"/>
+                <a:ea typeface="Hiragino Kaku Gothic Pro"/>
+                <a:cs typeface="Hiragino Kaku Gothic Pro"/>
+              </a:rPr>
+              <a:t/>
+            </a:r>
+            <a:r>
+              <a:rPr sz="1300" b="0">
+                <a:solidFill>
+                  <a:srgbClr val="8A8A8A"/>
+                </a:solidFill>
+                <a:latin typeface="Hiragino Kaku Gothic Pro"/>
+                <a:ea typeface="Hiragino Kaku Gothic Pro"/>
+                <a:cs typeface="Hiragino Kaku Gothic Pro"/>
+              </a:rPr>
+              <a:t>30_Areas</a:t>
+            </a:r>
+          </a:p>
+        </p:txBody>
+      </p:sp>
+      <p:sp>
+        <p:nvSpPr>
+          <p:cNvPr id="15" name="TextBox 14"/>
+          <p:cNvSpPr txBox="1"/>
+          <p:nvPr/>
+        </p:nvSpPr>
+        <p:spPr>
+          <a:xfrm>
+            <a:off x="384048" y="2816352"/>
+            <a:ext cx="2651760" cy="365760"/>
+          </a:xfrm>
+          <a:prstGeom prst="rect">
+            <a:avLst/>
+          </a:prstGeom>
+          <a:noFill/>
+        </p:spPr>
+        <p:txBody>
+          <a:bodyPr wrap="square" anchor="ctr" lIns="0" rIns="0" tIns="0" bIns="0">
+            <a:spAutoFit/>
+          </a:bodyPr>
+          <a:lstStyle/>
+          <a:p>
+            <a:pPr algn="l"/>
+            <a:r>
+              <a:rPr sz="1300" b="0">
+                <a:solidFill>
+                  <a:srgbClr val="8A8A8A"/>
+                </a:solidFill>
+                <a:latin typeface="Hiragino Kaku Gothic Pro"/>
+                <a:ea typeface="Hiragino Kaku Gothic Pro"/>
+                <a:cs typeface="Hiragino Kaku Gothic Pro"/>
+              </a:rPr>
+              <a:t/>
+            </a:r>
+            <a:r>
+              <a:rPr sz="1300" b="0">
+                <a:solidFill>
+                  <a:srgbClr val="8A8A8A"/>
+                </a:solidFill>
+                <a:latin typeface="Hiragino Kaku Gothic Pro"/>
+                <a:ea typeface="Hiragino Kaku Gothic Pro"/>
+                <a:cs typeface="Hiragino Kaku Gothic Pro"/>
+              </a:rPr>
+              <a:t>40_Resources</a:t>
+            </a:r>
+          </a:p>
+        </p:txBody>
+      </p:sp>
+      <p:sp>
+        <p:nvSpPr>
+          <p:cNvPr id="16" name="Rounded Rectangle 15"/>
+          <p:cNvSpPr/>
+          <p:nvPr/>
+        </p:nvSpPr>
+        <p:spPr>
+          <a:xfrm>
+            <a:off x="164592" y="3246120"/>
+            <a:ext cx="2788920" cy="384048"/>
+          </a:xfrm>
+          <a:prstGeom prst="roundRect">
+            <a:avLst>
+              <a:gd name="adj" fmla="val 8000"/>
+            </a:avLst>
+          </a:prstGeom>
+          <a:solidFill>
+            <a:srgbClr val="2E2A47"/>
+          </a:solidFill>
+          <a:ln>
+            <a:noFill/>
+          </a:ln>
+          <a:effectLst/>
+        </p:spPr>
+        <p:style>
+          <a:lnRef idx="1">
+            <a:schemeClr val="accent1"/>
+          </a:lnRef>
+          <a:fillRef idx="3">
+            <a:schemeClr val="accent1"/>
+          </a:fillRef>
+          <a:effectRef idx="2">
+            <a:schemeClr val="accent1"/>
+          </a:effectRef>
+          <a:fontRef idx="minor">
+            <a:schemeClr val="lt1"/>
+          </a:fontRef>
+        </p:style>
+        <p:txBody>
+          <a:bodyPr rtlCol="0" anchor="ctr"/>
+          <a:lstStyle/>
+          <a:p>
+            <a:pPr algn="ctr"/>
+          </a:p>
+        </p:txBody>
+      </p:sp>
+      <p:sp>
+        <p:nvSpPr>
+          <p:cNvPr id="17" name="TextBox 16"/>
+          <p:cNvSpPr txBox="1"/>
+          <p:nvPr/>
+        </p:nvSpPr>
+        <p:spPr>
+          <a:xfrm>
+            <a:off x="384048" y="3273552"/>
+            <a:ext cx="2651760" cy="365760"/>
+          </a:xfrm>
+          <a:prstGeom prst="rect">
+            <a:avLst/>
+          </a:prstGeom>
+          <a:noFill/>
+        </p:spPr>
+        <p:txBody>
+          <a:bodyPr wrap="square" anchor="ctr" lIns="0" rIns="0" tIns="0" bIns="0">
+            <a:spAutoFit/>
+          </a:bodyPr>
+          <a:lstStyle/>
+          <a:p>
+            <a:pPr algn="l"/>
+            <a:r>
+              <a:rPr sz="1300" b="0">
+                <a:solidFill>
+                  <a:srgbClr val="DCDDDE"/>
+                </a:solidFill>
+                <a:latin typeface="Hiragino Kaku Gothic Pro"/>
+                <a:ea typeface="Hiragino Kaku Gothic Pro"/>
+                <a:cs typeface="Hiragino Kaku Gothic Pro"/>
+              </a:rPr>
+              <a:t/>
+            </a:r>
+            <a:r>
+              <a:rPr sz="1300" b="1">
+                <a:solidFill>
+                  <a:srgbClr val="DCDDDE"/>
+                </a:solidFill>
+                <a:latin typeface="Hiragino Kaku Gothic Pro"/>
+                <a:ea typeface="Hiragino Kaku Gothic Pro"/>
+                <a:cs typeface="Hiragino Kaku Gothic Pro"/>
+              </a:rPr>
+              <a:t>50_PermanentNotes</a:t>
+            </a:r>
+          </a:p>
+        </p:txBody>
+      </p:sp>
+      <p:sp>
+        <p:nvSpPr>
+          <p:cNvPr id="18" name="TextBox 17"/>
+          <p:cNvSpPr txBox="1"/>
+          <p:nvPr/>
+        </p:nvSpPr>
+        <p:spPr>
+          <a:xfrm>
+            <a:off x="384048" y="3730752"/>
+            <a:ext cx="2651760" cy="365760"/>
+          </a:xfrm>
+          <a:prstGeom prst="rect">
+            <a:avLst/>
+          </a:prstGeom>
+          <a:noFill/>
+        </p:spPr>
+        <p:txBody>
+          <a:bodyPr wrap="square" anchor="ctr" lIns="0" rIns="0" tIns="0" bIns="0">
+            <a:spAutoFit/>
+          </a:bodyPr>
+          <a:lstStyle/>
+          <a:p>
+            <a:pPr algn="l"/>
+            <a:r>
+              <a:rPr sz="1300" b="0">
+                <a:solidFill>
+                  <a:srgbClr val="8A8A8A"/>
+                </a:solidFill>
+                <a:latin typeface="Hiragino Kaku Gothic Pro"/>
+                <a:ea typeface="Hiragino Kaku Gothic Pro"/>
+                <a:cs typeface="Hiragino Kaku Gothic Pro"/>
+              </a:rPr>
+              <a:t/>
+            </a:r>
+            <a:r>
+              <a:rPr sz="1300" b="0">
+                <a:solidFill>
+                  <a:srgbClr val="8A8A8A"/>
+                </a:solidFill>
+                <a:latin typeface="Hiragino Kaku Gothic Pro"/>
+                <a:ea typeface="Hiragino Kaku Gothic Pro"/>
+                <a:cs typeface="Hiragino Kaku Gothic Pro"/>
+              </a:rPr>
+              <a:t>90_Archive</a:t>
+            </a:r>
+          </a:p>
+        </p:txBody>
+      </p:sp>
+      <p:sp>
+        <p:nvSpPr>
+          <p:cNvPr id="19" name="Rounded Rectangle 18"/>
+          <p:cNvSpPr/>
+          <p:nvPr/>
+        </p:nvSpPr>
+        <p:spPr>
+          <a:xfrm>
+            <a:off x="3246120" y="566928"/>
+            <a:ext cx="8778240" cy="457200"/>
+          </a:xfrm>
+          <a:prstGeom prst="roundRect">
+            <a:avLst>
+              <a:gd name="adj" fmla="val 8000"/>
+            </a:avLst>
+          </a:prstGeom>
+          <a:solidFill>
+            <a:srgbClr val="2A2A2A"/>
+          </a:solidFill>
+          <a:ln>
+            <a:noFill/>
+          </a:ln>
+          <a:effectLst/>
+        </p:spPr>
+        <p:style>
+          <a:lnRef idx="1">
+            <a:schemeClr val="accent1"/>
+          </a:lnRef>
+          <a:fillRef idx="3">
+            <a:schemeClr val="accent1"/>
+          </a:fillRef>
+          <a:effectRef idx="2">
+            <a:schemeClr val="accent1"/>
+          </a:effectRef>
+          <a:fontRef idx="minor">
+            <a:schemeClr val="lt1"/>
+          </a:fontRef>
+        </p:style>
+        <p:txBody>
+          <a:bodyPr rtlCol="0" anchor="ctr"/>
+          <a:lstStyle/>
+          <a:p>
+            <a:pPr algn="ctr"/>
+          </a:p>
+        </p:txBody>
+      </p:sp>
+      <p:sp>
+        <p:nvSpPr>
+          <p:cNvPr id="20" name="TextBox 19"/>
+          <p:cNvSpPr txBox="1"/>
+          <p:nvPr/>
+        </p:nvSpPr>
+        <p:spPr>
+          <a:xfrm>
+            <a:off x="3429000" y="566928"/>
+            <a:ext cx="8412480" cy="457200"/>
+          </a:xfrm>
+          <a:prstGeom prst="rect">
+            <a:avLst/>
+          </a:prstGeom>
+          <a:noFill/>
+        </p:spPr>
+        <p:txBody>
+          <a:bodyPr wrap="square" anchor="ctr" lIns="0" rIns="0" tIns="0" bIns="0">
+            <a:spAutoFit/>
+          </a:bodyPr>
+          <a:lstStyle/>
+          <a:p>
+            <a:pPr algn="l"/>
+            <a:r>
+              <a:rPr sz="1300" b="0">
+                <a:solidFill>
+                  <a:srgbClr val="DCDDDE"/>
+                </a:solidFill>
+                <a:latin typeface="Hiragino Kaku Gothic Pro"/>
+                <a:ea typeface="Hiragino Kaku Gothic Pro"/>
+                <a:cs typeface="Hiragino Kaku Gothic Pro"/>
+              </a:rPr>
+              <a:t>50_PermanentNotes / 確認は型で出す.md</a:t>
+            </a:r>
+          </a:p>
+        </p:txBody>
+      </p:sp>
+      <p:sp>
+        <p:nvSpPr>
+          <p:cNvPr id="21" name="TextBox 20"/>
+          <p:cNvSpPr txBox="1"/>
+          <p:nvPr/>
+        </p:nvSpPr>
+        <p:spPr>
+          <a:xfrm>
+            <a:off x="3429000" y="1234440"/>
+            <a:ext cx="8412480" cy="411480"/>
+          </a:xfrm>
+          <a:prstGeom prst="rect">
+            <a:avLst/>
+          </a:prstGeom>
+          <a:noFill/>
+        </p:spPr>
+        <p:txBody>
+          <a:bodyPr wrap="square" anchor="t" lIns="0" rIns="0" tIns="0" bIns="0">
+            <a:spAutoFit/>
+          </a:bodyPr>
+          <a:lstStyle/>
+          <a:p>
+            <a:pPr algn="l"/>
+            <a:r>
+              <a:rPr sz="1800" b="1">
+                <a:solidFill>
+                  <a:srgbClr val="8B7CF6"/>
+                </a:solidFill>
+                <a:latin typeface="Hiragino Kaku Gothic Pro"/>
+                <a:ea typeface="Hiragino Kaku Gothic Pro"/>
+                <a:cs typeface="Hiragino Kaku Gothic Pro"/>
+              </a:rPr>
+              <a:t>関連ノート</a:t>
+            </a:r>
+          </a:p>
+        </p:txBody>
+      </p:sp>
+      <p:sp>
+        <p:nvSpPr>
+          <p:cNvPr id="22" name="TextBox 21"/>
+          <p:cNvSpPr txBox="1"/>
+          <p:nvPr/>
+        </p:nvSpPr>
+        <p:spPr>
+          <a:xfrm>
+            <a:off x="3611880" y="1737360"/>
+            <a:ext cx="8229600" cy="384048"/>
+          </a:xfrm>
+          <a:prstGeom prst="rect">
+            <a:avLst/>
+          </a:prstGeom>
+          <a:noFill/>
+        </p:spPr>
+        <p:txBody>
+          <a:bodyPr wrap="square" anchor="t" lIns="0" rIns="0" tIns="0" bIns="0">
+            <a:spAutoFit/>
+          </a:bodyPr>
+          <a:lstStyle/>
+          <a:p>
+            <a:pPr algn="l"/>
+            <a:r>
+              <a:rPr sz="1600" b="0">
+                <a:solidFill>
+                  <a:srgbClr val="8A8A8A"/>
+                </a:solidFill>
+                <a:latin typeface="Hiragino Kaku Gothic Pro"/>
+                <a:ea typeface="Hiragino Kaku Gothic Pro"/>
+                <a:cs typeface="Hiragino Kaku Gothic Pro"/>
+              </a:rPr>
+              <a:t>[[</a:t>
+            </a:r>
+            <a:r>
+              <a:rPr sz="1600" b="1">
+                <a:solidFill>
+                  <a:srgbClr val="A58CFF"/>
+                </a:solidFill>
+                <a:latin typeface="Hiragino Kaku Gothic Pro"/>
+                <a:ea typeface="Hiragino Kaku Gothic Pro"/>
+                <a:cs typeface="Hiragino Kaku Gothic Pro"/>
+              </a:rPr>
+              <a:t>確認事項マネジメント</a:t>
+            </a:r>
+            <a:r>
+              <a:rPr sz="1600" b="0">
+                <a:solidFill>
+                  <a:srgbClr val="8A8A8A"/>
+                </a:solidFill>
+                <a:latin typeface="Hiragino Kaku Gothic Pro"/>
+                <a:ea typeface="Hiragino Kaku Gothic Pro"/>
+                <a:cs typeface="Hiragino Kaku Gothic Pro"/>
+              </a:rPr>
+              <a:t>]]</a:t>
+            </a:r>
+          </a:p>
+        </p:txBody>
+      </p:sp>
+      <p:sp>
+        <p:nvSpPr>
+          <p:cNvPr id="23" name="TextBox 22"/>
+          <p:cNvSpPr txBox="1"/>
+          <p:nvPr/>
+        </p:nvSpPr>
+        <p:spPr>
+          <a:xfrm>
+            <a:off x="3611880" y="2194560"/>
+            <a:ext cx="8229600" cy="384048"/>
+          </a:xfrm>
+          <a:prstGeom prst="rect">
+            <a:avLst/>
+          </a:prstGeom>
+          <a:noFill/>
+        </p:spPr>
+        <p:txBody>
+          <a:bodyPr wrap="square" anchor="t" lIns="0" rIns="0" tIns="0" bIns="0">
+            <a:spAutoFit/>
+          </a:bodyPr>
+          <a:lstStyle/>
+          <a:p>
+            <a:pPr algn="l"/>
+            <a:r>
+              <a:rPr sz="1600" b="0">
+                <a:solidFill>
+                  <a:srgbClr val="8A8A8A"/>
+                </a:solidFill>
+                <a:latin typeface="Hiragino Kaku Gothic Pro"/>
+                <a:ea typeface="Hiragino Kaku Gothic Pro"/>
+                <a:cs typeface="Hiragino Kaku Gothic Pro"/>
+              </a:rPr>
+              <a:t>[[</a:t>
+            </a:r>
+            <a:r>
+              <a:rPr sz="1600" b="1">
+                <a:solidFill>
+                  <a:srgbClr val="A58CFF"/>
+                </a:solidFill>
+                <a:latin typeface="Hiragino Kaku Gothic Pro"/>
+                <a:ea typeface="Hiragino Kaku Gothic Pro"/>
+                <a:cs typeface="Hiragino Kaku Gothic Pro"/>
+              </a:rPr>
+              <a:t>決定事項シート</a:t>
+            </a:r>
+            <a:r>
+              <a:rPr sz="1600" b="0">
+                <a:solidFill>
+                  <a:srgbClr val="8A8A8A"/>
+                </a:solidFill>
+                <a:latin typeface="Hiragino Kaku Gothic Pro"/>
+                <a:ea typeface="Hiragino Kaku Gothic Pro"/>
+                <a:cs typeface="Hiragino Kaku Gothic Pro"/>
+              </a:rPr>
+              <a:t>]]</a:t>
+            </a:r>
+          </a:p>
+        </p:txBody>
+      </p:sp>
+      <p:sp>
+        <p:nvSpPr>
+          <p:cNvPr id="24" name="TextBox 23"/>
+          <p:cNvSpPr txBox="1"/>
+          <p:nvPr/>
+        </p:nvSpPr>
+        <p:spPr>
+          <a:xfrm>
+            <a:off x="3429000" y="2651760"/>
+            <a:ext cx="8412480" cy="384048"/>
+          </a:xfrm>
+          <a:prstGeom prst="rect">
+            <a:avLst/>
+          </a:prstGeom>
+          <a:noFill/>
+        </p:spPr>
+        <p:txBody>
+          <a:bodyPr wrap="square" anchor="t" lIns="0" rIns="0" tIns="0" bIns="0">
+            <a:spAutoFit/>
+          </a:bodyPr>
+          <a:lstStyle/>
+          <a:p>
+            <a:pPr algn="l"/>
+            <a:r>
+              <a:rPr sz="1300" b="0">
+                <a:solidFill>
+                  <a:srgbClr val="8A8A8A"/>
+                </a:solidFill>
+                <a:latin typeface="Hiragino Kaku Gothic Pro"/>
+                <a:ea typeface="Hiragino Kaku Gothic Pro"/>
+                <a:cs typeface="Hiragino Kaku Gothic Pro"/>
+              </a:rPr>
+              <a:t>[[ を打つと候補が出る。リンクをたどると関連知識へ飛べる</a:t>
+            </a:r>
+          </a:p>
+        </p:txBody>
+      </p:sp>
+      <p:sp>
+        <p:nvSpPr>
+          <p:cNvPr id="25" name="Rounded Rectangle 24"/>
+          <p:cNvSpPr/>
+          <p:nvPr/>
+        </p:nvSpPr>
+        <p:spPr>
+          <a:xfrm>
+            <a:off x="3429000" y="3163824"/>
+            <a:ext cx="8412480" cy="1188720"/>
+          </a:xfrm>
+          <a:prstGeom prst="roundRect">
+            <a:avLst>
+              <a:gd name="adj" fmla="val 8000"/>
+            </a:avLst>
+          </a:prstGeom>
+          <a:solidFill>
+            <a:srgbClr val="2A2A2A"/>
+          </a:solidFill>
+          <a:ln>
+            <a:noFill/>
+          </a:ln>
+          <a:effectLst/>
+        </p:spPr>
+        <p:style>
+          <a:lnRef idx="1">
+            <a:schemeClr val="accent1"/>
+          </a:lnRef>
+          <a:fillRef idx="3">
+            <a:schemeClr val="accent1"/>
+          </a:fillRef>
+          <a:effectRef idx="2">
+            <a:schemeClr val="accent1"/>
+          </a:effectRef>
+          <a:fontRef idx="minor">
+            <a:schemeClr val="lt1"/>
+          </a:fontRef>
+        </p:style>
+        <p:txBody>
+          <a:bodyPr rtlCol="0" anchor="ctr"/>
+          <a:lstStyle/>
+          <a:p>
+            <a:pPr algn="ctr"/>
+          </a:p>
+        </p:txBody>
+      </p:sp>
+      <p:sp>
+        <p:nvSpPr>
+          <p:cNvPr id="26" name="TextBox 25"/>
+          <p:cNvSpPr txBox="1"/>
+          <p:nvPr/>
+        </p:nvSpPr>
+        <p:spPr>
+          <a:xfrm>
+            <a:off x="3611880" y="3300984"/>
+            <a:ext cx="8046720" cy="365760"/>
+          </a:xfrm>
+          <a:prstGeom prst="rect">
+            <a:avLst/>
+          </a:prstGeom>
+          <a:noFill/>
+        </p:spPr>
+        <p:txBody>
+          <a:bodyPr wrap="square" anchor="t" lIns="0" rIns="0" tIns="0" bIns="0">
+            <a:spAutoFit/>
+          </a:bodyPr>
+          <a:lstStyle/>
+          <a:p>
+            <a:pPr algn="l"/>
+            <a:r>
+              <a:rPr sz="1200" b="1">
+                <a:solidFill>
+                  <a:srgbClr val="8A8A8A"/>
+                </a:solidFill>
+                <a:latin typeface="Hiragino Kaku Gothic Pro"/>
+                <a:ea typeface="Hiragino Kaku Gothic Pro"/>
+                <a:cs typeface="Hiragino Kaku Gothic Pro"/>
+              </a:rPr>
+              <a:t>バックリンク（このノートを参照しているノート）</a:t>
+            </a:r>
+          </a:p>
+        </p:txBody>
+      </p:sp>
+      <p:sp>
+        <p:nvSpPr>
+          <p:cNvPr id="27" name="TextBox 26"/>
+          <p:cNvSpPr txBox="1"/>
+          <p:nvPr/>
+        </p:nvSpPr>
+        <p:spPr>
+          <a:xfrm>
+            <a:off x="3611880" y="3712464"/>
+            <a:ext cx="8046720" cy="365760"/>
+          </a:xfrm>
+          <a:prstGeom prst="rect">
+            <a:avLst/>
+          </a:prstGeom>
+          <a:noFill/>
+        </p:spPr>
+        <p:txBody>
+          <a:bodyPr wrap="square" anchor="t" lIns="0" rIns="0" tIns="0" bIns="0">
+            <a:spAutoFit/>
+          </a:bodyPr>
+          <a:lstStyle/>
+          <a:p>
+            <a:pPr algn="l"/>
+            <a:r>
+              <a:rPr sz="1400" b="0">
+                <a:solidFill>
+                  <a:srgbClr val="8A8A8A"/>
+                </a:solidFill>
+                <a:latin typeface="Hiragino Kaku Gothic Pro"/>
+                <a:ea typeface="Hiragino Kaku Gothic Pro"/>
+                <a:cs typeface="Hiragino Kaku Gothic Pro"/>
+              </a:rPr>
+              <a:t>・</a:t>
+            </a:r>
+            <a:r>
+              <a:rPr sz="1400" b="0">
+                <a:solidFill>
+                  <a:srgbClr val="A58CFF"/>
+                </a:solidFill>
+                <a:latin typeface="Hiragino Kaku Gothic Pro"/>
+                <a:ea typeface="Hiragino Kaku Gothic Pro"/>
+                <a:cs typeface="Hiragino Kaku Gothic Pro"/>
+              </a:rPr>
+              <a:t>PM編：複数社連携の確認事項マネジメント</a:t>
             </a:r>
           </a:p>
         </p:txBody>
@@ -4151,7 +8493,7 @@
             <a:avLst/>
           </a:prstGeom>
           <a:solidFill>
-            <a:srgbClr val="141414"/>
+            <a:srgbClr val="1E1E1E"/>
           </a:solidFill>
           <a:ln>
             <a:noFill/>
@@ -4182,14 +8524,190 @@
       </p:sp>
       <p:sp>
         <p:nvSpPr>
-          <p:cNvPr id="3" name="TextBox 2"/>
+          <p:cNvPr id="3" name="Rectangle 2"/>
+          <p:cNvSpPr/>
+          <p:nvPr/>
+        </p:nvSpPr>
+        <p:spPr>
+          <a:xfrm>
+            <a:off x="0" y="0"/>
+            <a:ext cx="12191695" cy="457200"/>
+          </a:xfrm>
+          <a:prstGeom prst="rect">
+            <a:avLst/>
+          </a:prstGeom>
+          <a:solidFill>
+            <a:srgbClr val="323232"/>
+          </a:solidFill>
+          <a:ln>
+            <a:noFill/>
+          </a:ln>
+          <a:effectLst/>
+        </p:spPr>
+        <p:style>
+          <a:lnRef idx="1">
+            <a:schemeClr val="accent1"/>
+          </a:lnRef>
+          <a:fillRef idx="3">
+            <a:schemeClr val="accent1"/>
+          </a:fillRef>
+          <a:effectRef idx="2">
+            <a:schemeClr val="accent1"/>
+          </a:effectRef>
+          <a:fontRef idx="minor">
+            <a:schemeClr val="lt1"/>
+          </a:fontRef>
+        </p:style>
+        <p:txBody>
+          <a:bodyPr rtlCol="0" anchor="ctr"/>
+          <a:lstStyle/>
+          <a:p>
+            <a:pPr algn="ctr"/>
+          </a:p>
+        </p:txBody>
+      </p:sp>
+      <p:sp>
+        <p:nvSpPr>
+          <p:cNvPr id="4" name="Oval 3"/>
+          <p:cNvSpPr/>
+          <p:nvPr/>
+        </p:nvSpPr>
+        <p:spPr>
+          <a:xfrm>
+            <a:off x="256032" y="155448"/>
+            <a:ext cx="155448" cy="155448"/>
+          </a:xfrm>
+          <a:prstGeom prst="ellipse">
+            <a:avLst/>
+          </a:prstGeom>
+          <a:solidFill>
+            <a:srgbClr val="FF5F56"/>
+          </a:solidFill>
+          <a:ln>
+            <a:noFill/>
+          </a:ln>
+          <a:effectLst/>
+        </p:spPr>
+        <p:style>
+          <a:lnRef idx="1">
+            <a:schemeClr val="accent1"/>
+          </a:lnRef>
+          <a:fillRef idx="3">
+            <a:schemeClr val="accent1"/>
+          </a:fillRef>
+          <a:effectRef idx="2">
+            <a:schemeClr val="accent1"/>
+          </a:effectRef>
+          <a:fontRef idx="minor">
+            <a:schemeClr val="lt1"/>
+          </a:fontRef>
+        </p:style>
+        <p:txBody>
+          <a:bodyPr rtlCol="0" anchor="ctr"/>
+          <a:lstStyle/>
+          <a:p>
+            <a:pPr algn="ctr"/>
+          </a:p>
+        </p:txBody>
+      </p:sp>
+      <p:sp>
+        <p:nvSpPr>
+          <p:cNvPr id="5" name="Oval 4"/>
+          <p:cNvSpPr/>
+          <p:nvPr/>
+        </p:nvSpPr>
+        <p:spPr>
+          <a:xfrm>
+            <a:off x="548640" y="155448"/>
+            <a:ext cx="155448" cy="155448"/>
+          </a:xfrm>
+          <a:prstGeom prst="ellipse">
+            <a:avLst/>
+          </a:prstGeom>
+          <a:solidFill>
+            <a:srgbClr val="FFBD2E"/>
+          </a:solidFill>
+          <a:ln>
+            <a:noFill/>
+          </a:ln>
+          <a:effectLst/>
+        </p:spPr>
+        <p:style>
+          <a:lnRef idx="1">
+            <a:schemeClr val="accent1"/>
+          </a:lnRef>
+          <a:fillRef idx="3">
+            <a:schemeClr val="accent1"/>
+          </a:fillRef>
+          <a:effectRef idx="2">
+            <a:schemeClr val="accent1"/>
+          </a:effectRef>
+          <a:fontRef idx="minor">
+            <a:schemeClr val="lt1"/>
+          </a:fontRef>
+        </p:style>
+        <p:txBody>
+          <a:bodyPr rtlCol="0" anchor="ctr"/>
+          <a:lstStyle/>
+          <a:p>
+            <a:pPr algn="ctr"/>
+          </a:p>
+        </p:txBody>
+      </p:sp>
+      <p:sp>
+        <p:nvSpPr>
+          <p:cNvPr id="6" name="Oval 5"/>
+          <p:cNvSpPr/>
+          <p:nvPr/>
+        </p:nvSpPr>
+        <p:spPr>
+          <a:xfrm>
+            <a:off x="841248" y="155448"/>
+            <a:ext cx="155448" cy="155448"/>
+          </a:xfrm>
+          <a:prstGeom prst="ellipse">
+            <a:avLst/>
+          </a:prstGeom>
+          <a:solidFill>
+            <a:srgbClr val="27C93F"/>
+          </a:solidFill>
+          <a:ln>
+            <a:noFill/>
+          </a:ln>
+          <a:effectLst/>
+        </p:spPr>
+        <p:style>
+          <a:lnRef idx="1">
+            <a:schemeClr val="accent1"/>
+          </a:lnRef>
+          <a:fillRef idx="3">
+            <a:schemeClr val="accent1"/>
+          </a:fillRef>
+          <a:effectRef idx="2">
+            <a:schemeClr val="accent1"/>
+          </a:effectRef>
+          <a:fontRef idx="minor">
+            <a:schemeClr val="lt1"/>
+          </a:fontRef>
+        </p:style>
+        <p:txBody>
+          <a:bodyPr rtlCol="0" anchor="ctr"/>
+          <a:lstStyle/>
+          <a:p>
+            <a:pPr algn="ctr"/>
+          </a:p>
+        </p:txBody>
+      </p:sp>
+      <p:sp>
+        <p:nvSpPr>
+          <p:cNvPr id="7" name="TextBox 6"/>
           <p:cNvSpPr txBox="1"/>
           <p:nvPr/>
         </p:nvSpPr>
         <p:spPr>
           <a:xfrm>
-            <a:off x="822960" y="640080"/>
-            <a:ext cx="10607040" cy="548640"/>
+            <a:off x="1371600" y="45720"/>
+            <a:ext cx="5486400" cy="365760"/>
           </a:xfrm>
           <a:prstGeom prst="rect">
             <a:avLst/>
@@ -4197,40 +8715,137 @@
           <a:noFill/>
         </p:spPr>
         <p:txBody>
-          <a:bodyPr wrap="square">
+          <a:bodyPr wrap="square" anchor="ctr" lIns="0" rIns="0" tIns="0" bIns="0">
             <a:spAutoFit/>
           </a:bodyPr>
           <a:lstStyle/>
           <a:p>
-            <a:pPr algn="l">
-              <a:spcAft>
-                <a:spcPts val="800"/>
-              </a:spcAft>
-            </a:pPr>
-            <a:r>
-              <a:rPr sz="2000" b="1">
-                <a:solidFill>
-                  <a:srgbClr val="E87A3E"/>
-                </a:solidFill>
-                <a:latin typeface="Hiragino Kaku Gothic Pro"/>
-                <a:ea typeface="Hiragino Kaku Gothic Pro"/>
-                <a:cs typeface="Hiragino Kaku Gothic Pro"/>
-              </a:rPr>
-              <a:t>STEP 5 ― 俯瞰する</a:t>
-            </a:r>
-          </a:p>
-        </p:txBody>
-      </p:sp>
-      <p:sp>
-        <p:nvSpPr>
-          <p:cNvPr id="4" name="TextBox 3"/>
+            <a:pPr algn="l"/>
+            <a:r>
+              <a:rPr sz="1300" b="0">
+                <a:solidFill>
+                  <a:srgbClr val="8A8A8A"/>
+                </a:solidFill>
+                <a:latin typeface="Hiragino Kaku Gothic Pro"/>
+                <a:ea typeface="Hiragino Kaku Gothic Pro"/>
+                <a:cs typeface="Hiragino Kaku Gothic Pro"/>
+              </a:rPr>
+              <a:t>Obsidian — 第二の脳</a:t>
+            </a:r>
+          </a:p>
+        </p:txBody>
+      </p:sp>
+      <p:sp>
+        <p:nvSpPr>
+          <p:cNvPr id="8" name="Rounded Rectangle 7"/>
+          <p:cNvSpPr/>
+          <p:nvPr/>
+        </p:nvSpPr>
+        <p:spPr>
+          <a:xfrm>
+            <a:off x="10012680" y="73152"/>
+            <a:ext cx="1965960" cy="310896"/>
+          </a:xfrm>
+          <a:prstGeom prst="roundRect">
+            <a:avLst>
+              <a:gd name="adj" fmla="val 8000"/>
+            </a:avLst>
+          </a:prstGeom>
+          <a:solidFill>
+            <a:srgbClr val="8B7CF6"/>
+          </a:solidFill>
+          <a:ln>
+            <a:noFill/>
+          </a:ln>
+          <a:effectLst/>
+        </p:spPr>
+        <p:style>
+          <a:lnRef idx="1">
+            <a:schemeClr val="accent1"/>
+          </a:lnRef>
+          <a:fillRef idx="3">
+            <a:schemeClr val="accent1"/>
+          </a:fillRef>
+          <a:effectRef idx="2">
+            <a:schemeClr val="accent1"/>
+          </a:effectRef>
+          <a:fontRef idx="minor">
+            <a:schemeClr val="lt1"/>
+          </a:fontRef>
+        </p:style>
+        <p:txBody>
+          <a:bodyPr rtlCol="0" anchor="ctr"/>
+          <a:lstStyle/>
+          <a:p>
+            <a:pPr algn="ctr"/>
+            <a:r>
+              <a:rPr sz="1200" b="1">
+                <a:solidFill>
+                  <a:srgbClr val="FFFFFF"/>
+                </a:solidFill>
+                <a:latin typeface="Hiragino Kaku Gothic Pro"/>
+                <a:ea typeface="Hiragino Kaku Gothic Pro"/>
+                <a:cs typeface="Hiragino Kaku Gothic Pro"/>
+              </a:rPr>
+              <a:t>STEP 5 俯瞰</a:t>
+            </a:r>
+          </a:p>
+        </p:txBody>
+      </p:sp>
+      <p:sp>
+        <p:nvSpPr>
+          <p:cNvPr id="9" name="Rectangle 8"/>
+          <p:cNvSpPr/>
+          <p:nvPr/>
+        </p:nvSpPr>
+        <p:spPr>
+          <a:xfrm>
+            <a:off x="0" y="457200"/>
+            <a:ext cx="3108960" cy="6400800"/>
+          </a:xfrm>
+          <a:prstGeom prst="rect">
+            <a:avLst/>
+          </a:prstGeom>
+          <a:solidFill>
+            <a:srgbClr val="262626"/>
+          </a:solidFill>
+          <a:ln>
+            <a:noFill/>
+          </a:ln>
+          <a:effectLst/>
+        </p:spPr>
+        <p:style>
+          <a:lnRef idx="1">
+            <a:schemeClr val="accent1"/>
+          </a:lnRef>
+          <a:fillRef idx="3">
+            <a:schemeClr val="accent1"/>
+          </a:fillRef>
+          <a:effectRef idx="2">
+            <a:schemeClr val="accent1"/>
+          </a:effectRef>
+          <a:fontRef idx="minor">
+            <a:schemeClr val="lt1"/>
+          </a:fontRef>
+        </p:style>
+        <p:txBody>
+          <a:bodyPr rtlCol="0" anchor="ctr"/>
+          <a:lstStyle/>
+          <a:p>
+            <a:pPr algn="ctr"/>
+          </a:p>
+        </p:txBody>
+      </p:sp>
+      <p:sp>
+        <p:nvSpPr>
+          <p:cNvPr id="10" name="TextBox 9"/>
           <p:cNvSpPr txBox="1"/>
           <p:nvPr/>
         </p:nvSpPr>
         <p:spPr>
           <a:xfrm>
-            <a:off x="822960" y="1234440"/>
-            <a:ext cx="10607040" cy="1737360"/>
+            <a:off x="274320" y="566928"/>
+            <a:ext cx="2743200" cy="274320"/>
           </a:xfrm>
           <a:prstGeom prst="rect">
             <a:avLst/>
@@ -4238,40 +8853,36 @@
           <a:noFill/>
         </p:spPr>
         <p:txBody>
-          <a:bodyPr wrap="square">
+          <a:bodyPr wrap="square" anchor="t" lIns="0" rIns="0" tIns="0" bIns="0">
             <a:spAutoFit/>
           </a:bodyPr>
           <a:lstStyle/>
           <a:p>
-            <a:pPr algn="l">
-              <a:spcAft>
-                <a:spcPts val="800"/>
-              </a:spcAft>
-            </a:pPr>
-            <a:r>
-              <a:rPr sz="3400" b="1">
-                <a:solidFill>
-                  <a:srgbClr val="F5F3F0"/>
-                </a:solidFill>
-                <a:latin typeface="Hiragino Kaku Gothic Pro"/>
-                <a:ea typeface="Hiragino Kaku Gothic Pro"/>
-                <a:cs typeface="Hiragino Kaku Gothic Pro"/>
-              </a:rPr>
-              <a:t>グラフビューで全体を見る</a:t>
-            </a:r>
-          </a:p>
-        </p:txBody>
-      </p:sp>
-      <p:sp>
-        <p:nvSpPr>
-          <p:cNvPr id="5" name="TextBox 4"/>
+            <a:pPr algn="l"/>
+            <a:r>
+              <a:rPr sz="1100" b="1">
+                <a:solidFill>
+                  <a:srgbClr val="8A8A8A"/>
+                </a:solidFill>
+                <a:latin typeface="Hiragino Kaku Gothic Pro"/>
+                <a:ea typeface="Hiragino Kaku Gothic Pro"/>
+                <a:cs typeface="Hiragino Kaku Gothic Pro"/>
+              </a:rPr>
+              <a:t>VAULT ／ 第二の脳</a:t>
+            </a:r>
+          </a:p>
+        </p:txBody>
+      </p:sp>
+      <p:sp>
+        <p:nvSpPr>
+          <p:cNvPr id="11" name="TextBox 10"/>
           <p:cNvSpPr txBox="1"/>
           <p:nvPr/>
         </p:nvSpPr>
         <p:spPr>
           <a:xfrm>
-            <a:off x="914400" y="2880360"/>
-            <a:ext cx="10424160" cy="3566160"/>
+            <a:off x="384048" y="987552"/>
+            <a:ext cx="2651760" cy="365760"/>
           </a:xfrm>
           <a:prstGeom prst="rect">
             <a:avLst/>
@@ -4279,62 +8890,1225 @@
           <a:noFill/>
         </p:spPr>
         <p:txBody>
-          <a:bodyPr wrap="square">
+          <a:bodyPr wrap="square" anchor="ctr" lIns="0" rIns="0" tIns="0" bIns="0">
             <a:spAutoFit/>
           </a:bodyPr>
           <a:lstStyle/>
           <a:p>
-            <a:pPr algn="l">
-              <a:spcAft>
-                <a:spcPts val="1400"/>
-              </a:spcAft>
-            </a:pPr>
-            <a:r>
-              <a:rPr sz="2300" b="0">
-                <a:solidFill>
-                  <a:srgbClr val="F5F3F0"/>
-                </a:solidFill>
-                <a:latin typeface="Hiragino Kaku Gothic Pro"/>
-                <a:ea typeface="Hiragino Kaku Gothic Pro"/>
-                <a:cs typeface="Hiragino Kaku Gothic Pro"/>
-              </a:rPr>
-              <a:t>・ノートを点、リンクを線で表示</a:t>
-            </a:r>
-          </a:p>
-          <a:p>
-            <a:pPr algn="l">
-              <a:spcAft>
-                <a:spcPts val="1400"/>
-              </a:spcAft>
-            </a:pPr>
-            <a:r>
-              <a:rPr sz="2300" b="0">
-                <a:solidFill>
-                  <a:srgbClr val="F5F3F0"/>
-                </a:solidFill>
-                <a:latin typeface="Hiragino Kaku Gothic Pro"/>
-                <a:ea typeface="Hiragino Kaku Gothic Pro"/>
-                <a:cs typeface="Hiragino Kaku Gothic Pro"/>
-              </a:rPr>
-              <a:t>・よくつながる点＝関心の中心</a:t>
-            </a:r>
-          </a:p>
-          <a:p>
-            <a:pPr algn="l">
-              <a:spcAft>
-                <a:spcPts val="1400"/>
-              </a:spcAft>
-            </a:pPr>
-            <a:r>
-              <a:rPr sz="2300" b="0">
-                <a:solidFill>
-                  <a:srgbClr val="F5F3F0"/>
-                </a:solidFill>
-                <a:latin typeface="Hiragino Kaku Gothic Pro"/>
-                <a:ea typeface="Hiragino Kaku Gothic Pro"/>
-                <a:cs typeface="Hiragino Kaku Gothic Pro"/>
-              </a:rPr>
-              <a:t>・孤立した点＝次につなぐ候補</a:t>
+            <a:pPr algn="l"/>
+            <a:r>
+              <a:rPr sz="1300" b="0">
+                <a:solidFill>
+                  <a:srgbClr val="8A8A8A"/>
+                </a:solidFill>
+                <a:latin typeface="Hiragino Kaku Gothic Pro"/>
+                <a:ea typeface="Hiragino Kaku Gothic Pro"/>
+                <a:cs typeface="Hiragino Kaku Gothic Pro"/>
+              </a:rPr>
+              <a:t/>
+            </a:r>
+            <a:r>
+              <a:rPr sz="1300" b="0">
+                <a:solidFill>
+                  <a:srgbClr val="8A8A8A"/>
+                </a:solidFill>
+                <a:latin typeface="Hiragino Kaku Gothic Pro"/>
+                <a:ea typeface="Hiragino Kaku Gothic Pro"/>
+                <a:cs typeface="Hiragino Kaku Gothic Pro"/>
+              </a:rPr>
+              <a:t>00_Inbox</a:t>
+            </a:r>
+          </a:p>
+        </p:txBody>
+      </p:sp>
+      <p:sp>
+        <p:nvSpPr>
+          <p:cNvPr id="12" name="TextBox 11"/>
+          <p:cNvSpPr txBox="1"/>
+          <p:nvPr/>
+        </p:nvSpPr>
+        <p:spPr>
+          <a:xfrm>
+            <a:off x="384048" y="1444752"/>
+            <a:ext cx="2651760" cy="365760"/>
+          </a:xfrm>
+          <a:prstGeom prst="rect">
+            <a:avLst/>
+          </a:prstGeom>
+          <a:noFill/>
+        </p:spPr>
+        <p:txBody>
+          <a:bodyPr wrap="square" anchor="ctr" lIns="0" rIns="0" tIns="0" bIns="0">
+            <a:spAutoFit/>
+          </a:bodyPr>
+          <a:lstStyle/>
+          <a:p>
+            <a:pPr algn="l"/>
+            <a:r>
+              <a:rPr sz="1300" b="0">
+                <a:solidFill>
+                  <a:srgbClr val="8A8A8A"/>
+                </a:solidFill>
+                <a:latin typeface="Hiragino Kaku Gothic Pro"/>
+                <a:ea typeface="Hiragino Kaku Gothic Pro"/>
+                <a:cs typeface="Hiragino Kaku Gothic Pro"/>
+              </a:rPr>
+              <a:t/>
+            </a:r>
+            <a:r>
+              <a:rPr sz="1300" b="0">
+                <a:solidFill>
+                  <a:srgbClr val="8A8A8A"/>
+                </a:solidFill>
+                <a:latin typeface="Hiragino Kaku Gothic Pro"/>
+                <a:ea typeface="Hiragino Kaku Gothic Pro"/>
+                <a:cs typeface="Hiragino Kaku Gothic Pro"/>
+              </a:rPr>
+              <a:t>10_Daily</a:t>
+            </a:r>
+          </a:p>
+        </p:txBody>
+      </p:sp>
+      <p:sp>
+        <p:nvSpPr>
+          <p:cNvPr id="13" name="TextBox 12"/>
+          <p:cNvSpPr txBox="1"/>
+          <p:nvPr/>
+        </p:nvSpPr>
+        <p:spPr>
+          <a:xfrm>
+            <a:off x="384048" y="1901952"/>
+            <a:ext cx="2651760" cy="365760"/>
+          </a:xfrm>
+          <a:prstGeom prst="rect">
+            <a:avLst/>
+          </a:prstGeom>
+          <a:noFill/>
+        </p:spPr>
+        <p:txBody>
+          <a:bodyPr wrap="square" anchor="ctr" lIns="0" rIns="0" tIns="0" bIns="0">
+            <a:spAutoFit/>
+          </a:bodyPr>
+          <a:lstStyle/>
+          <a:p>
+            <a:pPr algn="l"/>
+            <a:r>
+              <a:rPr sz="1300" b="0">
+                <a:solidFill>
+                  <a:srgbClr val="8A8A8A"/>
+                </a:solidFill>
+                <a:latin typeface="Hiragino Kaku Gothic Pro"/>
+                <a:ea typeface="Hiragino Kaku Gothic Pro"/>
+                <a:cs typeface="Hiragino Kaku Gothic Pro"/>
+              </a:rPr>
+              <a:t/>
+            </a:r>
+            <a:r>
+              <a:rPr sz="1300" b="0">
+                <a:solidFill>
+                  <a:srgbClr val="8A8A8A"/>
+                </a:solidFill>
+                <a:latin typeface="Hiragino Kaku Gothic Pro"/>
+                <a:ea typeface="Hiragino Kaku Gothic Pro"/>
+                <a:cs typeface="Hiragino Kaku Gothic Pro"/>
+              </a:rPr>
+              <a:t>20_Projects</a:t>
+            </a:r>
+          </a:p>
+        </p:txBody>
+      </p:sp>
+      <p:sp>
+        <p:nvSpPr>
+          <p:cNvPr id="14" name="TextBox 13"/>
+          <p:cNvSpPr txBox="1"/>
+          <p:nvPr/>
+        </p:nvSpPr>
+        <p:spPr>
+          <a:xfrm>
+            <a:off x="384048" y="2359152"/>
+            <a:ext cx="2651760" cy="365760"/>
+          </a:xfrm>
+          <a:prstGeom prst="rect">
+            <a:avLst/>
+          </a:prstGeom>
+          <a:noFill/>
+        </p:spPr>
+        <p:txBody>
+          <a:bodyPr wrap="square" anchor="ctr" lIns="0" rIns="0" tIns="0" bIns="0">
+            <a:spAutoFit/>
+          </a:bodyPr>
+          <a:lstStyle/>
+          <a:p>
+            <a:pPr algn="l"/>
+            <a:r>
+              <a:rPr sz="1300" b="0">
+                <a:solidFill>
+                  <a:srgbClr val="8A8A8A"/>
+                </a:solidFill>
+                <a:latin typeface="Hiragino Kaku Gothic Pro"/>
+                <a:ea typeface="Hiragino Kaku Gothic Pro"/>
+                <a:cs typeface="Hiragino Kaku Gothic Pro"/>
+              </a:rPr>
+              <a:t/>
+            </a:r>
+            <a:r>
+              <a:rPr sz="1300" b="0">
+                <a:solidFill>
+                  <a:srgbClr val="8A8A8A"/>
+                </a:solidFill>
+                <a:latin typeface="Hiragino Kaku Gothic Pro"/>
+                <a:ea typeface="Hiragino Kaku Gothic Pro"/>
+                <a:cs typeface="Hiragino Kaku Gothic Pro"/>
+              </a:rPr>
+              <a:t>30_Areas</a:t>
+            </a:r>
+          </a:p>
+        </p:txBody>
+      </p:sp>
+      <p:sp>
+        <p:nvSpPr>
+          <p:cNvPr id="15" name="TextBox 14"/>
+          <p:cNvSpPr txBox="1"/>
+          <p:nvPr/>
+        </p:nvSpPr>
+        <p:spPr>
+          <a:xfrm>
+            <a:off x="384048" y="2816352"/>
+            <a:ext cx="2651760" cy="365760"/>
+          </a:xfrm>
+          <a:prstGeom prst="rect">
+            <a:avLst/>
+          </a:prstGeom>
+          <a:noFill/>
+        </p:spPr>
+        <p:txBody>
+          <a:bodyPr wrap="square" anchor="ctr" lIns="0" rIns="0" tIns="0" bIns="0">
+            <a:spAutoFit/>
+          </a:bodyPr>
+          <a:lstStyle/>
+          <a:p>
+            <a:pPr algn="l"/>
+            <a:r>
+              <a:rPr sz="1300" b="0">
+                <a:solidFill>
+                  <a:srgbClr val="8A8A8A"/>
+                </a:solidFill>
+                <a:latin typeface="Hiragino Kaku Gothic Pro"/>
+                <a:ea typeface="Hiragino Kaku Gothic Pro"/>
+                <a:cs typeface="Hiragino Kaku Gothic Pro"/>
+              </a:rPr>
+              <a:t/>
+            </a:r>
+            <a:r>
+              <a:rPr sz="1300" b="0">
+                <a:solidFill>
+                  <a:srgbClr val="8A8A8A"/>
+                </a:solidFill>
+                <a:latin typeface="Hiragino Kaku Gothic Pro"/>
+                <a:ea typeface="Hiragino Kaku Gothic Pro"/>
+                <a:cs typeface="Hiragino Kaku Gothic Pro"/>
+              </a:rPr>
+              <a:t>40_Resources</a:t>
+            </a:r>
+          </a:p>
+        </p:txBody>
+      </p:sp>
+      <p:sp>
+        <p:nvSpPr>
+          <p:cNvPr id="16" name="TextBox 15"/>
+          <p:cNvSpPr txBox="1"/>
+          <p:nvPr/>
+        </p:nvSpPr>
+        <p:spPr>
+          <a:xfrm>
+            <a:off x="384048" y="3273552"/>
+            <a:ext cx="2651760" cy="365760"/>
+          </a:xfrm>
+          <a:prstGeom prst="rect">
+            <a:avLst/>
+          </a:prstGeom>
+          <a:noFill/>
+        </p:spPr>
+        <p:txBody>
+          <a:bodyPr wrap="square" anchor="ctr" lIns="0" rIns="0" tIns="0" bIns="0">
+            <a:spAutoFit/>
+          </a:bodyPr>
+          <a:lstStyle/>
+          <a:p>
+            <a:pPr algn="l"/>
+            <a:r>
+              <a:rPr sz="1300" b="0">
+                <a:solidFill>
+                  <a:srgbClr val="8A8A8A"/>
+                </a:solidFill>
+                <a:latin typeface="Hiragino Kaku Gothic Pro"/>
+                <a:ea typeface="Hiragino Kaku Gothic Pro"/>
+                <a:cs typeface="Hiragino Kaku Gothic Pro"/>
+              </a:rPr>
+              <a:t/>
+            </a:r>
+            <a:r>
+              <a:rPr sz="1300" b="0">
+                <a:solidFill>
+                  <a:srgbClr val="8A8A8A"/>
+                </a:solidFill>
+                <a:latin typeface="Hiragino Kaku Gothic Pro"/>
+                <a:ea typeface="Hiragino Kaku Gothic Pro"/>
+                <a:cs typeface="Hiragino Kaku Gothic Pro"/>
+              </a:rPr>
+              <a:t>50_PermanentNotes</a:t>
+            </a:r>
+          </a:p>
+        </p:txBody>
+      </p:sp>
+      <p:sp>
+        <p:nvSpPr>
+          <p:cNvPr id="17" name="TextBox 16"/>
+          <p:cNvSpPr txBox="1"/>
+          <p:nvPr/>
+        </p:nvSpPr>
+        <p:spPr>
+          <a:xfrm>
+            <a:off x="384048" y="3730752"/>
+            <a:ext cx="2651760" cy="365760"/>
+          </a:xfrm>
+          <a:prstGeom prst="rect">
+            <a:avLst/>
+          </a:prstGeom>
+          <a:noFill/>
+        </p:spPr>
+        <p:txBody>
+          <a:bodyPr wrap="square" anchor="ctr" lIns="0" rIns="0" tIns="0" bIns="0">
+            <a:spAutoFit/>
+          </a:bodyPr>
+          <a:lstStyle/>
+          <a:p>
+            <a:pPr algn="l"/>
+            <a:r>
+              <a:rPr sz="1300" b="0">
+                <a:solidFill>
+                  <a:srgbClr val="8A8A8A"/>
+                </a:solidFill>
+                <a:latin typeface="Hiragino Kaku Gothic Pro"/>
+                <a:ea typeface="Hiragino Kaku Gothic Pro"/>
+                <a:cs typeface="Hiragino Kaku Gothic Pro"/>
+              </a:rPr>
+              <a:t/>
+            </a:r>
+            <a:r>
+              <a:rPr sz="1300" b="0">
+                <a:solidFill>
+                  <a:srgbClr val="8A8A8A"/>
+                </a:solidFill>
+                <a:latin typeface="Hiragino Kaku Gothic Pro"/>
+                <a:ea typeface="Hiragino Kaku Gothic Pro"/>
+                <a:cs typeface="Hiragino Kaku Gothic Pro"/>
+              </a:rPr>
+              <a:t>90_Archive</a:t>
+            </a:r>
+          </a:p>
+        </p:txBody>
+      </p:sp>
+      <p:sp>
+        <p:nvSpPr>
+          <p:cNvPr id="18" name="Rounded Rectangle 17"/>
+          <p:cNvSpPr/>
+          <p:nvPr/>
+        </p:nvSpPr>
+        <p:spPr>
+          <a:xfrm>
+            <a:off x="3246120" y="566928"/>
+            <a:ext cx="8778240" cy="6035040"/>
+          </a:xfrm>
+          <a:prstGeom prst="roundRect">
+            <a:avLst>
+              <a:gd name="adj" fmla="val 8000"/>
+            </a:avLst>
+          </a:prstGeom>
+          <a:solidFill>
+            <a:srgbClr val="161616"/>
+          </a:solidFill>
+          <a:ln>
+            <a:noFill/>
+          </a:ln>
+          <a:effectLst/>
+        </p:spPr>
+        <p:style>
+          <a:lnRef idx="1">
+            <a:schemeClr val="accent1"/>
+          </a:lnRef>
+          <a:fillRef idx="3">
+            <a:schemeClr val="accent1"/>
+          </a:fillRef>
+          <a:effectRef idx="2">
+            <a:schemeClr val="accent1"/>
+          </a:effectRef>
+          <a:fontRef idx="minor">
+            <a:schemeClr val="lt1"/>
+          </a:fontRef>
+        </p:style>
+        <p:txBody>
+          <a:bodyPr rtlCol="0" anchor="ctr"/>
+          <a:lstStyle/>
+          <a:p>
+            <a:pPr algn="ctr"/>
+          </a:p>
+        </p:txBody>
+      </p:sp>
+      <p:sp>
+        <p:nvSpPr>
+          <p:cNvPr id="19" name="TextBox 18"/>
+          <p:cNvSpPr txBox="1"/>
+          <p:nvPr/>
+        </p:nvSpPr>
+        <p:spPr>
+          <a:xfrm>
+            <a:off x="3429000" y="685800"/>
+            <a:ext cx="8412480" cy="365760"/>
+          </a:xfrm>
+          <a:prstGeom prst="rect">
+            <a:avLst/>
+          </a:prstGeom>
+          <a:noFill/>
+        </p:spPr>
+        <p:txBody>
+          <a:bodyPr wrap="square" anchor="t" lIns="0" rIns="0" tIns="0" bIns="0">
+            <a:spAutoFit/>
+          </a:bodyPr>
+          <a:lstStyle/>
+          <a:p>
+            <a:pPr algn="l"/>
+            <a:r>
+              <a:rPr sz="1300" b="1">
+                <a:solidFill>
+                  <a:srgbClr val="8A8A8A"/>
+                </a:solidFill>
+                <a:latin typeface="Hiragino Kaku Gothic Pro"/>
+                <a:ea typeface="Hiragino Kaku Gothic Pro"/>
+                <a:cs typeface="Hiragino Kaku Gothic Pro"/>
+              </a:rPr>
+              <a:t>グラフビュー ― 知識のつながり</a:t>
+            </a:r>
+          </a:p>
+        </p:txBody>
+      </p:sp>
+      <p:cxnSp>
+        <p:nvCxnSpPr>
+          <p:cNvPr id="20" name="Connector 19"/>
+          <p:cNvCxnSpPr/>
+          <p:nvPr/>
+        </p:nvCxnSpPr>
+        <p:spPr>
+          <a:xfrm flipH="1">
+            <a:off x="4480560" y="2331720"/>
+            <a:ext cx="1508760" cy="1600200"/>
+          </a:xfrm>
+          <a:prstGeom prst="line">
+            <a:avLst/>
+          </a:prstGeom>
+          <a:ln w="15240">
+            <a:solidFill>
+              <a:srgbClr val="443F66"/>
+            </a:solidFill>
+          </a:ln>
+          <a:effectLst/>
+        </p:spPr>
+        <p:style>
+          <a:lnRef idx="2">
+            <a:schemeClr val="accent1"/>
+          </a:lnRef>
+          <a:fillRef idx="0">
+            <a:schemeClr val="accent1"/>
+          </a:fillRef>
+          <a:effectRef idx="1">
+            <a:schemeClr val="accent1"/>
+          </a:effectRef>
+          <a:fontRef idx="minor">
+            <a:schemeClr val="tx1"/>
+          </a:fontRef>
+        </p:style>
+      </p:cxnSp>
+      <p:cxnSp>
+        <p:nvCxnSpPr>
+          <p:cNvPr id="21" name="Connector 20"/>
+          <p:cNvCxnSpPr/>
+          <p:nvPr/>
+        </p:nvCxnSpPr>
+        <p:spPr>
+          <a:xfrm>
+            <a:off x="5989320" y="2331720"/>
+            <a:ext cx="1508759" cy="1051559"/>
+          </a:xfrm>
+          <a:prstGeom prst="line">
+            <a:avLst/>
+          </a:prstGeom>
+          <a:ln w="15240">
+            <a:solidFill>
+              <a:srgbClr val="443F66"/>
+            </a:solidFill>
+          </a:ln>
+          <a:effectLst/>
+        </p:spPr>
+        <p:style>
+          <a:lnRef idx="2">
+            <a:schemeClr val="accent1"/>
+          </a:lnRef>
+          <a:fillRef idx="0">
+            <a:schemeClr val="accent1"/>
+          </a:fillRef>
+          <a:effectRef idx="1">
+            <a:schemeClr val="accent1"/>
+          </a:effectRef>
+          <a:fontRef idx="minor">
+            <a:schemeClr val="tx1"/>
+          </a:fontRef>
+        </p:style>
+      </p:cxnSp>
+      <p:cxnSp>
+        <p:nvCxnSpPr>
+          <p:cNvPr id="22" name="Connector 21"/>
+          <p:cNvCxnSpPr/>
+          <p:nvPr/>
+        </p:nvCxnSpPr>
+        <p:spPr>
+          <a:xfrm>
+            <a:off x="5989320" y="2331720"/>
+            <a:ext cx="3337560" cy="45719"/>
+          </a:xfrm>
+          <a:prstGeom prst="line">
+            <a:avLst/>
+          </a:prstGeom>
+          <a:ln w="15240">
+            <a:solidFill>
+              <a:srgbClr val="443F66"/>
+            </a:solidFill>
+          </a:ln>
+          <a:effectLst/>
+        </p:spPr>
+        <p:style>
+          <a:lnRef idx="2">
+            <a:schemeClr val="accent1"/>
+          </a:lnRef>
+          <a:fillRef idx="0">
+            <a:schemeClr val="accent1"/>
+          </a:fillRef>
+          <a:effectRef idx="1">
+            <a:schemeClr val="accent1"/>
+          </a:effectRef>
+          <a:fontRef idx="minor">
+            <a:schemeClr val="tx1"/>
+          </a:fontRef>
+        </p:style>
+      </p:cxnSp>
+      <p:cxnSp>
+        <p:nvCxnSpPr>
+          <p:cNvPr id="23" name="Connector 22"/>
+          <p:cNvCxnSpPr/>
+          <p:nvPr/>
+        </p:nvCxnSpPr>
+        <p:spPr>
+          <a:xfrm>
+            <a:off x="5989320" y="2331720"/>
+            <a:ext cx="2240280" cy="2697480"/>
+          </a:xfrm>
+          <a:prstGeom prst="line">
+            <a:avLst/>
+          </a:prstGeom>
+          <a:ln w="15240">
+            <a:solidFill>
+              <a:srgbClr val="443F66"/>
+            </a:solidFill>
+          </a:ln>
+          <a:effectLst/>
+        </p:spPr>
+        <p:style>
+          <a:lnRef idx="2">
+            <a:schemeClr val="accent1"/>
+          </a:lnRef>
+          <a:fillRef idx="0">
+            <a:schemeClr val="accent1"/>
+          </a:fillRef>
+          <a:effectRef idx="1">
+            <a:schemeClr val="accent1"/>
+          </a:effectRef>
+          <a:fontRef idx="minor">
+            <a:schemeClr val="tx1"/>
+          </a:fontRef>
+        </p:style>
+      </p:cxnSp>
+      <p:cxnSp>
+        <p:nvCxnSpPr>
+          <p:cNvPr id="24" name="Connector 23"/>
+          <p:cNvCxnSpPr/>
+          <p:nvPr/>
+        </p:nvCxnSpPr>
+        <p:spPr>
+          <a:xfrm flipH="1">
+            <a:off x="5212080" y="2331720"/>
+            <a:ext cx="777240" cy="3063239"/>
+          </a:xfrm>
+          <a:prstGeom prst="line">
+            <a:avLst/>
+          </a:prstGeom>
+          <a:ln w="15240">
+            <a:solidFill>
+              <a:srgbClr val="443F66"/>
+            </a:solidFill>
+          </a:ln>
+          <a:effectLst/>
+        </p:spPr>
+        <p:style>
+          <a:lnRef idx="2">
+            <a:schemeClr val="accent1"/>
+          </a:lnRef>
+          <a:fillRef idx="0">
+            <a:schemeClr val="accent1"/>
+          </a:fillRef>
+          <a:effectRef idx="1">
+            <a:schemeClr val="accent1"/>
+          </a:effectRef>
+          <a:fontRef idx="minor">
+            <a:schemeClr val="tx1"/>
+          </a:fontRef>
+        </p:style>
+      </p:cxnSp>
+      <p:cxnSp>
+        <p:nvCxnSpPr>
+          <p:cNvPr id="25" name="Connector 24"/>
+          <p:cNvCxnSpPr/>
+          <p:nvPr/>
+        </p:nvCxnSpPr>
+        <p:spPr>
+          <a:xfrm>
+            <a:off x="5989320" y="2331720"/>
+            <a:ext cx="4069080" cy="1965960"/>
+          </a:xfrm>
+          <a:prstGeom prst="line">
+            <a:avLst/>
+          </a:prstGeom>
+          <a:ln w="15240">
+            <a:solidFill>
+              <a:srgbClr val="443F66"/>
+            </a:solidFill>
+          </a:ln>
+          <a:effectLst/>
+        </p:spPr>
+        <p:style>
+          <a:lnRef idx="2">
+            <a:schemeClr val="accent1"/>
+          </a:lnRef>
+          <a:fillRef idx="0">
+            <a:schemeClr val="accent1"/>
+          </a:fillRef>
+          <a:effectRef idx="1">
+            <a:schemeClr val="accent1"/>
+          </a:effectRef>
+          <a:fontRef idx="minor">
+            <a:schemeClr val="tx1"/>
+          </a:fontRef>
+        </p:style>
+      </p:cxnSp>
+      <p:cxnSp>
+        <p:nvCxnSpPr>
+          <p:cNvPr id="26" name="Connector 25"/>
+          <p:cNvCxnSpPr/>
+          <p:nvPr/>
+        </p:nvCxnSpPr>
+        <p:spPr>
+          <a:xfrm flipV="1">
+            <a:off x="4480560" y="3383279"/>
+            <a:ext cx="3017519" cy="548641"/>
+          </a:xfrm>
+          <a:prstGeom prst="line">
+            <a:avLst/>
+          </a:prstGeom>
+          <a:ln w="12700">
+            <a:solidFill>
+              <a:srgbClr val="3A3655"/>
+            </a:solidFill>
+          </a:ln>
+          <a:effectLst/>
+        </p:spPr>
+        <p:style>
+          <a:lnRef idx="2">
+            <a:schemeClr val="accent1"/>
+          </a:lnRef>
+          <a:fillRef idx="0">
+            <a:schemeClr val="accent1"/>
+          </a:fillRef>
+          <a:effectRef idx="1">
+            <a:schemeClr val="accent1"/>
+          </a:effectRef>
+          <a:fontRef idx="minor">
+            <a:schemeClr val="tx1"/>
+          </a:fontRef>
+        </p:style>
+      </p:cxnSp>
+      <p:sp>
+        <p:nvSpPr>
+          <p:cNvPr id="27" name="Oval 26"/>
+          <p:cNvSpPr/>
+          <p:nvPr/>
+        </p:nvSpPr>
+        <p:spPr>
+          <a:xfrm>
+            <a:off x="5486400" y="2011680"/>
+            <a:ext cx="822960" cy="822960"/>
+          </a:xfrm>
+          <a:prstGeom prst="ellipse">
+            <a:avLst/>
+          </a:prstGeom>
+          <a:solidFill>
+            <a:srgbClr val="8B7CF6"/>
+          </a:solidFill>
+          <a:ln>
+            <a:noFill/>
+          </a:ln>
+          <a:effectLst/>
+        </p:spPr>
+        <p:style>
+          <a:lnRef idx="1">
+            <a:schemeClr val="accent1"/>
+          </a:lnRef>
+          <a:fillRef idx="3">
+            <a:schemeClr val="accent1"/>
+          </a:fillRef>
+          <a:effectRef idx="2">
+            <a:schemeClr val="accent1"/>
+          </a:effectRef>
+          <a:fontRef idx="minor">
+            <a:schemeClr val="lt1"/>
+          </a:fontRef>
+        </p:style>
+        <p:txBody>
+          <a:bodyPr rtlCol="0" anchor="ctr"/>
+          <a:lstStyle/>
+          <a:p>
+            <a:pPr algn="ctr"/>
+          </a:p>
+        </p:txBody>
+      </p:sp>
+      <p:sp>
+        <p:nvSpPr>
+          <p:cNvPr id="28" name="TextBox 27"/>
+          <p:cNvSpPr txBox="1"/>
+          <p:nvPr/>
+        </p:nvSpPr>
+        <p:spPr>
+          <a:xfrm>
+            <a:off x="4846320" y="2852928"/>
+            <a:ext cx="2103120" cy="457200"/>
+          </a:xfrm>
+          <a:prstGeom prst="rect">
+            <a:avLst/>
+          </a:prstGeom>
+          <a:noFill/>
+        </p:spPr>
+        <p:txBody>
+          <a:bodyPr wrap="square" anchor="t" lIns="0" rIns="0" tIns="0" bIns="0">
+            <a:spAutoFit/>
+          </a:bodyPr>
+          <a:lstStyle/>
+          <a:p>
+            <a:pPr algn="ctr"/>
+            <a:r>
+              <a:rPr sz="1100" b="1">
+                <a:solidFill>
+                  <a:srgbClr val="DCDDDE"/>
+                </a:solidFill>
+                <a:latin typeface="Hiragino Kaku Gothic Pro"/>
+                <a:ea typeface="Hiragino Kaku Gothic Pro"/>
+                <a:cs typeface="Hiragino Kaku Gothic Pro"/>
+              </a:rPr>
+              <a:t>確認は型で出す</a:t>
+            </a:r>
+          </a:p>
+        </p:txBody>
+      </p:sp>
+      <p:sp>
+        <p:nvSpPr>
+          <p:cNvPr id="29" name="Oval 28"/>
+          <p:cNvSpPr/>
+          <p:nvPr/>
+        </p:nvSpPr>
+        <p:spPr>
+          <a:xfrm>
+            <a:off x="4114800" y="3657600"/>
+            <a:ext cx="603504" cy="603504"/>
+          </a:xfrm>
+          <a:prstGeom prst="ellipse">
+            <a:avLst/>
+          </a:prstGeom>
+          <a:solidFill>
+            <a:srgbClr val="5B538A"/>
+          </a:solidFill>
+          <a:ln>
+            <a:noFill/>
+          </a:ln>
+          <a:effectLst/>
+        </p:spPr>
+        <p:style>
+          <a:lnRef idx="1">
+            <a:schemeClr val="accent1"/>
+          </a:lnRef>
+          <a:fillRef idx="3">
+            <a:schemeClr val="accent1"/>
+          </a:fillRef>
+          <a:effectRef idx="2">
+            <a:schemeClr val="accent1"/>
+          </a:effectRef>
+          <a:fontRef idx="minor">
+            <a:schemeClr val="lt1"/>
+          </a:fontRef>
+        </p:style>
+        <p:txBody>
+          <a:bodyPr rtlCol="0" anchor="ctr"/>
+          <a:lstStyle/>
+          <a:p>
+            <a:pPr algn="ctr"/>
+          </a:p>
+        </p:txBody>
+      </p:sp>
+      <p:sp>
+        <p:nvSpPr>
+          <p:cNvPr id="30" name="TextBox 29"/>
+          <p:cNvSpPr txBox="1"/>
+          <p:nvPr/>
+        </p:nvSpPr>
+        <p:spPr>
+          <a:xfrm>
+            <a:off x="3474720" y="4279392"/>
+            <a:ext cx="1883664" cy="457200"/>
+          </a:xfrm>
+          <a:prstGeom prst="rect">
+            <a:avLst/>
+          </a:prstGeom>
+          <a:noFill/>
+        </p:spPr>
+        <p:txBody>
+          <a:bodyPr wrap="square" anchor="t" lIns="0" rIns="0" tIns="0" bIns="0">
+            <a:spAutoFit/>
+          </a:bodyPr>
+          <a:lstStyle/>
+          <a:p>
+            <a:pPr algn="ctr"/>
+            <a:r>
+              <a:rPr sz="1000" b="0">
+                <a:solidFill>
+                  <a:srgbClr val="8A8A8A"/>
+                </a:solidFill>
+                <a:latin typeface="Hiragino Kaku Gothic Pro"/>
+                <a:ea typeface="Hiragino Kaku Gothic Pro"/>
+                <a:cs typeface="Hiragino Kaku Gothic Pro"/>
+              </a:rPr>
+              <a:t>確認事項
+マネジメント</a:t>
+            </a:r>
+          </a:p>
+        </p:txBody>
+      </p:sp>
+      <p:sp>
+        <p:nvSpPr>
+          <p:cNvPr id="31" name="Oval 30"/>
+          <p:cNvSpPr/>
+          <p:nvPr/>
+        </p:nvSpPr>
+        <p:spPr>
+          <a:xfrm>
+            <a:off x="7132320" y="3108960"/>
+            <a:ext cx="603504" cy="603504"/>
+          </a:xfrm>
+          <a:prstGeom prst="ellipse">
+            <a:avLst/>
+          </a:prstGeom>
+          <a:solidFill>
+            <a:srgbClr val="5B538A"/>
+          </a:solidFill>
+          <a:ln>
+            <a:noFill/>
+          </a:ln>
+          <a:effectLst/>
+        </p:spPr>
+        <p:style>
+          <a:lnRef idx="1">
+            <a:schemeClr val="accent1"/>
+          </a:lnRef>
+          <a:fillRef idx="3">
+            <a:schemeClr val="accent1"/>
+          </a:fillRef>
+          <a:effectRef idx="2">
+            <a:schemeClr val="accent1"/>
+          </a:effectRef>
+          <a:fontRef idx="minor">
+            <a:schemeClr val="lt1"/>
+          </a:fontRef>
+        </p:style>
+        <p:txBody>
+          <a:bodyPr rtlCol="0" anchor="ctr"/>
+          <a:lstStyle/>
+          <a:p>
+            <a:pPr algn="ctr"/>
+          </a:p>
+        </p:txBody>
+      </p:sp>
+      <p:sp>
+        <p:nvSpPr>
+          <p:cNvPr id="32" name="TextBox 31"/>
+          <p:cNvSpPr txBox="1"/>
+          <p:nvPr/>
+        </p:nvSpPr>
+        <p:spPr>
+          <a:xfrm>
+            <a:off x="6492240" y="3730751"/>
+            <a:ext cx="1883664" cy="457200"/>
+          </a:xfrm>
+          <a:prstGeom prst="rect">
+            <a:avLst/>
+          </a:prstGeom>
+          <a:noFill/>
+        </p:spPr>
+        <p:txBody>
+          <a:bodyPr wrap="square" anchor="t" lIns="0" rIns="0" tIns="0" bIns="0">
+            <a:spAutoFit/>
+          </a:bodyPr>
+          <a:lstStyle/>
+          <a:p>
+            <a:pPr algn="ctr"/>
+            <a:r>
+              <a:rPr sz="1000" b="0">
+                <a:solidFill>
+                  <a:srgbClr val="8A8A8A"/>
+                </a:solidFill>
+                <a:latin typeface="Hiragino Kaku Gothic Pro"/>
+                <a:ea typeface="Hiragino Kaku Gothic Pro"/>
+                <a:cs typeface="Hiragino Kaku Gothic Pro"/>
+              </a:rPr>
+              <a:t>決定事項
+シート</a:t>
+            </a:r>
+          </a:p>
+        </p:txBody>
+      </p:sp>
+      <p:sp>
+        <p:nvSpPr>
+          <p:cNvPr id="33" name="Oval 32"/>
+          <p:cNvSpPr/>
+          <p:nvPr/>
+        </p:nvSpPr>
+        <p:spPr>
+          <a:xfrm>
+            <a:off x="8961120" y="2103120"/>
+            <a:ext cx="603504" cy="603504"/>
+          </a:xfrm>
+          <a:prstGeom prst="ellipse">
+            <a:avLst/>
+          </a:prstGeom>
+          <a:solidFill>
+            <a:srgbClr val="5B538A"/>
+          </a:solidFill>
+          <a:ln>
+            <a:noFill/>
+          </a:ln>
+          <a:effectLst/>
+        </p:spPr>
+        <p:style>
+          <a:lnRef idx="1">
+            <a:schemeClr val="accent1"/>
+          </a:lnRef>
+          <a:fillRef idx="3">
+            <a:schemeClr val="accent1"/>
+          </a:fillRef>
+          <a:effectRef idx="2">
+            <a:schemeClr val="accent1"/>
+          </a:effectRef>
+          <a:fontRef idx="minor">
+            <a:schemeClr val="lt1"/>
+          </a:fontRef>
+        </p:style>
+        <p:txBody>
+          <a:bodyPr rtlCol="0" anchor="ctr"/>
+          <a:lstStyle/>
+          <a:p>
+            <a:pPr algn="ctr"/>
+          </a:p>
+        </p:txBody>
+      </p:sp>
+      <p:sp>
+        <p:nvSpPr>
+          <p:cNvPr id="34" name="TextBox 33"/>
+          <p:cNvSpPr txBox="1"/>
+          <p:nvPr/>
+        </p:nvSpPr>
+        <p:spPr>
+          <a:xfrm>
+            <a:off x="8321040" y="2724912"/>
+            <a:ext cx="1883664" cy="457200"/>
+          </a:xfrm>
+          <a:prstGeom prst="rect">
+            <a:avLst/>
+          </a:prstGeom>
+          <a:noFill/>
+        </p:spPr>
+        <p:txBody>
+          <a:bodyPr wrap="square" anchor="t" lIns="0" rIns="0" tIns="0" bIns="0">
+            <a:spAutoFit/>
+          </a:bodyPr>
+          <a:lstStyle/>
+          <a:p>
+            <a:pPr algn="ctr"/>
+            <a:r>
+              <a:rPr sz="1000" b="0">
+                <a:solidFill>
+                  <a:srgbClr val="8A8A8A"/>
+                </a:solidFill>
+                <a:latin typeface="Hiragino Kaku Gothic Pro"/>
+                <a:ea typeface="Hiragino Kaku Gothic Pro"/>
+                <a:cs typeface="Hiragino Kaku Gothic Pro"/>
+              </a:rPr>
+              <a:t>要件整理</a:t>
+            </a:r>
+          </a:p>
+        </p:txBody>
+      </p:sp>
+      <p:sp>
+        <p:nvSpPr>
+          <p:cNvPr id="35" name="Oval 34"/>
+          <p:cNvSpPr/>
+          <p:nvPr/>
+        </p:nvSpPr>
+        <p:spPr>
+          <a:xfrm>
+            <a:off x="7863840" y="4754880"/>
+            <a:ext cx="603504" cy="603504"/>
+          </a:xfrm>
+          <a:prstGeom prst="ellipse">
+            <a:avLst/>
+          </a:prstGeom>
+          <a:solidFill>
+            <a:srgbClr val="5B538A"/>
+          </a:solidFill>
+          <a:ln>
+            <a:noFill/>
+          </a:ln>
+          <a:effectLst/>
+        </p:spPr>
+        <p:style>
+          <a:lnRef idx="1">
+            <a:schemeClr val="accent1"/>
+          </a:lnRef>
+          <a:fillRef idx="3">
+            <a:schemeClr val="accent1"/>
+          </a:fillRef>
+          <a:effectRef idx="2">
+            <a:schemeClr val="accent1"/>
+          </a:effectRef>
+          <a:fontRef idx="minor">
+            <a:schemeClr val="lt1"/>
+          </a:fontRef>
+        </p:style>
+        <p:txBody>
+          <a:bodyPr rtlCol="0" anchor="ctr"/>
+          <a:lstStyle/>
+          <a:p>
+            <a:pPr algn="ctr"/>
+          </a:p>
+        </p:txBody>
+      </p:sp>
+      <p:sp>
+        <p:nvSpPr>
+          <p:cNvPr id="36" name="TextBox 35"/>
+          <p:cNvSpPr txBox="1"/>
+          <p:nvPr/>
+        </p:nvSpPr>
+        <p:spPr>
+          <a:xfrm>
+            <a:off x="7223759" y="5376672"/>
+            <a:ext cx="1883664" cy="457200"/>
+          </a:xfrm>
+          <a:prstGeom prst="rect">
+            <a:avLst/>
+          </a:prstGeom>
+          <a:noFill/>
+        </p:spPr>
+        <p:txBody>
+          <a:bodyPr wrap="square" anchor="t" lIns="0" rIns="0" tIns="0" bIns="0">
+            <a:spAutoFit/>
+          </a:bodyPr>
+          <a:lstStyle/>
+          <a:p>
+            <a:pPr algn="ctr"/>
+            <a:r>
+              <a:rPr sz="1000" b="0">
+                <a:solidFill>
+                  <a:srgbClr val="8A8A8A"/>
+                </a:solidFill>
+                <a:latin typeface="Hiragino Kaku Gothic Pro"/>
+                <a:ea typeface="Hiragino Kaku Gothic Pro"/>
+                <a:cs typeface="Hiragino Kaku Gothic Pro"/>
+              </a:rPr>
+              <a:t>中間納品</a:t>
+            </a:r>
+          </a:p>
+        </p:txBody>
+      </p:sp>
+      <p:sp>
+        <p:nvSpPr>
+          <p:cNvPr id="37" name="Oval 36"/>
+          <p:cNvSpPr/>
+          <p:nvPr/>
+        </p:nvSpPr>
+        <p:spPr>
+          <a:xfrm>
+            <a:off x="4846320" y="5120640"/>
+            <a:ext cx="603504" cy="603504"/>
+          </a:xfrm>
+          <a:prstGeom prst="ellipse">
+            <a:avLst/>
+          </a:prstGeom>
+          <a:solidFill>
+            <a:srgbClr val="5B538A"/>
+          </a:solidFill>
+          <a:ln>
+            <a:noFill/>
+          </a:ln>
+          <a:effectLst/>
+        </p:spPr>
+        <p:style>
+          <a:lnRef idx="1">
+            <a:schemeClr val="accent1"/>
+          </a:lnRef>
+          <a:fillRef idx="3">
+            <a:schemeClr val="accent1"/>
+          </a:fillRef>
+          <a:effectRef idx="2">
+            <a:schemeClr val="accent1"/>
+          </a:effectRef>
+          <a:fontRef idx="minor">
+            <a:schemeClr val="lt1"/>
+          </a:fontRef>
+        </p:style>
+        <p:txBody>
+          <a:bodyPr rtlCol="0" anchor="ctr"/>
+          <a:lstStyle/>
+          <a:p>
+            <a:pPr algn="ctr"/>
+          </a:p>
+        </p:txBody>
+      </p:sp>
+      <p:sp>
+        <p:nvSpPr>
+          <p:cNvPr id="38" name="TextBox 37"/>
+          <p:cNvSpPr txBox="1"/>
+          <p:nvPr/>
+        </p:nvSpPr>
+        <p:spPr>
+          <a:xfrm>
+            <a:off x="4206240" y="5742431"/>
+            <a:ext cx="1883664" cy="457200"/>
+          </a:xfrm>
+          <a:prstGeom prst="rect">
+            <a:avLst/>
+          </a:prstGeom>
+          <a:noFill/>
+        </p:spPr>
+        <p:txBody>
+          <a:bodyPr wrap="square" anchor="t" lIns="0" rIns="0" tIns="0" bIns="0">
+            <a:spAutoFit/>
+          </a:bodyPr>
+          <a:lstStyle/>
+          <a:p>
+            <a:pPr algn="ctr"/>
+            <a:r>
+              <a:rPr sz="1000" b="0">
+                <a:solidFill>
+                  <a:srgbClr val="8A8A8A"/>
+                </a:solidFill>
+                <a:latin typeface="Hiragino Kaku Gothic Pro"/>
+                <a:ea typeface="Hiragino Kaku Gothic Pro"/>
+                <a:cs typeface="Hiragino Kaku Gothic Pro"/>
+              </a:rPr>
+              <a:t>速いQA</a:t>
+            </a:r>
+          </a:p>
+        </p:txBody>
+      </p:sp>
+      <p:sp>
+        <p:nvSpPr>
+          <p:cNvPr id="39" name="Oval 38"/>
+          <p:cNvSpPr/>
+          <p:nvPr/>
+        </p:nvSpPr>
+        <p:spPr>
+          <a:xfrm>
+            <a:off x="9692640" y="4023360"/>
+            <a:ext cx="603504" cy="603504"/>
+          </a:xfrm>
+          <a:prstGeom prst="ellipse">
+            <a:avLst/>
+          </a:prstGeom>
+          <a:solidFill>
+            <a:srgbClr val="5B538A"/>
+          </a:solidFill>
+          <a:ln>
+            <a:noFill/>
+          </a:ln>
+          <a:effectLst/>
+        </p:spPr>
+        <p:style>
+          <a:lnRef idx="1">
+            <a:schemeClr val="accent1"/>
+          </a:lnRef>
+          <a:fillRef idx="3">
+            <a:schemeClr val="accent1"/>
+          </a:fillRef>
+          <a:effectRef idx="2">
+            <a:schemeClr val="accent1"/>
+          </a:effectRef>
+          <a:fontRef idx="minor">
+            <a:schemeClr val="lt1"/>
+          </a:fontRef>
+        </p:style>
+        <p:txBody>
+          <a:bodyPr rtlCol="0" anchor="ctr"/>
+          <a:lstStyle/>
+          <a:p>
+            <a:pPr algn="ctr"/>
+          </a:p>
+        </p:txBody>
+      </p:sp>
+      <p:sp>
+        <p:nvSpPr>
+          <p:cNvPr id="40" name="TextBox 39"/>
+          <p:cNvSpPr txBox="1"/>
+          <p:nvPr/>
+        </p:nvSpPr>
+        <p:spPr>
+          <a:xfrm>
+            <a:off x="9052560" y="4645152"/>
+            <a:ext cx="1883664" cy="457200"/>
+          </a:xfrm>
+          <a:prstGeom prst="rect">
+            <a:avLst/>
+          </a:prstGeom>
+          <a:noFill/>
+        </p:spPr>
+        <p:txBody>
+          <a:bodyPr wrap="square" anchor="t" lIns="0" rIns="0" tIns="0" bIns="0">
+            <a:spAutoFit/>
+          </a:bodyPr>
+          <a:lstStyle/>
+          <a:p>
+            <a:pPr algn="ctr"/>
+            <a:r>
+              <a:rPr sz="1000" b="0">
+                <a:solidFill>
+                  <a:srgbClr val="8A8A8A"/>
+                </a:solidFill>
+                <a:latin typeface="Hiragino Kaku Gothic Pro"/>
+                <a:ea typeface="Hiragino Kaku Gothic Pro"/>
+                <a:cs typeface="Hiragino Kaku Gothic Pro"/>
+              </a:rPr>
+              <a:t>PM編</a:t>
             </a:r>
           </a:p>
         </p:txBody>
@@ -4372,6 +10146,401 @@
             <a:avLst/>
           </a:prstGeom>
           <a:solidFill>
+            <a:srgbClr val="1E1E1E"/>
+          </a:solidFill>
+          <a:ln>
+            <a:noFill/>
+          </a:ln>
+          <a:effectLst/>
+        </p:spPr>
+        <p:style>
+          <a:lnRef idx="1">
+            <a:schemeClr val="accent1"/>
+          </a:lnRef>
+          <a:fillRef idx="3">
+            <a:schemeClr val="accent1"/>
+          </a:fillRef>
+          <a:effectRef idx="2">
+            <a:schemeClr val="accent1"/>
+          </a:effectRef>
+          <a:fontRef idx="minor">
+            <a:schemeClr val="lt1"/>
+          </a:fontRef>
+        </p:style>
+        <p:txBody>
+          <a:bodyPr rtlCol="0" anchor="ctr"/>
+          <a:lstStyle/>
+          <a:p>
+            <a:pPr algn="ctr"/>
+          </a:p>
+        </p:txBody>
+      </p:sp>
+      <p:sp>
+        <p:nvSpPr>
+          <p:cNvPr id="3" name="Rectangle 2"/>
+          <p:cNvSpPr/>
+          <p:nvPr/>
+        </p:nvSpPr>
+        <p:spPr>
+          <a:xfrm>
+            <a:off x="0" y="0"/>
+            <a:ext cx="12191695" cy="457200"/>
+          </a:xfrm>
+          <a:prstGeom prst="rect">
+            <a:avLst/>
+          </a:prstGeom>
+          <a:solidFill>
+            <a:srgbClr val="323232"/>
+          </a:solidFill>
+          <a:ln>
+            <a:noFill/>
+          </a:ln>
+          <a:effectLst/>
+        </p:spPr>
+        <p:style>
+          <a:lnRef idx="1">
+            <a:schemeClr val="accent1"/>
+          </a:lnRef>
+          <a:fillRef idx="3">
+            <a:schemeClr val="accent1"/>
+          </a:fillRef>
+          <a:effectRef idx="2">
+            <a:schemeClr val="accent1"/>
+          </a:effectRef>
+          <a:fontRef idx="minor">
+            <a:schemeClr val="lt1"/>
+          </a:fontRef>
+        </p:style>
+        <p:txBody>
+          <a:bodyPr rtlCol="0" anchor="ctr"/>
+          <a:lstStyle/>
+          <a:p>
+            <a:pPr algn="ctr"/>
+          </a:p>
+        </p:txBody>
+      </p:sp>
+      <p:sp>
+        <p:nvSpPr>
+          <p:cNvPr id="4" name="Oval 3"/>
+          <p:cNvSpPr/>
+          <p:nvPr/>
+        </p:nvSpPr>
+        <p:spPr>
+          <a:xfrm>
+            <a:off x="256032" y="155448"/>
+            <a:ext cx="155448" cy="155448"/>
+          </a:xfrm>
+          <a:prstGeom prst="ellipse">
+            <a:avLst/>
+          </a:prstGeom>
+          <a:solidFill>
+            <a:srgbClr val="FF5F56"/>
+          </a:solidFill>
+          <a:ln>
+            <a:noFill/>
+          </a:ln>
+          <a:effectLst/>
+        </p:spPr>
+        <p:style>
+          <a:lnRef idx="1">
+            <a:schemeClr val="accent1"/>
+          </a:lnRef>
+          <a:fillRef idx="3">
+            <a:schemeClr val="accent1"/>
+          </a:fillRef>
+          <a:effectRef idx="2">
+            <a:schemeClr val="accent1"/>
+          </a:effectRef>
+          <a:fontRef idx="minor">
+            <a:schemeClr val="lt1"/>
+          </a:fontRef>
+        </p:style>
+        <p:txBody>
+          <a:bodyPr rtlCol="0" anchor="ctr"/>
+          <a:lstStyle/>
+          <a:p>
+            <a:pPr algn="ctr"/>
+          </a:p>
+        </p:txBody>
+      </p:sp>
+      <p:sp>
+        <p:nvSpPr>
+          <p:cNvPr id="5" name="Oval 4"/>
+          <p:cNvSpPr/>
+          <p:nvPr/>
+        </p:nvSpPr>
+        <p:spPr>
+          <a:xfrm>
+            <a:off x="548640" y="155448"/>
+            <a:ext cx="155448" cy="155448"/>
+          </a:xfrm>
+          <a:prstGeom prst="ellipse">
+            <a:avLst/>
+          </a:prstGeom>
+          <a:solidFill>
+            <a:srgbClr val="FFBD2E"/>
+          </a:solidFill>
+          <a:ln>
+            <a:noFill/>
+          </a:ln>
+          <a:effectLst/>
+        </p:spPr>
+        <p:style>
+          <a:lnRef idx="1">
+            <a:schemeClr val="accent1"/>
+          </a:lnRef>
+          <a:fillRef idx="3">
+            <a:schemeClr val="accent1"/>
+          </a:fillRef>
+          <a:effectRef idx="2">
+            <a:schemeClr val="accent1"/>
+          </a:effectRef>
+          <a:fontRef idx="minor">
+            <a:schemeClr val="lt1"/>
+          </a:fontRef>
+        </p:style>
+        <p:txBody>
+          <a:bodyPr rtlCol="0" anchor="ctr"/>
+          <a:lstStyle/>
+          <a:p>
+            <a:pPr algn="ctr"/>
+          </a:p>
+        </p:txBody>
+      </p:sp>
+      <p:sp>
+        <p:nvSpPr>
+          <p:cNvPr id="6" name="Oval 5"/>
+          <p:cNvSpPr/>
+          <p:nvPr/>
+        </p:nvSpPr>
+        <p:spPr>
+          <a:xfrm>
+            <a:off x="841248" y="155448"/>
+            <a:ext cx="155448" cy="155448"/>
+          </a:xfrm>
+          <a:prstGeom prst="ellipse">
+            <a:avLst/>
+          </a:prstGeom>
+          <a:solidFill>
+            <a:srgbClr val="27C93F"/>
+          </a:solidFill>
+          <a:ln>
+            <a:noFill/>
+          </a:ln>
+          <a:effectLst/>
+        </p:spPr>
+        <p:style>
+          <a:lnRef idx="1">
+            <a:schemeClr val="accent1"/>
+          </a:lnRef>
+          <a:fillRef idx="3">
+            <a:schemeClr val="accent1"/>
+          </a:fillRef>
+          <a:effectRef idx="2">
+            <a:schemeClr val="accent1"/>
+          </a:effectRef>
+          <a:fontRef idx="minor">
+            <a:schemeClr val="lt1"/>
+          </a:fontRef>
+        </p:style>
+        <p:txBody>
+          <a:bodyPr rtlCol="0" anchor="ctr"/>
+          <a:lstStyle/>
+          <a:p>
+            <a:pPr algn="ctr"/>
+          </a:p>
+        </p:txBody>
+      </p:sp>
+      <p:sp>
+        <p:nvSpPr>
+          <p:cNvPr id="7" name="TextBox 6"/>
+          <p:cNvSpPr txBox="1"/>
+          <p:nvPr/>
+        </p:nvSpPr>
+        <p:spPr>
+          <a:xfrm>
+            <a:off x="1371600" y="45720"/>
+            <a:ext cx="5486400" cy="365760"/>
+          </a:xfrm>
+          <a:prstGeom prst="rect">
+            <a:avLst/>
+          </a:prstGeom>
+          <a:noFill/>
+        </p:spPr>
+        <p:txBody>
+          <a:bodyPr wrap="square" anchor="ctr" lIns="0" rIns="0" tIns="0" bIns="0">
+            <a:spAutoFit/>
+          </a:bodyPr>
+          <a:lstStyle/>
+          <a:p>
+            <a:pPr algn="l"/>
+            <a:r>
+              <a:rPr sz="1300" b="0">
+                <a:solidFill>
+                  <a:srgbClr val="8A8A8A"/>
+                </a:solidFill>
+                <a:latin typeface="Hiragino Kaku Gothic Pro"/>
+                <a:ea typeface="Hiragino Kaku Gothic Pro"/>
+                <a:cs typeface="Hiragino Kaku Gothic Pro"/>
+              </a:rPr>
+              <a:t>Obsidian — 第二の脳</a:t>
+            </a:r>
+          </a:p>
+        </p:txBody>
+      </p:sp>
+      <p:sp>
+        <p:nvSpPr>
+          <p:cNvPr id="8" name="Rounded Rectangle 7"/>
+          <p:cNvSpPr/>
+          <p:nvPr/>
+        </p:nvSpPr>
+        <p:spPr>
+          <a:xfrm>
+            <a:off x="10012680" y="73152"/>
+            <a:ext cx="1965960" cy="310896"/>
+          </a:xfrm>
+          <a:prstGeom prst="roundRect">
+            <a:avLst>
+              <a:gd name="adj" fmla="val 8000"/>
+            </a:avLst>
+          </a:prstGeom>
+          <a:solidFill>
+            <a:srgbClr val="8B7CF6"/>
+          </a:solidFill>
+          <a:ln>
+            <a:noFill/>
+          </a:ln>
+          <a:effectLst/>
+        </p:spPr>
+        <p:style>
+          <a:lnRef idx="1">
+            <a:schemeClr val="accent1"/>
+          </a:lnRef>
+          <a:fillRef idx="3">
+            <a:schemeClr val="accent1"/>
+          </a:fillRef>
+          <a:effectRef idx="2">
+            <a:schemeClr val="accent1"/>
+          </a:effectRef>
+          <a:fontRef idx="minor">
+            <a:schemeClr val="lt1"/>
+          </a:fontRef>
+        </p:style>
+        <p:txBody>
+          <a:bodyPr rtlCol="0" anchor="ctr"/>
+          <a:lstStyle/>
+          <a:p>
+            <a:pPr algn="ctr"/>
+            <a:r>
+              <a:rPr sz="1200" b="1">
+                <a:solidFill>
+                  <a:srgbClr val="FFFFFF"/>
+                </a:solidFill>
+                <a:latin typeface="Hiragino Kaku Gothic Pro"/>
+                <a:ea typeface="Hiragino Kaku Gothic Pro"/>
+                <a:cs typeface="Hiragino Kaku Gothic Pro"/>
+              </a:rPr>
+              <a:t>STEP 6 生かす</a:t>
+            </a:r>
+          </a:p>
+        </p:txBody>
+      </p:sp>
+      <p:sp>
+        <p:nvSpPr>
+          <p:cNvPr id="9" name="Rectangle 8"/>
+          <p:cNvSpPr/>
+          <p:nvPr/>
+        </p:nvSpPr>
+        <p:spPr>
+          <a:xfrm>
+            <a:off x="0" y="457200"/>
+            <a:ext cx="3108960" cy="6400800"/>
+          </a:xfrm>
+          <a:prstGeom prst="rect">
+            <a:avLst/>
+          </a:prstGeom>
+          <a:solidFill>
+            <a:srgbClr val="262626"/>
+          </a:solidFill>
+          <a:ln>
+            <a:noFill/>
+          </a:ln>
+          <a:effectLst/>
+        </p:spPr>
+        <p:style>
+          <a:lnRef idx="1">
+            <a:schemeClr val="accent1"/>
+          </a:lnRef>
+          <a:fillRef idx="3">
+            <a:schemeClr val="accent1"/>
+          </a:fillRef>
+          <a:effectRef idx="2">
+            <a:schemeClr val="accent1"/>
+          </a:effectRef>
+          <a:fontRef idx="minor">
+            <a:schemeClr val="lt1"/>
+          </a:fontRef>
+        </p:style>
+        <p:txBody>
+          <a:bodyPr rtlCol="0" anchor="ctr"/>
+          <a:lstStyle/>
+          <a:p>
+            <a:pPr algn="ctr"/>
+          </a:p>
+        </p:txBody>
+      </p:sp>
+      <p:sp>
+        <p:nvSpPr>
+          <p:cNvPr id="10" name="TextBox 9"/>
+          <p:cNvSpPr txBox="1"/>
+          <p:nvPr/>
+        </p:nvSpPr>
+        <p:spPr>
+          <a:xfrm>
+            <a:off x="274320" y="566928"/>
+            <a:ext cx="2743200" cy="274320"/>
+          </a:xfrm>
+          <a:prstGeom prst="rect">
+            <a:avLst/>
+          </a:prstGeom>
+          <a:noFill/>
+        </p:spPr>
+        <p:txBody>
+          <a:bodyPr wrap="square" anchor="t" lIns="0" rIns="0" tIns="0" bIns="0">
+            <a:spAutoFit/>
+          </a:bodyPr>
+          <a:lstStyle/>
+          <a:p>
+            <a:pPr algn="l"/>
+            <a:r>
+              <a:rPr sz="1100" b="1">
+                <a:solidFill>
+                  <a:srgbClr val="8A8A8A"/>
+                </a:solidFill>
+                <a:latin typeface="Hiragino Kaku Gothic Pro"/>
+                <a:ea typeface="Hiragino Kaku Gothic Pro"/>
+                <a:cs typeface="Hiragino Kaku Gothic Pro"/>
+              </a:rPr>
+              <a:t>VAULT ／ 第二の脳</a:t>
+            </a:r>
+          </a:p>
+        </p:txBody>
+      </p:sp>
+      <p:sp>
+        <p:nvSpPr>
+          <p:cNvPr id="11" name="Rectangle 10"/>
+          <p:cNvSpPr/>
+          <p:nvPr/>
+        </p:nvSpPr>
+        <p:spPr>
+          <a:xfrm>
+            <a:off x="0" y="457200"/>
+            <a:ext cx="12191695" cy="6400800"/>
+          </a:xfrm>
+          <a:prstGeom prst="rect">
+            <a:avLst/>
+          </a:prstGeom>
+          <a:solidFill>
             <a:srgbClr val="141414"/>
           </a:solidFill>
           <a:ln>
@@ -4403,14 +10572,14 @@
       </p:sp>
       <p:sp>
         <p:nvSpPr>
-          <p:cNvPr id="3" name="TextBox 2"/>
+          <p:cNvPr id="12" name="TextBox 11"/>
           <p:cNvSpPr txBox="1"/>
           <p:nvPr/>
         </p:nvSpPr>
         <p:spPr>
           <a:xfrm>
-            <a:off x="822960" y="640080"/>
-            <a:ext cx="10607040" cy="548640"/>
+            <a:off x="548640" y="685800"/>
+            <a:ext cx="10972800" cy="365760"/>
           </a:xfrm>
           <a:prstGeom prst="rect">
             <a:avLst/>
@@ -4418,40 +10587,36 @@
           <a:noFill/>
         </p:spPr>
         <p:txBody>
-          <a:bodyPr wrap="square">
+          <a:bodyPr wrap="square" anchor="t" lIns="0" rIns="0" tIns="0" bIns="0">
             <a:spAutoFit/>
           </a:bodyPr>
           <a:lstStyle/>
           <a:p>
-            <a:pPr algn="l">
-              <a:spcAft>
-                <a:spcPts val="800"/>
-              </a:spcAft>
-            </a:pPr>
-            <a:r>
-              <a:rPr sz="2000" b="1">
-                <a:solidFill>
-                  <a:srgbClr val="E87A3E"/>
-                </a:solidFill>
-                <a:latin typeface="Hiragino Kaku Gothic Pro"/>
-                <a:ea typeface="Hiragino Kaku Gothic Pro"/>
-                <a:cs typeface="Hiragino Kaku Gothic Pro"/>
-              </a:rPr>
-              <a:t>STEP 6 ― 生かす（上級）</a:t>
-            </a:r>
-          </a:p>
-        </p:txBody>
-      </p:sp>
-      <p:sp>
-        <p:nvSpPr>
-          <p:cNvPr id="4" name="TextBox 3"/>
+            <a:pPr algn="l"/>
+            <a:r>
+              <a:rPr sz="1200" b="0">
+                <a:solidFill>
+                  <a:srgbClr val="8A8A8A"/>
+                </a:solidFill>
+                <a:latin typeface="Menlo"/>
+                <a:ea typeface="Menlo"/>
+                <a:cs typeface="Menlo"/>
+              </a:rPr>
+              <a:t>● ● ●  claude — 第二の脳</a:t>
+            </a:r>
+          </a:p>
+        </p:txBody>
+      </p:sp>
+      <p:sp>
+        <p:nvSpPr>
+          <p:cNvPr id="13" name="TextBox 12"/>
           <p:cNvSpPr txBox="1"/>
           <p:nvPr/>
         </p:nvSpPr>
         <p:spPr>
           <a:xfrm>
-            <a:off x="822960" y="1234440"/>
-            <a:ext cx="10607040" cy="1737360"/>
+            <a:off x="640080" y="1234440"/>
+            <a:ext cx="11155680" cy="347472"/>
           </a:xfrm>
           <a:prstGeom prst="rect">
             <a:avLst/>
@@ -4459,40 +10624,36 @@
           <a:noFill/>
         </p:spPr>
         <p:txBody>
-          <a:bodyPr wrap="square">
+          <a:bodyPr wrap="square" anchor="t" lIns="0" rIns="0" tIns="0" bIns="0">
             <a:spAutoFit/>
           </a:bodyPr>
           <a:lstStyle/>
           <a:p>
-            <a:pPr algn="l">
-              <a:spcAft>
-                <a:spcPts val="800"/>
-              </a:spcAft>
-            </a:pPr>
-            <a:r>
-              <a:rPr sz="3400" b="1">
-                <a:solidFill>
-                  <a:srgbClr val="F5F3F0"/>
-                </a:solidFill>
-                <a:latin typeface="Hiragino Kaku Gothic Pro"/>
-                <a:ea typeface="Hiragino Kaku Gothic Pro"/>
-                <a:cs typeface="Hiragino Kaku Gothic Pro"/>
-              </a:rPr>
-              <a:t>AIに、一言で聞く</a:t>
-            </a:r>
-          </a:p>
-        </p:txBody>
-      </p:sp>
-      <p:sp>
-        <p:nvSpPr>
-          <p:cNvPr id="5" name="TextBox 4"/>
+            <a:pPr algn="l"/>
+            <a:r>
+              <a:rPr sz="1500" b="0">
+                <a:solidFill>
+                  <a:srgbClr val="6BD968"/>
+                </a:solidFill>
+                <a:latin typeface="Menlo"/>
+                <a:ea typeface="Menlo"/>
+                <a:cs typeface="Menlo"/>
+              </a:rPr>
+              <a:t>$ claude</a:t>
+            </a:r>
+          </a:p>
+        </p:txBody>
+      </p:sp>
+      <p:sp>
+        <p:nvSpPr>
+          <p:cNvPr id="14" name="TextBox 13"/>
           <p:cNvSpPr txBox="1"/>
           <p:nvPr/>
         </p:nvSpPr>
         <p:spPr>
           <a:xfrm>
-            <a:off x="914400" y="2880360"/>
-            <a:ext cx="10424160" cy="3566160"/>
+            <a:off x="640080" y="1691640"/>
+            <a:ext cx="11155680" cy="347472"/>
           </a:xfrm>
           <a:prstGeom prst="rect">
             <a:avLst/>
@@ -4500,76 +10661,36 @@
           <a:noFill/>
         </p:spPr>
         <p:txBody>
-          <a:bodyPr wrap="square">
+          <a:bodyPr wrap="square" anchor="t" lIns="0" rIns="0" tIns="0" bIns="0">
             <a:spAutoFit/>
           </a:bodyPr>
           <a:lstStyle/>
           <a:p>
-            <a:pPr algn="l">
-              <a:spcAft>
-                <a:spcPts val="1400"/>
-              </a:spcAft>
-            </a:pPr>
-            <a:r>
-              <a:rPr sz="2300" b="0">
-                <a:solidFill>
-                  <a:srgbClr val="F5F3F0"/>
-                </a:solidFill>
-                <a:latin typeface="Hiragino Kaku Gothic Pro"/>
-                <a:ea typeface="Hiragino Kaku Gothic Pro"/>
-                <a:cs typeface="Hiragino Kaku Gothic Pro"/>
-              </a:rPr>
-              <a:t>・Claude Code で Vault を開く</a:t>
-            </a:r>
-          </a:p>
-          <a:p>
-            <a:pPr algn="l">
-              <a:spcAft>
-                <a:spcPts val="1400"/>
-              </a:spcAft>
-            </a:pPr>
-            <a:r>
-              <a:rPr sz="2300" b="0">
-                <a:solidFill>
-                  <a:srgbClr val="F5F3F0"/>
-                </a:solidFill>
-                <a:latin typeface="Hiragino Kaku Gothic Pro"/>
-                <a:ea typeface="Hiragino Kaku Gothic Pro"/>
-                <a:cs typeface="Hiragino Kaku Gothic Pro"/>
-              </a:rPr>
-              <a:t>・/ask-vault 今週の要点は？ と聞く</a:t>
-            </a:r>
-          </a:p>
-          <a:p>
-            <a:pPr algn="l">
-              <a:spcAft>
-                <a:spcPts val="1400"/>
-              </a:spcAft>
-            </a:pPr>
-            <a:r>
-              <a:rPr sz="2300" b="0">
-                <a:solidFill>
-                  <a:srgbClr val="F5F3F0"/>
-                </a:solidFill>
-                <a:latin typeface="Hiragino Kaku Gothic Pro"/>
-                <a:ea typeface="Hiragino Kaku Gothic Pro"/>
-                <a:cs typeface="Hiragino Kaku Gothic Pro"/>
-              </a:rPr>
-              <a:t>・Vault全体を横断して、まとめて答えてくれる</a:t>
-            </a:r>
-          </a:p>
-        </p:txBody>
-      </p:sp>
-      <p:sp>
-        <p:nvSpPr>
-          <p:cNvPr id="6" name="TextBox 5"/>
+            <a:pPr algn="l"/>
+            <a:r>
+              <a:rPr sz="1500" b="0">
+                <a:solidFill>
+                  <a:srgbClr val="DCDDDE"/>
+                </a:solidFill>
+                <a:latin typeface="Menlo"/>
+                <a:ea typeface="Menlo"/>
+                <a:cs typeface="Menlo"/>
+              </a:rPr>
+              <a:t>&gt; /ask-vault 今週の要点は？</a:t>
+            </a:r>
+          </a:p>
+        </p:txBody>
+      </p:sp>
+      <p:sp>
+        <p:nvSpPr>
+          <p:cNvPr id="15" name="TextBox 14"/>
           <p:cNvSpPr txBox="1"/>
           <p:nvPr/>
         </p:nvSpPr>
         <p:spPr>
           <a:xfrm>
-            <a:off x="914400" y="6263640"/>
-            <a:ext cx="10424160" cy="457200"/>
+            <a:off x="640080" y="2148840"/>
+            <a:ext cx="11155680" cy="347472"/>
           </a:xfrm>
           <a:prstGeom prst="rect">
             <a:avLst/>
@@ -4577,26 +10698,244 @@
           <a:noFill/>
         </p:spPr>
         <p:txBody>
-          <a:bodyPr wrap="square">
+          <a:bodyPr wrap="square" anchor="t" lIns="0" rIns="0" tIns="0" bIns="0">
             <a:spAutoFit/>
           </a:bodyPr>
           <a:lstStyle/>
           <a:p>
-            <a:pPr algn="l">
-              <a:spcAft>
-                <a:spcPts val="800"/>
-              </a:spcAft>
-            </a:pPr>
-            <a:r>
-              <a:rPr sz="1700" b="0">
-                <a:solidFill>
-                  <a:srgbClr val="9A948C"/>
-                </a:solidFill>
-                <a:latin typeface="Hiragino Kaku Gothic Pro"/>
-                <a:ea typeface="Hiragino Kaku Gothic Pro"/>
-                <a:cs typeface="Hiragino Kaku Gothic Pro"/>
-              </a:rPr>
-              <a:t>機微情報が映る場合は、安全な問い合わせに差し替えてください</a:t>
+            <a:pPr algn="l"/>
+            <a:r>
+              <a:rPr sz="1500" b="0">
+                <a:solidFill>
+                  <a:srgbClr val="DCDDDE"/>
+                </a:solidFill>
+                <a:latin typeface="Menlo"/>
+                <a:ea typeface="Menlo"/>
+                <a:cs typeface="Menlo"/>
+              </a:rPr>
+              <a:t/>
+            </a:r>
+          </a:p>
+        </p:txBody>
+      </p:sp>
+      <p:sp>
+        <p:nvSpPr>
+          <p:cNvPr id="16" name="TextBox 15"/>
+          <p:cNvSpPr txBox="1"/>
+          <p:nvPr/>
+        </p:nvSpPr>
+        <p:spPr>
+          <a:xfrm>
+            <a:off x="640080" y="2606040"/>
+            <a:ext cx="11155680" cy="347472"/>
+          </a:xfrm>
+          <a:prstGeom prst="rect">
+            <a:avLst/>
+          </a:prstGeom>
+          <a:noFill/>
+        </p:spPr>
+        <p:txBody>
+          <a:bodyPr wrap="square" anchor="t" lIns="0" rIns="0" tIns="0" bIns="0">
+            <a:spAutoFit/>
+          </a:bodyPr>
+          <a:lstStyle/>
+          <a:p>
+            <a:pPr algn="l"/>
+            <a:r>
+              <a:rPr sz="1500" b="0">
+                <a:solidFill>
+                  <a:srgbClr val="8A8A8A"/>
+                </a:solidFill>
+                <a:latin typeface="Menlo"/>
+                <a:ea typeface="Menlo"/>
+                <a:cs typeface="Menlo"/>
+              </a:rPr>
+              <a:t>Vault を横断して回答します：</a:t>
+            </a:r>
+          </a:p>
+        </p:txBody>
+      </p:sp>
+      <p:sp>
+        <p:nvSpPr>
+          <p:cNvPr id="17" name="TextBox 16"/>
+          <p:cNvSpPr txBox="1"/>
+          <p:nvPr/>
+        </p:nvSpPr>
+        <p:spPr>
+          <a:xfrm>
+            <a:off x="640080" y="3063240"/>
+            <a:ext cx="11155680" cy="347472"/>
+          </a:xfrm>
+          <a:prstGeom prst="rect">
+            <a:avLst/>
+          </a:prstGeom>
+          <a:noFill/>
+        </p:spPr>
+        <p:txBody>
+          <a:bodyPr wrap="square" anchor="t" lIns="0" rIns="0" tIns="0" bIns="0">
+            <a:spAutoFit/>
+          </a:bodyPr>
+          <a:lstStyle/>
+          <a:p>
+            <a:pPr algn="l"/>
+            <a:r>
+              <a:rPr sz="1500" b="0">
+                <a:solidFill>
+                  <a:srgbClr val="DCDDDE"/>
+                </a:solidFill>
+                <a:latin typeface="Menlo"/>
+                <a:ea typeface="Menlo"/>
+                <a:cs typeface="Menlo"/>
+              </a:rPr>
+              <a:t>  1. ある案件：中間納品は未確定事項一覧を添えて完了</a:t>
+            </a:r>
+          </a:p>
+        </p:txBody>
+      </p:sp>
+      <p:sp>
+        <p:nvSpPr>
+          <p:cNvPr id="18" name="TextBox 17"/>
+          <p:cNvSpPr txBox="1"/>
+          <p:nvPr/>
+        </p:nvSpPr>
+        <p:spPr>
+          <a:xfrm>
+            <a:off x="640080" y="3520440"/>
+            <a:ext cx="11155680" cy="347472"/>
+          </a:xfrm>
+          <a:prstGeom prst="rect">
+            <a:avLst/>
+          </a:prstGeom>
+          <a:noFill/>
+        </p:spPr>
+        <p:txBody>
+          <a:bodyPr wrap="square" anchor="t" lIns="0" rIns="0" tIns="0" bIns="0">
+            <a:spAutoFit/>
+          </a:bodyPr>
+          <a:lstStyle/>
+          <a:p>
+            <a:pPr algn="l"/>
+            <a:r>
+              <a:rPr sz="1500" b="0">
+                <a:solidFill>
+                  <a:srgbClr val="DCDDDE"/>
+                </a:solidFill>
+                <a:latin typeface="Menlo"/>
+                <a:ea typeface="Menlo"/>
+                <a:cs typeface="Menlo"/>
+              </a:rPr>
+              <a:t>  2. 確認事項は「型」で出す運用に統一（PM編ノート）</a:t>
+            </a:r>
+          </a:p>
+        </p:txBody>
+      </p:sp>
+      <p:sp>
+        <p:nvSpPr>
+          <p:cNvPr id="19" name="TextBox 18"/>
+          <p:cNvSpPr txBox="1"/>
+          <p:nvPr/>
+        </p:nvSpPr>
+        <p:spPr>
+          <a:xfrm>
+            <a:off x="640080" y="3977639"/>
+            <a:ext cx="11155680" cy="347472"/>
+          </a:xfrm>
+          <a:prstGeom prst="rect">
+            <a:avLst/>
+          </a:prstGeom>
+          <a:noFill/>
+        </p:spPr>
+        <p:txBody>
+          <a:bodyPr wrap="square" anchor="t" lIns="0" rIns="0" tIns="0" bIns="0">
+            <a:spAutoFit/>
+          </a:bodyPr>
+          <a:lstStyle/>
+          <a:p>
+            <a:pPr algn="l"/>
+            <a:r>
+              <a:rPr sz="1500" b="0">
+                <a:solidFill>
+                  <a:srgbClr val="DCDDDE"/>
+                </a:solidFill>
+                <a:latin typeface="Menlo"/>
+                <a:ea typeface="Menlo"/>
+                <a:cs typeface="Menlo"/>
+              </a:rPr>
+              <a:t>  3. 来週の論点：認証ロック要件を決裁定例で頭出し</a:t>
+            </a:r>
+          </a:p>
+        </p:txBody>
+      </p:sp>
+      <p:sp>
+        <p:nvSpPr>
+          <p:cNvPr id="20" name="TextBox 19"/>
+          <p:cNvSpPr txBox="1"/>
+          <p:nvPr/>
+        </p:nvSpPr>
+        <p:spPr>
+          <a:xfrm>
+            <a:off x="640080" y="4434840"/>
+            <a:ext cx="11155680" cy="347472"/>
+          </a:xfrm>
+          <a:prstGeom prst="rect">
+            <a:avLst/>
+          </a:prstGeom>
+          <a:noFill/>
+        </p:spPr>
+        <p:txBody>
+          <a:bodyPr wrap="square" anchor="t" lIns="0" rIns="0" tIns="0" bIns="0">
+            <a:spAutoFit/>
+          </a:bodyPr>
+          <a:lstStyle/>
+          <a:p>
+            <a:pPr algn="l"/>
+            <a:r>
+              <a:rPr sz="1500" b="0">
+                <a:solidFill>
+                  <a:srgbClr val="DCDDDE"/>
+                </a:solidFill>
+                <a:latin typeface="Menlo"/>
+                <a:ea typeface="Menlo"/>
+                <a:cs typeface="Menlo"/>
+              </a:rPr>
+              <a:t/>
+            </a:r>
+          </a:p>
+        </p:txBody>
+      </p:sp>
+      <p:sp>
+        <p:nvSpPr>
+          <p:cNvPr id="21" name="TextBox 20"/>
+          <p:cNvSpPr txBox="1"/>
+          <p:nvPr/>
+        </p:nvSpPr>
+        <p:spPr>
+          <a:xfrm>
+            <a:off x="640080" y="4892040"/>
+            <a:ext cx="11155680" cy="347472"/>
+          </a:xfrm>
+          <a:prstGeom prst="rect">
+            <a:avLst/>
+          </a:prstGeom>
+          <a:noFill/>
+        </p:spPr>
+        <p:txBody>
+          <a:bodyPr wrap="square" anchor="t" lIns="0" rIns="0" tIns="0" bIns="0">
+            <a:spAutoFit/>
+          </a:bodyPr>
+          <a:lstStyle/>
+          <a:p>
+            <a:pPr algn="l"/>
+            <a:r>
+              <a:rPr sz="1500" b="0">
+                <a:solidFill>
+                  <a:srgbClr val="A58CFF"/>
+                </a:solidFill>
+                <a:latin typeface="Menlo"/>
+                <a:ea typeface="Menlo"/>
+                <a:cs typeface="Menlo"/>
+              </a:rPr>
+              <a:t>→ 関連ノート: [[確認は型で出す]] [[決定事項シート]]</a:t>
             </a:r>
           </a:p>
         </p:txBody>
@@ -4634,7 +10973,7 @@
             <a:avLst/>
           </a:prstGeom>
           <a:solidFill>
-            <a:srgbClr val="141414"/>
+            <a:srgbClr val="1E1E1E"/>
           </a:solidFill>
           <a:ln>
             <a:noFill/>
@@ -4665,14 +11004,190 @@
       </p:sp>
       <p:sp>
         <p:nvSpPr>
-          <p:cNvPr id="3" name="TextBox 2"/>
+          <p:cNvPr id="3" name="Rectangle 2"/>
+          <p:cNvSpPr/>
+          <p:nvPr/>
+        </p:nvSpPr>
+        <p:spPr>
+          <a:xfrm>
+            <a:off x="0" y="0"/>
+            <a:ext cx="12191695" cy="457200"/>
+          </a:xfrm>
+          <a:prstGeom prst="rect">
+            <a:avLst/>
+          </a:prstGeom>
+          <a:solidFill>
+            <a:srgbClr val="323232"/>
+          </a:solidFill>
+          <a:ln>
+            <a:noFill/>
+          </a:ln>
+          <a:effectLst/>
+        </p:spPr>
+        <p:style>
+          <a:lnRef idx="1">
+            <a:schemeClr val="accent1"/>
+          </a:lnRef>
+          <a:fillRef idx="3">
+            <a:schemeClr val="accent1"/>
+          </a:fillRef>
+          <a:effectRef idx="2">
+            <a:schemeClr val="accent1"/>
+          </a:effectRef>
+          <a:fontRef idx="minor">
+            <a:schemeClr val="lt1"/>
+          </a:fontRef>
+        </p:style>
+        <p:txBody>
+          <a:bodyPr rtlCol="0" anchor="ctr"/>
+          <a:lstStyle/>
+          <a:p>
+            <a:pPr algn="ctr"/>
+          </a:p>
+        </p:txBody>
+      </p:sp>
+      <p:sp>
+        <p:nvSpPr>
+          <p:cNvPr id="4" name="Oval 3"/>
+          <p:cNvSpPr/>
+          <p:nvPr/>
+        </p:nvSpPr>
+        <p:spPr>
+          <a:xfrm>
+            <a:off x="256032" y="155448"/>
+            <a:ext cx="155448" cy="155448"/>
+          </a:xfrm>
+          <a:prstGeom prst="ellipse">
+            <a:avLst/>
+          </a:prstGeom>
+          <a:solidFill>
+            <a:srgbClr val="FF5F56"/>
+          </a:solidFill>
+          <a:ln>
+            <a:noFill/>
+          </a:ln>
+          <a:effectLst/>
+        </p:spPr>
+        <p:style>
+          <a:lnRef idx="1">
+            <a:schemeClr val="accent1"/>
+          </a:lnRef>
+          <a:fillRef idx="3">
+            <a:schemeClr val="accent1"/>
+          </a:fillRef>
+          <a:effectRef idx="2">
+            <a:schemeClr val="accent1"/>
+          </a:effectRef>
+          <a:fontRef idx="minor">
+            <a:schemeClr val="lt1"/>
+          </a:fontRef>
+        </p:style>
+        <p:txBody>
+          <a:bodyPr rtlCol="0" anchor="ctr"/>
+          <a:lstStyle/>
+          <a:p>
+            <a:pPr algn="ctr"/>
+          </a:p>
+        </p:txBody>
+      </p:sp>
+      <p:sp>
+        <p:nvSpPr>
+          <p:cNvPr id="5" name="Oval 4"/>
+          <p:cNvSpPr/>
+          <p:nvPr/>
+        </p:nvSpPr>
+        <p:spPr>
+          <a:xfrm>
+            <a:off x="548640" y="155448"/>
+            <a:ext cx="155448" cy="155448"/>
+          </a:xfrm>
+          <a:prstGeom prst="ellipse">
+            <a:avLst/>
+          </a:prstGeom>
+          <a:solidFill>
+            <a:srgbClr val="FFBD2E"/>
+          </a:solidFill>
+          <a:ln>
+            <a:noFill/>
+          </a:ln>
+          <a:effectLst/>
+        </p:spPr>
+        <p:style>
+          <a:lnRef idx="1">
+            <a:schemeClr val="accent1"/>
+          </a:lnRef>
+          <a:fillRef idx="3">
+            <a:schemeClr val="accent1"/>
+          </a:fillRef>
+          <a:effectRef idx="2">
+            <a:schemeClr val="accent1"/>
+          </a:effectRef>
+          <a:fontRef idx="minor">
+            <a:schemeClr val="lt1"/>
+          </a:fontRef>
+        </p:style>
+        <p:txBody>
+          <a:bodyPr rtlCol="0" anchor="ctr"/>
+          <a:lstStyle/>
+          <a:p>
+            <a:pPr algn="ctr"/>
+          </a:p>
+        </p:txBody>
+      </p:sp>
+      <p:sp>
+        <p:nvSpPr>
+          <p:cNvPr id="6" name="Oval 5"/>
+          <p:cNvSpPr/>
+          <p:nvPr/>
+        </p:nvSpPr>
+        <p:spPr>
+          <a:xfrm>
+            <a:off x="841248" y="155448"/>
+            <a:ext cx="155448" cy="155448"/>
+          </a:xfrm>
+          <a:prstGeom prst="ellipse">
+            <a:avLst/>
+          </a:prstGeom>
+          <a:solidFill>
+            <a:srgbClr val="27C93F"/>
+          </a:solidFill>
+          <a:ln>
+            <a:noFill/>
+          </a:ln>
+          <a:effectLst/>
+        </p:spPr>
+        <p:style>
+          <a:lnRef idx="1">
+            <a:schemeClr val="accent1"/>
+          </a:lnRef>
+          <a:fillRef idx="3">
+            <a:schemeClr val="accent1"/>
+          </a:fillRef>
+          <a:effectRef idx="2">
+            <a:schemeClr val="accent1"/>
+          </a:effectRef>
+          <a:fontRef idx="minor">
+            <a:schemeClr val="lt1"/>
+          </a:fontRef>
+        </p:style>
+        <p:txBody>
+          <a:bodyPr rtlCol="0" anchor="ctr"/>
+          <a:lstStyle/>
+          <a:p>
+            <a:pPr algn="ctr"/>
+          </a:p>
+        </p:txBody>
+      </p:sp>
+      <p:sp>
+        <p:nvSpPr>
+          <p:cNvPr id="7" name="TextBox 6"/>
           <p:cNvSpPr txBox="1"/>
           <p:nvPr/>
         </p:nvSpPr>
         <p:spPr>
           <a:xfrm>
-            <a:off x="822960" y="640080"/>
-            <a:ext cx="10607040" cy="548640"/>
+            <a:off x="1371600" y="45720"/>
+            <a:ext cx="5486400" cy="365760"/>
           </a:xfrm>
           <a:prstGeom prst="rect">
             <a:avLst/>
@@ -4680,40 +11195,80 @@
           <a:noFill/>
         </p:spPr>
         <p:txBody>
-          <a:bodyPr wrap="square">
+          <a:bodyPr wrap="square" anchor="ctr" lIns="0" rIns="0" tIns="0" bIns="0">
             <a:spAutoFit/>
           </a:bodyPr>
           <a:lstStyle/>
           <a:p>
-            <a:pPr algn="l">
-              <a:spcAft>
-                <a:spcPts val="800"/>
-              </a:spcAft>
-            </a:pPr>
-            <a:r>
-              <a:rPr sz="2000" b="1">
-                <a:solidFill>
-                  <a:srgbClr val="E87A3E"/>
-                </a:solidFill>
-                <a:latin typeface="Hiragino Kaku Gothic Pro"/>
-                <a:ea typeface="Hiragino Kaku Gothic Pro"/>
-                <a:cs typeface="Hiragino Kaku Gothic Pro"/>
-              </a:rPr>
-              <a:t>まとめ</a:t>
-            </a:r>
-          </a:p>
-        </p:txBody>
-      </p:sp>
-      <p:sp>
-        <p:nvSpPr>
-          <p:cNvPr id="4" name="TextBox 3"/>
+            <a:pPr algn="l"/>
+            <a:r>
+              <a:rPr sz="1300" b="0">
+                <a:solidFill>
+                  <a:srgbClr val="8A8A8A"/>
+                </a:solidFill>
+                <a:latin typeface="Hiragino Kaku Gothic Pro"/>
+                <a:ea typeface="Hiragino Kaku Gothic Pro"/>
+                <a:cs typeface="Hiragino Kaku Gothic Pro"/>
+              </a:rPr>
+              <a:t>Obsidian — 第二の脳</a:t>
+            </a:r>
+          </a:p>
+        </p:txBody>
+      </p:sp>
+      <p:sp>
+        <p:nvSpPr>
+          <p:cNvPr id="8" name="Rectangle 7"/>
+          <p:cNvSpPr/>
+          <p:nvPr/>
+        </p:nvSpPr>
+        <p:spPr>
+          <a:xfrm>
+            <a:off x="0" y="457200"/>
+            <a:ext cx="3108960" cy="6400800"/>
+          </a:xfrm>
+          <a:prstGeom prst="rect">
+            <a:avLst/>
+          </a:prstGeom>
+          <a:solidFill>
+            <a:srgbClr val="262626"/>
+          </a:solidFill>
+          <a:ln>
+            <a:noFill/>
+          </a:ln>
+          <a:effectLst/>
+        </p:spPr>
+        <p:style>
+          <a:lnRef idx="1">
+            <a:schemeClr val="accent1"/>
+          </a:lnRef>
+          <a:fillRef idx="3">
+            <a:schemeClr val="accent1"/>
+          </a:fillRef>
+          <a:effectRef idx="2">
+            <a:schemeClr val="accent1"/>
+          </a:effectRef>
+          <a:fontRef idx="minor">
+            <a:schemeClr val="lt1"/>
+          </a:fontRef>
+        </p:style>
+        <p:txBody>
+          <a:bodyPr rtlCol="0" anchor="ctr"/>
+          <a:lstStyle/>
+          <a:p>
+            <a:pPr algn="ctr"/>
+          </a:p>
+        </p:txBody>
+      </p:sp>
+      <p:sp>
+        <p:nvSpPr>
+          <p:cNvPr id="9" name="TextBox 8"/>
           <p:cNvSpPr txBox="1"/>
           <p:nvPr/>
         </p:nvSpPr>
         <p:spPr>
           <a:xfrm>
-            <a:off x="822960" y="1234440"/>
-            <a:ext cx="10607040" cy="1737360"/>
+            <a:off x="274320" y="566928"/>
+            <a:ext cx="2743200" cy="274320"/>
           </a:xfrm>
           <a:prstGeom prst="rect">
             <a:avLst/>
@@ -4721,40 +11276,36 @@
           <a:noFill/>
         </p:spPr>
         <p:txBody>
-          <a:bodyPr wrap="square">
+          <a:bodyPr wrap="square" anchor="t" lIns="0" rIns="0" tIns="0" bIns="0">
             <a:spAutoFit/>
           </a:bodyPr>
           <a:lstStyle/>
           <a:p>
-            <a:pPr algn="l">
-              <a:spcAft>
-                <a:spcPts val="800"/>
-              </a:spcAft>
-            </a:pPr>
-            <a:r>
-              <a:rPr sz="3400" b="1">
-                <a:solidFill>
-                  <a:srgbClr val="F5F3F0"/>
-                </a:solidFill>
-                <a:latin typeface="Hiragino Kaku Gothic Pro"/>
-                <a:ea typeface="Hiragino Kaku Gothic Pro"/>
-                <a:cs typeface="Hiragino Kaku Gothic Pro"/>
-              </a:rPr>
-              <a:t>貯めて、つなげて、引き出す</a:t>
-            </a:r>
-          </a:p>
-        </p:txBody>
-      </p:sp>
-      <p:sp>
-        <p:nvSpPr>
-          <p:cNvPr id="5" name="TextBox 4"/>
+            <a:pPr algn="l"/>
+            <a:r>
+              <a:rPr sz="1100" b="1">
+                <a:solidFill>
+                  <a:srgbClr val="8A8A8A"/>
+                </a:solidFill>
+                <a:latin typeface="Hiragino Kaku Gothic Pro"/>
+                <a:ea typeface="Hiragino Kaku Gothic Pro"/>
+                <a:cs typeface="Hiragino Kaku Gothic Pro"/>
+              </a:rPr>
+              <a:t>VAULT ／ 第二の脳</a:t>
+            </a:r>
+          </a:p>
+        </p:txBody>
+      </p:sp>
+      <p:sp>
+        <p:nvSpPr>
+          <p:cNvPr id="10" name="TextBox 9"/>
           <p:cNvSpPr txBox="1"/>
           <p:nvPr/>
         </p:nvSpPr>
         <p:spPr>
           <a:xfrm>
-            <a:off x="914400" y="2880360"/>
-            <a:ext cx="10424160" cy="3566160"/>
+            <a:off x="384048" y="987552"/>
+            <a:ext cx="2651760" cy="365760"/>
           </a:xfrm>
           <a:prstGeom prst="rect">
             <a:avLst/>
@@ -4762,62 +11313,626 @@
           <a:noFill/>
         </p:spPr>
         <p:txBody>
-          <a:bodyPr wrap="square">
+          <a:bodyPr wrap="square" anchor="ctr" lIns="0" rIns="0" tIns="0" bIns="0">
             <a:spAutoFit/>
           </a:bodyPr>
           <a:lstStyle/>
           <a:p>
-            <a:pPr algn="l">
-              <a:spcAft>
-                <a:spcPts val="1400"/>
-              </a:spcAft>
-            </a:pPr>
-            <a:r>
-              <a:rPr sz="2300" b="0">
-                <a:solidFill>
-                  <a:srgbClr val="F5F3F0"/>
-                </a:solidFill>
-                <a:latin typeface="Hiragino Kaku Gothic Pro"/>
-                <a:ea typeface="Hiragino Kaku Gothic Pro"/>
-                <a:cs typeface="Hiragino Kaku Gothic Pro"/>
-              </a:rPr>
-              <a:t>・手で貯める（Inbox）→ つなげる（Permanent・リンク）</a:t>
-            </a:r>
-          </a:p>
-          <a:p>
-            <a:pPr algn="l">
-              <a:spcAft>
-                <a:spcPts val="1400"/>
-              </a:spcAft>
-            </a:pPr>
-            <a:r>
-              <a:rPr sz="2300" b="0">
-                <a:solidFill>
-                  <a:srgbClr val="F5F3F0"/>
-                </a:solidFill>
-                <a:latin typeface="Hiragino Kaku Gothic Pro"/>
-                <a:ea typeface="Hiragino Kaku Gothic Pro"/>
-                <a:cs typeface="Hiragino Kaku Gothic Pro"/>
-              </a:rPr>
-              <a:t>・AIで引き出す（横断検索・分析）</a:t>
-            </a:r>
-          </a:p>
-          <a:p>
-            <a:pPr algn="l">
-              <a:spcAft>
-                <a:spcPts val="1400"/>
-              </a:spcAft>
-            </a:pPr>
-            <a:r>
-              <a:rPr sz="2300" b="0">
-                <a:solidFill>
-                  <a:srgbClr val="F5F3F0"/>
-                </a:solidFill>
-                <a:latin typeface="Hiragino Kaku Gothic Pro"/>
-                <a:ea typeface="Hiragino Kaku Gothic Pro"/>
-                <a:cs typeface="Hiragino Kaku Gothic Pro"/>
-              </a:rPr>
-              <a:t>・これが、第二の脳の1日。今日から、あなたも</a:t>
+            <a:pPr algn="l"/>
+            <a:r>
+              <a:rPr sz="1300" b="0">
+                <a:solidFill>
+                  <a:srgbClr val="8A8A8A"/>
+                </a:solidFill>
+                <a:latin typeface="Hiragino Kaku Gothic Pro"/>
+                <a:ea typeface="Hiragino Kaku Gothic Pro"/>
+                <a:cs typeface="Hiragino Kaku Gothic Pro"/>
+              </a:rPr>
+              <a:t/>
+            </a:r>
+            <a:r>
+              <a:rPr sz="1300" b="0">
+                <a:solidFill>
+                  <a:srgbClr val="8A8A8A"/>
+                </a:solidFill>
+                <a:latin typeface="Hiragino Kaku Gothic Pro"/>
+                <a:ea typeface="Hiragino Kaku Gothic Pro"/>
+                <a:cs typeface="Hiragino Kaku Gothic Pro"/>
+              </a:rPr>
+              <a:t>00_Inbox</a:t>
+            </a:r>
+          </a:p>
+        </p:txBody>
+      </p:sp>
+      <p:sp>
+        <p:nvSpPr>
+          <p:cNvPr id="11" name="TextBox 10"/>
+          <p:cNvSpPr txBox="1"/>
+          <p:nvPr/>
+        </p:nvSpPr>
+        <p:spPr>
+          <a:xfrm>
+            <a:off x="384048" y="1444752"/>
+            <a:ext cx="2651760" cy="365760"/>
+          </a:xfrm>
+          <a:prstGeom prst="rect">
+            <a:avLst/>
+          </a:prstGeom>
+          <a:noFill/>
+        </p:spPr>
+        <p:txBody>
+          <a:bodyPr wrap="square" anchor="ctr" lIns="0" rIns="0" tIns="0" bIns="0">
+            <a:spAutoFit/>
+          </a:bodyPr>
+          <a:lstStyle/>
+          <a:p>
+            <a:pPr algn="l"/>
+            <a:r>
+              <a:rPr sz="1300" b="0">
+                <a:solidFill>
+                  <a:srgbClr val="8A8A8A"/>
+                </a:solidFill>
+                <a:latin typeface="Hiragino Kaku Gothic Pro"/>
+                <a:ea typeface="Hiragino Kaku Gothic Pro"/>
+                <a:cs typeface="Hiragino Kaku Gothic Pro"/>
+              </a:rPr>
+              <a:t/>
+            </a:r>
+            <a:r>
+              <a:rPr sz="1300" b="0">
+                <a:solidFill>
+                  <a:srgbClr val="8A8A8A"/>
+                </a:solidFill>
+                <a:latin typeface="Hiragino Kaku Gothic Pro"/>
+                <a:ea typeface="Hiragino Kaku Gothic Pro"/>
+                <a:cs typeface="Hiragino Kaku Gothic Pro"/>
+              </a:rPr>
+              <a:t>10_Daily</a:t>
+            </a:r>
+          </a:p>
+        </p:txBody>
+      </p:sp>
+      <p:sp>
+        <p:nvSpPr>
+          <p:cNvPr id="12" name="TextBox 11"/>
+          <p:cNvSpPr txBox="1"/>
+          <p:nvPr/>
+        </p:nvSpPr>
+        <p:spPr>
+          <a:xfrm>
+            <a:off x="384048" y="1901952"/>
+            <a:ext cx="2651760" cy="365760"/>
+          </a:xfrm>
+          <a:prstGeom prst="rect">
+            <a:avLst/>
+          </a:prstGeom>
+          <a:noFill/>
+        </p:spPr>
+        <p:txBody>
+          <a:bodyPr wrap="square" anchor="ctr" lIns="0" rIns="0" tIns="0" bIns="0">
+            <a:spAutoFit/>
+          </a:bodyPr>
+          <a:lstStyle/>
+          <a:p>
+            <a:pPr algn="l"/>
+            <a:r>
+              <a:rPr sz="1300" b="0">
+                <a:solidFill>
+                  <a:srgbClr val="8A8A8A"/>
+                </a:solidFill>
+                <a:latin typeface="Hiragino Kaku Gothic Pro"/>
+                <a:ea typeface="Hiragino Kaku Gothic Pro"/>
+                <a:cs typeface="Hiragino Kaku Gothic Pro"/>
+              </a:rPr>
+              <a:t/>
+            </a:r>
+            <a:r>
+              <a:rPr sz="1300" b="0">
+                <a:solidFill>
+                  <a:srgbClr val="8A8A8A"/>
+                </a:solidFill>
+                <a:latin typeface="Hiragino Kaku Gothic Pro"/>
+                <a:ea typeface="Hiragino Kaku Gothic Pro"/>
+                <a:cs typeface="Hiragino Kaku Gothic Pro"/>
+              </a:rPr>
+              <a:t>20_Projects</a:t>
+            </a:r>
+          </a:p>
+        </p:txBody>
+      </p:sp>
+      <p:sp>
+        <p:nvSpPr>
+          <p:cNvPr id="13" name="TextBox 12"/>
+          <p:cNvSpPr txBox="1"/>
+          <p:nvPr/>
+        </p:nvSpPr>
+        <p:spPr>
+          <a:xfrm>
+            <a:off x="384048" y="2359152"/>
+            <a:ext cx="2651760" cy="365760"/>
+          </a:xfrm>
+          <a:prstGeom prst="rect">
+            <a:avLst/>
+          </a:prstGeom>
+          <a:noFill/>
+        </p:spPr>
+        <p:txBody>
+          <a:bodyPr wrap="square" anchor="ctr" lIns="0" rIns="0" tIns="0" bIns="0">
+            <a:spAutoFit/>
+          </a:bodyPr>
+          <a:lstStyle/>
+          <a:p>
+            <a:pPr algn="l"/>
+            <a:r>
+              <a:rPr sz="1300" b="0">
+                <a:solidFill>
+                  <a:srgbClr val="8A8A8A"/>
+                </a:solidFill>
+                <a:latin typeface="Hiragino Kaku Gothic Pro"/>
+                <a:ea typeface="Hiragino Kaku Gothic Pro"/>
+                <a:cs typeface="Hiragino Kaku Gothic Pro"/>
+              </a:rPr>
+              <a:t/>
+            </a:r>
+            <a:r>
+              <a:rPr sz="1300" b="0">
+                <a:solidFill>
+                  <a:srgbClr val="8A8A8A"/>
+                </a:solidFill>
+                <a:latin typeface="Hiragino Kaku Gothic Pro"/>
+                <a:ea typeface="Hiragino Kaku Gothic Pro"/>
+                <a:cs typeface="Hiragino Kaku Gothic Pro"/>
+              </a:rPr>
+              <a:t>30_Areas</a:t>
+            </a:r>
+          </a:p>
+        </p:txBody>
+      </p:sp>
+      <p:sp>
+        <p:nvSpPr>
+          <p:cNvPr id="14" name="TextBox 13"/>
+          <p:cNvSpPr txBox="1"/>
+          <p:nvPr/>
+        </p:nvSpPr>
+        <p:spPr>
+          <a:xfrm>
+            <a:off x="384048" y="2816352"/>
+            <a:ext cx="2651760" cy="365760"/>
+          </a:xfrm>
+          <a:prstGeom prst="rect">
+            <a:avLst/>
+          </a:prstGeom>
+          <a:noFill/>
+        </p:spPr>
+        <p:txBody>
+          <a:bodyPr wrap="square" anchor="ctr" lIns="0" rIns="0" tIns="0" bIns="0">
+            <a:spAutoFit/>
+          </a:bodyPr>
+          <a:lstStyle/>
+          <a:p>
+            <a:pPr algn="l"/>
+            <a:r>
+              <a:rPr sz="1300" b="0">
+                <a:solidFill>
+                  <a:srgbClr val="8A8A8A"/>
+                </a:solidFill>
+                <a:latin typeface="Hiragino Kaku Gothic Pro"/>
+                <a:ea typeface="Hiragino Kaku Gothic Pro"/>
+                <a:cs typeface="Hiragino Kaku Gothic Pro"/>
+              </a:rPr>
+              <a:t/>
+            </a:r>
+            <a:r>
+              <a:rPr sz="1300" b="0">
+                <a:solidFill>
+                  <a:srgbClr val="8A8A8A"/>
+                </a:solidFill>
+                <a:latin typeface="Hiragino Kaku Gothic Pro"/>
+                <a:ea typeface="Hiragino Kaku Gothic Pro"/>
+                <a:cs typeface="Hiragino Kaku Gothic Pro"/>
+              </a:rPr>
+              <a:t>40_Resources</a:t>
+            </a:r>
+          </a:p>
+        </p:txBody>
+      </p:sp>
+      <p:sp>
+        <p:nvSpPr>
+          <p:cNvPr id="15" name="TextBox 14"/>
+          <p:cNvSpPr txBox="1"/>
+          <p:nvPr/>
+        </p:nvSpPr>
+        <p:spPr>
+          <a:xfrm>
+            <a:off x="384048" y="3273552"/>
+            <a:ext cx="2651760" cy="365760"/>
+          </a:xfrm>
+          <a:prstGeom prst="rect">
+            <a:avLst/>
+          </a:prstGeom>
+          <a:noFill/>
+        </p:spPr>
+        <p:txBody>
+          <a:bodyPr wrap="square" anchor="ctr" lIns="0" rIns="0" tIns="0" bIns="0">
+            <a:spAutoFit/>
+          </a:bodyPr>
+          <a:lstStyle/>
+          <a:p>
+            <a:pPr algn="l"/>
+            <a:r>
+              <a:rPr sz="1300" b="0">
+                <a:solidFill>
+                  <a:srgbClr val="8A8A8A"/>
+                </a:solidFill>
+                <a:latin typeface="Hiragino Kaku Gothic Pro"/>
+                <a:ea typeface="Hiragino Kaku Gothic Pro"/>
+                <a:cs typeface="Hiragino Kaku Gothic Pro"/>
+              </a:rPr>
+              <a:t/>
+            </a:r>
+            <a:r>
+              <a:rPr sz="1300" b="0">
+                <a:solidFill>
+                  <a:srgbClr val="8A8A8A"/>
+                </a:solidFill>
+                <a:latin typeface="Hiragino Kaku Gothic Pro"/>
+                <a:ea typeface="Hiragino Kaku Gothic Pro"/>
+                <a:cs typeface="Hiragino Kaku Gothic Pro"/>
+              </a:rPr>
+              <a:t>50_PermanentNotes</a:t>
+            </a:r>
+          </a:p>
+        </p:txBody>
+      </p:sp>
+      <p:sp>
+        <p:nvSpPr>
+          <p:cNvPr id="16" name="TextBox 15"/>
+          <p:cNvSpPr txBox="1"/>
+          <p:nvPr/>
+        </p:nvSpPr>
+        <p:spPr>
+          <a:xfrm>
+            <a:off x="384048" y="3730752"/>
+            <a:ext cx="2651760" cy="365760"/>
+          </a:xfrm>
+          <a:prstGeom prst="rect">
+            <a:avLst/>
+          </a:prstGeom>
+          <a:noFill/>
+        </p:spPr>
+        <p:txBody>
+          <a:bodyPr wrap="square" anchor="ctr" lIns="0" rIns="0" tIns="0" bIns="0">
+            <a:spAutoFit/>
+          </a:bodyPr>
+          <a:lstStyle/>
+          <a:p>
+            <a:pPr algn="l"/>
+            <a:r>
+              <a:rPr sz="1300" b="0">
+                <a:solidFill>
+                  <a:srgbClr val="8A8A8A"/>
+                </a:solidFill>
+                <a:latin typeface="Hiragino Kaku Gothic Pro"/>
+                <a:ea typeface="Hiragino Kaku Gothic Pro"/>
+                <a:cs typeface="Hiragino Kaku Gothic Pro"/>
+              </a:rPr>
+              <a:t/>
+            </a:r>
+            <a:r>
+              <a:rPr sz="1300" b="0">
+                <a:solidFill>
+                  <a:srgbClr val="8A8A8A"/>
+                </a:solidFill>
+                <a:latin typeface="Hiragino Kaku Gothic Pro"/>
+                <a:ea typeface="Hiragino Kaku Gothic Pro"/>
+                <a:cs typeface="Hiragino Kaku Gothic Pro"/>
+              </a:rPr>
+              <a:t>90_Archive</a:t>
+            </a:r>
+          </a:p>
+        </p:txBody>
+      </p:sp>
+      <p:sp>
+        <p:nvSpPr>
+          <p:cNvPr id="17" name="Rounded Rectangle 16"/>
+          <p:cNvSpPr/>
+          <p:nvPr/>
+        </p:nvSpPr>
+        <p:spPr>
+          <a:xfrm>
+            <a:off x="3246120" y="566928"/>
+            <a:ext cx="8778240" cy="457200"/>
+          </a:xfrm>
+          <a:prstGeom prst="roundRect">
+            <a:avLst>
+              <a:gd name="adj" fmla="val 8000"/>
+            </a:avLst>
+          </a:prstGeom>
+          <a:solidFill>
+            <a:srgbClr val="2A2A2A"/>
+          </a:solidFill>
+          <a:ln>
+            <a:noFill/>
+          </a:ln>
+          <a:effectLst/>
+        </p:spPr>
+        <p:style>
+          <a:lnRef idx="1">
+            <a:schemeClr val="accent1"/>
+          </a:lnRef>
+          <a:fillRef idx="3">
+            <a:schemeClr val="accent1"/>
+          </a:fillRef>
+          <a:effectRef idx="2">
+            <a:schemeClr val="accent1"/>
+          </a:effectRef>
+          <a:fontRef idx="minor">
+            <a:schemeClr val="lt1"/>
+          </a:fontRef>
+        </p:style>
+        <p:txBody>
+          <a:bodyPr rtlCol="0" anchor="ctr"/>
+          <a:lstStyle/>
+          <a:p>
+            <a:pPr algn="ctr"/>
+          </a:p>
+        </p:txBody>
+      </p:sp>
+      <p:sp>
+        <p:nvSpPr>
+          <p:cNvPr id="18" name="TextBox 17"/>
+          <p:cNvSpPr txBox="1"/>
+          <p:nvPr/>
+        </p:nvSpPr>
+        <p:spPr>
+          <a:xfrm>
+            <a:off x="3429000" y="566928"/>
+            <a:ext cx="8412480" cy="457200"/>
+          </a:xfrm>
+          <a:prstGeom prst="rect">
+            <a:avLst/>
+          </a:prstGeom>
+          <a:noFill/>
+        </p:spPr>
+        <p:txBody>
+          <a:bodyPr wrap="square" anchor="ctr" lIns="0" rIns="0" tIns="0" bIns="0">
+            <a:spAutoFit/>
+          </a:bodyPr>
+          <a:lstStyle/>
+          <a:p>
+            <a:pPr algn="l"/>
+            <a:r>
+              <a:rPr sz="1300" b="0">
+                <a:solidFill>
+                  <a:srgbClr val="DCDDDE"/>
+                </a:solidFill>
+                <a:latin typeface="Hiragino Kaku Gothic Pro"/>
+                <a:ea typeface="Hiragino Kaku Gothic Pro"/>
+                <a:cs typeface="Hiragino Kaku Gothic Pro"/>
+              </a:rPr>
+              <a:t>ダッシュボード.md</a:t>
+            </a:r>
+          </a:p>
+        </p:txBody>
+      </p:sp>
+      <p:sp>
+        <p:nvSpPr>
+          <p:cNvPr id="19" name="TextBox 18"/>
+          <p:cNvSpPr txBox="1"/>
+          <p:nvPr/>
+        </p:nvSpPr>
+        <p:spPr>
+          <a:xfrm>
+            <a:off x="3429000" y="1234440"/>
+            <a:ext cx="8412480" cy="548640"/>
+          </a:xfrm>
+          <a:prstGeom prst="rect">
+            <a:avLst/>
+          </a:prstGeom>
+          <a:noFill/>
+        </p:spPr>
+        <p:txBody>
+          <a:bodyPr wrap="square" anchor="t" lIns="0" rIns="0" tIns="0" bIns="0">
+            <a:spAutoFit/>
+          </a:bodyPr>
+          <a:lstStyle/>
+          <a:p>
+            <a:pPr algn="l"/>
+            <a:r>
+              <a:rPr sz="3000" b="1">
+                <a:solidFill>
+                  <a:srgbClr val="DCDDDE"/>
+                </a:solidFill>
+                <a:latin typeface="Hiragino Kaku Gothic Pro"/>
+                <a:ea typeface="Hiragino Kaku Gothic Pro"/>
+                <a:cs typeface="Hiragino Kaku Gothic Pro"/>
+              </a:rPr>
+              <a:t>第二の脳の1日</a:t>
+            </a:r>
+          </a:p>
+        </p:txBody>
+      </p:sp>
+      <p:sp>
+        <p:nvSpPr>
+          <p:cNvPr id="20" name="TextBox 19"/>
+          <p:cNvSpPr txBox="1"/>
+          <p:nvPr/>
+        </p:nvSpPr>
+        <p:spPr>
+          <a:xfrm>
+            <a:off x="3429000" y="1920240"/>
+            <a:ext cx="8412480" cy="411480"/>
+          </a:xfrm>
+          <a:prstGeom prst="rect">
+            <a:avLst/>
+          </a:prstGeom>
+          <a:noFill/>
+        </p:spPr>
+        <p:txBody>
+          <a:bodyPr wrap="square" anchor="t" lIns="0" rIns="0" tIns="0" bIns="0">
+            <a:spAutoFit/>
+          </a:bodyPr>
+          <a:lstStyle/>
+          <a:p>
+            <a:pPr algn="l"/>
+            <a:r>
+              <a:rPr sz="1800" b="1">
+                <a:solidFill>
+                  <a:srgbClr val="8B7CF6"/>
+                </a:solidFill>
+                <a:latin typeface="Hiragino Kaku Gothic Pro"/>
+                <a:ea typeface="Hiragino Kaku Gothic Pro"/>
+                <a:cs typeface="Hiragino Kaku Gothic Pro"/>
+              </a:rPr>
+              <a:t>ためる → つなげる → 引き出す</a:t>
+            </a:r>
+          </a:p>
+        </p:txBody>
+      </p:sp>
+      <p:sp>
+        <p:nvSpPr>
+          <p:cNvPr id="21" name="TextBox 20"/>
+          <p:cNvSpPr txBox="1"/>
+          <p:nvPr/>
+        </p:nvSpPr>
+        <p:spPr>
+          <a:xfrm>
+            <a:off x="3611880" y="2423160"/>
+            <a:ext cx="8229600" cy="384048"/>
+          </a:xfrm>
+          <a:prstGeom prst="rect">
+            <a:avLst/>
+          </a:prstGeom>
+          <a:noFill/>
+        </p:spPr>
+        <p:txBody>
+          <a:bodyPr wrap="square" anchor="t" lIns="0" rIns="0" tIns="0" bIns="0">
+            <a:spAutoFit/>
+          </a:bodyPr>
+          <a:lstStyle/>
+          <a:p>
+            <a:pPr algn="l"/>
+            <a:r>
+              <a:rPr sz="1600" b="0">
+                <a:solidFill>
+                  <a:srgbClr val="DCDDDE"/>
+                </a:solidFill>
+                <a:latin typeface="Hiragino Kaku Gothic Pro"/>
+                <a:ea typeface="Hiragino Kaku Gothic Pro"/>
+                <a:cs typeface="Hiragino Kaku Gothic Pro"/>
+              </a:rPr>
+              <a:t>・ためる：思いつきを Inbox へ（手で一行）</a:t>
+            </a:r>
+          </a:p>
+        </p:txBody>
+      </p:sp>
+      <p:sp>
+        <p:nvSpPr>
+          <p:cNvPr id="22" name="TextBox 21"/>
+          <p:cNvSpPr txBox="1"/>
+          <p:nvPr/>
+        </p:nvSpPr>
+        <p:spPr>
+          <a:xfrm>
+            <a:off x="3611880" y="2880360"/>
+            <a:ext cx="8229600" cy="384048"/>
+          </a:xfrm>
+          <a:prstGeom prst="rect">
+            <a:avLst/>
+          </a:prstGeom>
+          <a:noFill/>
+        </p:spPr>
+        <p:txBody>
+          <a:bodyPr wrap="square" anchor="t" lIns="0" rIns="0" tIns="0" bIns="0">
+            <a:spAutoFit/>
+          </a:bodyPr>
+          <a:lstStyle/>
+          <a:p>
+            <a:pPr algn="l"/>
+            <a:r>
+              <a:rPr sz="1600" b="0">
+                <a:solidFill>
+                  <a:srgbClr val="DCDDDE"/>
+                </a:solidFill>
+                <a:latin typeface="Hiragino Kaku Gothic Pro"/>
+                <a:ea typeface="Hiragino Kaku Gothic Pro"/>
+                <a:cs typeface="Hiragino Kaku Gothic Pro"/>
+              </a:rPr>
+              <a:t>・つなげる：自分の言葉で Permanent＋[[リンク]]</a:t>
+            </a:r>
+          </a:p>
+        </p:txBody>
+      </p:sp>
+      <p:sp>
+        <p:nvSpPr>
+          <p:cNvPr id="23" name="TextBox 22"/>
+          <p:cNvSpPr txBox="1"/>
+          <p:nvPr/>
+        </p:nvSpPr>
+        <p:spPr>
+          <a:xfrm>
+            <a:off x="3611880" y="3337560"/>
+            <a:ext cx="8229600" cy="384048"/>
+          </a:xfrm>
+          <a:prstGeom prst="rect">
+            <a:avLst/>
+          </a:prstGeom>
+          <a:noFill/>
+        </p:spPr>
+        <p:txBody>
+          <a:bodyPr wrap="square" anchor="t" lIns="0" rIns="0" tIns="0" bIns="0">
+            <a:spAutoFit/>
+          </a:bodyPr>
+          <a:lstStyle/>
+          <a:p>
+            <a:pPr algn="l"/>
+            <a:r>
+              <a:rPr sz="1600" b="0">
+                <a:solidFill>
+                  <a:srgbClr val="DCDDDE"/>
+                </a:solidFill>
+                <a:latin typeface="Hiragino Kaku Gothic Pro"/>
+                <a:ea typeface="Hiragino Kaku Gothic Pro"/>
+                <a:cs typeface="Hiragino Kaku Gothic Pro"/>
+              </a:rPr>
+              <a:t>・引き出す：AI に一言（/ask-vault・横断検索）</a:t>
+            </a:r>
+          </a:p>
+        </p:txBody>
+      </p:sp>
+      <p:sp>
+        <p:nvSpPr>
+          <p:cNvPr id="24" name="TextBox 23"/>
+          <p:cNvSpPr txBox="1"/>
+          <p:nvPr/>
+        </p:nvSpPr>
+        <p:spPr>
+          <a:xfrm>
+            <a:off x="3429000" y="3794760"/>
+            <a:ext cx="8412480" cy="384048"/>
+          </a:xfrm>
+          <a:prstGeom prst="rect">
+            <a:avLst/>
+          </a:prstGeom>
+          <a:noFill/>
+        </p:spPr>
+        <p:txBody>
+          <a:bodyPr wrap="square" anchor="t" lIns="0" rIns="0" tIns="0" bIns="0">
+            <a:spAutoFit/>
+          </a:bodyPr>
+          <a:lstStyle/>
+          <a:p>
+            <a:pPr algn="l"/>
+            <a:r>
+              <a:rPr sz="1300" b="0">
+                <a:solidFill>
+                  <a:srgbClr val="8A8A8A"/>
+                </a:solidFill>
+                <a:latin typeface="Hiragino Kaku Gothic Pro"/>
+                <a:ea typeface="Hiragino Kaku Gothic Pro"/>
+                <a:cs typeface="Hiragino Kaku Gothic Pro"/>
+              </a:rPr>
+              <a:t>小さく始めれば、今日からあなたも動かせる</a:t>
             </a:r>
           </a:p>
         </p:txBody>
